--- a/Aahaar_Patent_Presentation.pptx
+++ b/Aahaar_Patent_Presentation.pptx
@@ -13,6 +13,8 @@
     <p:sldId id="261" r:id="rId12"/>
     <p:sldId id="262" r:id="rId13"/>
     <p:sldId id="263" r:id="rId14"/>
+    <p:sldId id="264" r:id="rId15"/>
+    <p:sldId id="265" r:id="rId16"/>
   </p:sldIdLst>
   <p:sldSz cx="12191695" cy="6858000" type="screen4x3"/>
   <p:notesSz cx="6858000" cy="9144000"/>
@@ -3220,7 +3222,7 @@
               <a:spcBef>
                 <a:spcPts val="800"/>
               </a:spcBef>
-              <a:defRPr sz="1900" b="1">
+              <a:defRPr sz="2000" b="1">
                 <a:solidFill>
                   <a:srgbClr val="F97316"/>
                 </a:solidFill>
@@ -3228,7 +3230,7 @@
               </a:defRPr>
             </a:pPr>
             <a:r>
-              <a:t>Zero Waste. Zero Hunger. Fully Verified.</a:t>
+              <a:t>Smart Food Donation &amp; Distribution Platform</a:t>
             </a:r>
           </a:p>
           <a:p>
@@ -3244,7 +3246,7 @@
               </a:defRPr>
             </a:pPr>
             <a:r>
-              <a:t>A Unified B2B SaaS Enterprise Ecosystem Orchestrating Surplus Redirection, Cryptographic Verification, and Compliance Automation</a:t>
+              <a:t>Mini Project Presentation | Department of CSE (Data Science) | ABES Engineering College</a:t>
             </a:r>
           </a:p>
         </p:txBody>
@@ -3257,8 +3259,8 @@
         </p:nvSpPr>
         <p:spPr>
           <a:xfrm>
-            <a:off x="1188720" y="4297680"/>
-            <a:ext cx="9144000" cy="1371600"/>
+            <a:off x="1188720" y="4114800"/>
+            <a:ext cx="9144000" cy="1645920"/>
           </a:xfrm>
           <a:prstGeom prst="rect">
             <a:avLst/>
@@ -3280,7 +3282,7 @@
               </a:defRPr>
             </a:pPr>
             <a:r>
-              <a:t>Presenter: Santosh Patel | Department of Computer Science &amp; Engineering</a:t>
+              <a:t>Prepared By: Group G-29 | Santosh Patel &amp; Team</a:t>
             </a:r>
           </a:p>
           <a:p>
@@ -3288,7 +3290,7 @@
               <a:spcBef>
                 <a:spcPts val="400"/>
               </a:spcBef>
-              <a:defRPr sz="1200">
+              <a:defRPr sz="1250">
                 <a:solidFill>
                   <a:srgbClr val="475569"/>
                 </a:solidFill>
@@ -3296,15 +3298,112 @@
               </a:defRPr>
             </a:pPr>
             <a:r>
-              <a:t>ABES Engineering College | Spark Fellowship Selection Challenge</a:t>
-            </a:r>
-          </a:p>
-          <a:p>
-            <a:pPr>
+              <a:t>Project Guide: CSE Dept. Faculty Coordinator</a:t>
+            </a:r>
+          </a:p>
+        </p:txBody>
+      </p:sp>
+    </p:spTree>
+  </p:cSld>
+  <p:clrMapOvr>
+    <a:masterClrMapping/>
+  </p:clrMapOvr>
+</p:sld>
+</file>
+
+<file path=ppt/slides/slide10.xml><?xml version="1.0" encoding="utf-8"?>
+<p:sld xmlns:a="http://schemas.openxmlformats.org/drawingml/2006/main" xmlns:p="http://schemas.openxmlformats.org/presentationml/2006/main" xmlns:r="http://schemas.openxmlformats.org/officeDocument/2006/relationships">
+  <p:cSld>
+    <p:spTree>
+      <p:nvGrpSpPr>
+        <p:cNvPr id="1" name=""/>
+        <p:cNvGrpSpPr/>
+        <p:nvPr/>
+      </p:nvGrpSpPr>
+      <p:grpSpPr/>
+      <p:sp>
+        <p:nvSpPr>
+          <p:cNvPr id="2" name="Rectangle 1"/>
+          <p:cNvSpPr/>
+          <p:nvPr/>
+        </p:nvSpPr>
+        <p:spPr>
+          <a:xfrm>
+            <a:off x="0" y="0"/>
+            <a:ext cx="12191695" cy="6858000"/>
+          </a:xfrm>
+          <a:prstGeom prst="rect">
+            <a:avLst/>
+          </a:prstGeom>
+          <a:solidFill>
+            <a:srgbClr val="0A0F1E"/>
+          </a:solidFill>
+          <a:ln>
+            <a:noFill/>
+          </a:ln>
+        </p:spPr>
+        <p:style>
+          <a:lnRef idx="1">
+            <a:schemeClr val="accent1"/>
+          </a:lnRef>
+          <a:fillRef idx="3">
+            <a:schemeClr val="accent1"/>
+          </a:fillRef>
+          <a:effectRef idx="2">
+            <a:schemeClr val="accent1"/>
+          </a:effectRef>
+          <a:fontRef idx="minor">
+            <a:schemeClr val="lt1"/>
+          </a:fontRef>
+        </p:style>
+        <p:txBody>
+          <a:bodyPr rtlCol="0" anchor="ctr"/>
+          <a:lstStyle/>
+          <a:p>
+            <a:pPr algn="ctr"/>
+          </a:p>
+        </p:txBody>
+      </p:sp>
+      <p:sp>
+        <p:nvSpPr>
+          <p:cNvPr id="3" name="TextBox 2"/>
+          <p:cNvSpPr txBox="1"/>
+          <p:nvPr/>
+        </p:nvSpPr>
+        <p:spPr>
+          <a:xfrm>
+            <a:off x="914400" y="1371600"/>
+            <a:ext cx="10362895" cy="1097280"/>
+          </a:xfrm>
+          <a:prstGeom prst="rect">
+            <a:avLst/>
+          </a:prstGeom>
+          <a:noFill/>
+        </p:spPr>
+        <p:txBody>
+          <a:bodyPr wrap="square">
+            <a:spAutoFit/>
+          </a:bodyPr>
+          <a:lstStyle/>
+          <a:p>
+            <a:pPr algn="ctr">
+              <a:defRPr sz="5400" b="1">
+                <a:solidFill>
+                  <a:srgbClr val="FFFFFF"/>
+                </a:solidFill>
+                <a:latin typeface="Plus Jakarta Sans"/>
+              </a:defRPr>
+            </a:pPr>
+            <a:r>
+              <a:t>THANK YOU!</a:t>
+            </a:r>
+          </a:p>
+          <a:p>
+            <a:pPr algn="ctr">
               <a:spcBef>
                 <a:spcPts val="800"/>
               </a:spcBef>
-              <a:defRPr sz="1050" i="1">
+              <a:defRPr sz="1800" b="1">
                 <a:solidFill>
                   <a:srgbClr val="F97316"/>
                 </a:solidFill>
@@ -3312,7 +3411,108 @@
               </a:defRPr>
             </a:pPr>
             <a:r>
-              <a:t>IP Status: Patent-Pending Technology (System &amp; Method for Secure Real-time Surplus Logistics Verification)</a:t>
+              <a:t>Questions &amp; Discussions</a:t>
+            </a:r>
+          </a:p>
+        </p:txBody>
+      </p:sp>
+      <p:sp>
+        <p:nvSpPr>
+          <p:cNvPr id="4" name="TextBox 3"/>
+          <p:cNvSpPr txBox="1"/>
+          <p:nvPr/>
+        </p:nvSpPr>
+        <p:spPr>
+          <a:xfrm>
+            <a:off x="1828800" y="3291840"/>
+            <a:ext cx="8534095" cy="1828800"/>
+          </a:xfrm>
+          <a:prstGeom prst="rect">
+            <a:avLst/>
+          </a:prstGeom>
+          <a:noFill/>
+        </p:spPr>
+        <p:txBody>
+          <a:bodyPr wrap="square">
+            <a:spAutoFit/>
+          </a:bodyPr>
+          <a:lstStyle/>
+          <a:p>
+            <a:pPr algn="ctr">
+              <a:spcAft>
+                <a:spcPts val="1200"/>
+              </a:spcAft>
+              <a:defRPr sz="1400">
+                <a:solidFill>
+                  <a:srgbClr val="FFFFFF"/>
+                </a:solidFill>
+              </a:defRPr>
+            </a:pPr>
+            <a:r>
+              <a:t>Email Contact: santosh.patel@abes.ac.in</a:t>
+            </a:r>
+          </a:p>
+          <a:p>
+            <a:pPr algn="ctr">
+              <a:spcAft>
+                <a:spcPts val="1200"/>
+              </a:spcAft>
+              <a:defRPr sz="1300">
+                <a:solidFill>
+                  <a:srgbClr val="475569"/>
+                </a:solidFill>
+              </a:defRPr>
+            </a:pPr>
+            <a:r>
+              <a:t>GitHub Repository: github.com/Santoshpatel112/Aahaar</a:t>
+            </a:r>
+          </a:p>
+          <a:p>
+            <a:pPr algn="ctr">
+              <a:defRPr sz="1300">
+                <a:solidFill>
+                  <a:srgbClr val="475569"/>
+                </a:solidFill>
+              </a:defRPr>
+            </a:pPr>
+            <a:r>
+              <a:t>LinkedIn Profile: linkedin.com/in/santoshpatel</a:t>
+            </a:r>
+          </a:p>
+        </p:txBody>
+      </p:sp>
+      <p:sp>
+        <p:nvSpPr>
+          <p:cNvPr id="5" name="TextBox 4"/>
+          <p:cNvSpPr txBox="1"/>
+          <p:nvPr/>
+        </p:nvSpPr>
+        <p:spPr>
+          <a:xfrm>
+            <a:off x="914400" y="5852160"/>
+            <a:ext cx="10362895" cy="457200"/>
+          </a:xfrm>
+          <a:prstGeom prst="rect">
+            <a:avLst/>
+          </a:prstGeom>
+          <a:noFill/>
+        </p:spPr>
+        <p:txBody>
+          <a:bodyPr wrap="square">
+            <a:spAutoFit/>
+          </a:bodyPr>
+          <a:lstStyle/>
+          <a:p>
+            <a:pPr algn="ctr">
+              <a:defRPr sz="1050">
+                <a:solidFill>
+                  <a:srgbClr val="475569"/>
+                </a:solidFill>
+                <a:latin typeface="Plus Jakarta Sans"/>
+              </a:defRPr>
+            </a:pPr>
+            <a:r>
+              <a:t>ABES Engineering College  •  Mini Project Evaluation  •  Group G-29</a:t>
             </a:r>
           </a:p>
         </p:txBody>
@@ -3409,7 +3609,7 @@
               </a:defRPr>
             </a:pPr>
             <a:r>
-              <a:t>SECTION 01: STRATEGIC VISION</a:t>
+              <a:t>SECTION 01: PROJECT OVERVIEW</a:t>
             </a:r>
           </a:p>
         </p:txBody>
@@ -3445,7 +3645,7 @@
               </a:defRPr>
             </a:pPr>
             <a:r>
-              <a:t>The Food Waste &amp; Trust Paradox</a:t>
+              <a:t>Problem Statement &amp; Gaps</a:t>
             </a:r>
           </a:p>
         </p:txBody>
@@ -3501,7 +3701,7 @@
             <a:avLst/>
           </a:prstGeom>
           <a:solidFill>
-            <a:srgbClr val="E2E8F0"/>
+            <a:srgbClr val="2563EB"/>
           </a:solidFill>
           <a:ln>
             <a:noFill/>
@@ -3529,40 +3729,16 @@
           </a:p>
         </p:txBody>
       </p:sp>
-      <p:pic>
-        <p:nvPicPr>
-          <p:cNvPr id="7" name="Picture 6" descr="aahaar_versus_traditional.png"/>
-          <p:cNvPicPr>
-            <a:picLocks noChangeAspect="1"/>
-          </p:cNvPicPr>
-          <p:nvPr/>
-        </p:nvPicPr>
-        <p:blipFill>
-          <a:blip r:embed="rId2"/>
-          <a:stretch>
-            <a:fillRect/>
-          </a:stretch>
-        </p:blipFill>
-        <p:spPr>
-          <a:xfrm>
-            <a:off x="731520" y="1463040"/>
-            <a:ext cx="4572000" cy="4572000"/>
-          </a:xfrm>
-          <a:prstGeom prst="rect">
-            <a:avLst/>
-          </a:prstGeom>
-        </p:spPr>
-      </p:pic>
-      <p:sp>
-        <p:nvSpPr>
-          <p:cNvPr id="8" name="Rounded Rectangle 7"/>
+      <p:sp>
+        <p:nvSpPr>
+          <p:cNvPr id="7" name="Rounded Rectangle 6"/>
           <p:cNvSpPr/>
           <p:nvPr/>
         </p:nvSpPr>
         <p:spPr>
           <a:xfrm>
-            <a:off x="5943600" y="1463040"/>
-            <a:ext cx="5486400" cy="4572000"/>
+            <a:off x="731520" y="1645920"/>
+            <a:ext cx="5029200" cy="4572000"/>
           </a:xfrm>
           <a:prstGeom prst="roundRect">
             <a:avLst>
@@ -3602,20 +3778,20 @@
       </p:sp>
       <p:sp>
         <p:nvSpPr>
-          <p:cNvPr id="9" name="Rectangle 8"/>
+          <p:cNvPr id="8" name="Rectangle 7"/>
           <p:cNvSpPr/>
           <p:nvPr/>
         </p:nvSpPr>
         <p:spPr>
           <a:xfrm>
-            <a:off x="5943600" y="1572768"/>
+            <a:off x="731520" y="1755648"/>
             <a:ext cx="73152" cy="4352544"/>
           </a:xfrm>
           <a:prstGeom prst="rect">
             <a:avLst/>
           </a:prstGeom>
           <a:solidFill>
-            <a:srgbClr val="F97316"/>
+            <a:srgbClr val="2563EB"/>
           </a:solidFill>
           <a:ln>
             <a:noFill/>
@@ -3645,14 +3821,14 @@
       </p:sp>
       <p:sp>
         <p:nvSpPr>
-          <p:cNvPr id="10" name="TextBox 9"/>
+          <p:cNvPr id="9" name="TextBox 8"/>
           <p:cNvSpPr txBox="1"/>
           <p:nvPr/>
         </p:nvSpPr>
         <p:spPr>
           <a:xfrm>
-            <a:off x="6217920" y="1645920"/>
-            <a:ext cx="4937760" cy="4206240"/>
+            <a:off x="1005840" y="1828800"/>
+            <a:ext cx="4480560" cy="4206240"/>
           </a:xfrm>
           <a:prstGeom prst="rect">
             <a:avLst/>
@@ -3677,7 +3853,7 @@
               </a:defRPr>
             </a:pPr>
             <a:r>
-              <a:t>Solving the Operational Bottlenecks</a:t>
+              <a:t>Key Operational Challenges</a:t>
             </a:r>
           </a:p>
           <a:p>
@@ -3696,7 +3872,7 @@
               </a:defRPr>
             </a:pPr>
             <a:r>
-              <a:t>•  Traditional charity networks rely on manual entries, leading to data manipulation and food loss.</a:t>
+              <a:t>•  Huge amount of food wasted daily in banquets, hotels, and corporate environments.</a:t>
             </a:r>
           </a:p>
           <a:p>
@@ -3715,7 +3891,7 @@
               </a:defRPr>
             </a:pPr>
             <a:r>
-              <a:t>•  Lack of proof-of-delivery creates verification disputes between donors and NGOs.</a:t>
+              <a:t>•  NGOs struggle to coordinate pickups due to poor communication models.</a:t>
             </a:r>
           </a:p>
           <a:p>
@@ -3734,7 +3910,7 @@
               </a:defRPr>
             </a:pPr>
             <a:r>
-              <a:t>•  Direct food donations typically fail to secure Section 80G corporate tax benefits.</a:t>
+              <a:t>•  No real-time tracking of food status, resulting in decay or logistics disputes.</a:t>
             </a:r>
           </a:p>
           <a:p>
@@ -3753,7 +3929,349 @@
               </a:defRPr>
             </a:pPr>
             <a:r>
-              <a:t>•  Aahaar resolves these limitations with blockchain trust, QR verification, and structured tax metrics.</a:t>
+              <a:t>•  Lack of transparency and verified systems causes donor trust deficit.</a:t>
+            </a:r>
+          </a:p>
+          <a:p>
+            <a:pPr>
+              <a:lnSpc>
+                <a:spcPct val="105000"/>
+              </a:lnSpc>
+              <a:spcAft>
+                <a:spcPts val="500"/>
+              </a:spcAft>
+              <a:defRPr sz="1050">
+                <a:solidFill>
+                  <a:srgbClr val="475569"/>
+                </a:solidFill>
+                <a:latin typeface="Plus Jakarta Sans"/>
+              </a:defRPr>
+            </a:pPr>
+            <a:r>
+              <a:t>•  No financial value conversion or Section 80G tax benefit links.</a:t>
+            </a:r>
+          </a:p>
+        </p:txBody>
+      </p:sp>
+      <p:sp>
+        <p:nvSpPr>
+          <p:cNvPr id="10" name="Rounded Rectangle 9"/>
+          <p:cNvSpPr/>
+          <p:nvPr/>
+        </p:nvSpPr>
+        <p:spPr>
+          <a:xfrm>
+            <a:off x="6217920" y="1645920"/>
+            <a:ext cx="5212080" cy="4572000"/>
+          </a:xfrm>
+          <a:prstGeom prst="roundRect">
+            <a:avLst/>
+          </a:prstGeom>
+          <a:solidFill>
+            <a:srgbClr val="FFFFFF"/>
+          </a:solidFill>
+          <a:ln w="19050">
+            <a:solidFill>
+              <a:srgbClr val="E2E8F0"/>
+            </a:solidFill>
+          </a:ln>
+        </p:spPr>
+        <p:style>
+          <a:lnRef idx="1">
+            <a:schemeClr val="accent1"/>
+          </a:lnRef>
+          <a:fillRef idx="3">
+            <a:schemeClr val="accent1"/>
+          </a:fillRef>
+          <a:effectRef idx="2">
+            <a:schemeClr val="accent1"/>
+          </a:effectRef>
+          <a:fontRef idx="minor">
+            <a:schemeClr val="lt1"/>
+          </a:fontRef>
+        </p:style>
+        <p:txBody>
+          <a:bodyPr rtlCol="0" anchor="ctr"/>
+          <a:lstStyle/>
+          <a:p>
+            <a:pPr algn="ctr"/>
+          </a:p>
+        </p:txBody>
+      </p:sp>
+      <p:sp>
+        <p:nvSpPr>
+          <p:cNvPr id="11" name="TextBox 10"/>
+          <p:cNvSpPr txBox="1"/>
+          <p:nvPr/>
+        </p:nvSpPr>
+        <p:spPr>
+          <a:xfrm>
+            <a:off x="6492240" y="1920240"/>
+            <a:ext cx="4663440" cy="457200"/>
+          </a:xfrm>
+          <a:prstGeom prst="rect">
+            <a:avLst/>
+          </a:prstGeom>
+          <a:noFill/>
+        </p:spPr>
+        <p:txBody>
+          <a:bodyPr wrap="square">
+            <a:spAutoFit/>
+          </a:bodyPr>
+          <a:lstStyle/>
+          <a:p>
+            <a:pPr>
+              <a:defRPr sz="1500" b="1">
+                <a:solidFill>
+                  <a:srgbClr val="0F172A"/>
+                </a:solidFill>
+                <a:latin typeface="Plus Jakarta Sans"/>
+              </a:defRPr>
+            </a:pPr>
+            <a:r>
+              <a:t>Traditional Food Loss Flow</a:t>
+            </a:r>
+          </a:p>
+        </p:txBody>
+      </p:sp>
+      <p:sp>
+        <p:nvSpPr>
+          <p:cNvPr id="12" name="Rounded Rectangle 11"/>
+          <p:cNvSpPr/>
+          <p:nvPr/>
+        </p:nvSpPr>
+        <p:spPr>
+          <a:xfrm>
+            <a:off x="7589520" y="2468880"/>
+            <a:ext cx="2468880" cy="640080"/>
+          </a:xfrm>
+          <a:prstGeom prst="roundRect">
+            <a:avLst/>
+          </a:prstGeom>
+          <a:solidFill>
+            <a:srgbClr val="2563EB"/>
+          </a:solidFill>
+          <a:ln>
+            <a:noFill/>
+          </a:ln>
+        </p:spPr>
+        <p:style>
+          <a:lnRef idx="1">
+            <a:schemeClr val="accent1"/>
+          </a:lnRef>
+          <a:fillRef idx="3">
+            <a:schemeClr val="accent1"/>
+          </a:fillRef>
+          <a:effectRef idx="2">
+            <a:schemeClr val="accent1"/>
+          </a:effectRef>
+          <a:fontRef idx="minor">
+            <a:schemeClr val="lt1"/>
+          </a:fontRef>
+        </p:style>
+        <p:txBody>
+          <a:bodyPr rtlCol="0" anchor="ctr"/>
+          <a:lstStyle/>
+          <a:p>
+            <a:pPr algn="ctr">
+              <a:defRPr sz="1150" b="1">
+                <a:solidFill>
+                  <a:srgbClr val="FFFFFF"/>
+                </a:solidFill>
+              </a:defRPr>
+            </a:pPr>
+            <a:r>
+              <a:t>1. Restaurants &amp; Banquets</a:t>
+            </a:r>
+          </a:p>
+        </p:txBody>
+      </p:sp>
+      <p:sp>
+        <p:nvSpPr>
+          <p:cNvPr id="13" name="Down Arrow 12"/>
+          <p:cNvSpPr/>
+          <p:nvPr/>
+        </p:nvSpPr>
+        <p:spPr>
+          <a:xfrm>
+            <a:off x="8641080" y="3200400"/>
+            <a:ext cx="365760" cy="274320"/>
+          </a:xfrm>
+          <a:prstGeom prst="downArrow">
+            <a:avLst/>
+          </a:prstGeom>
+          <a:solidFill>
+            <a:srgbClr val="2563EB"/>
+          </a:solidFill>
+          <a:ln>
+            <a:noFill/>
+          </a:ln>
+        </p:spPr>
+        <p:style>
+          <a:lnRef idx="1">
+            <a:schemeClr val="accent1"/>
+          </a:lnRef>
+          <a:fillRef idx="3">
+            <a:schemeClr val="accent1"/>
+          </a:fillRef>
+          <a:effectRef idx="2">
+            <a:schemeClr val="accent1"/>
+          </a:effectRef>
+          <a:fontRef idx="minor">
+            <a:schemeClr val="lt1"/>
+          </a:fontRef>
+        </p:style>
+        <p:txBody>
+          <a:bodyPr rtlCol="0" anchor="ctr"/>
+          <a:lstStyle/>
+          <a:p>
+            <a:pPr algn="ctr"/>
+          </a:p>
+        </p:txBody>
+      </p:sp>
+      <p:sp>
+        <p:nvSpPr>
+          <p:cNvPr id="14" name="Rounded Rectangle 13"/>
+          <p:cNvSpPr/>
+          <p:nvPr/>
+        </p:nvSpPr>
+        <p:spPr>
+          <a:xfrm>
+            <a:off x="7589520" y="3566160"/>
+            <a:ext cx="2468880" cy="640080"/>
+          </a:xfrm>
+          <a:prstGeom prst="roundRect">
+            <a:avLst/>
+          </a:prstGeom>
+          <a:solidFill>
+            <a:srgbClr val="F97316"/>
+          </a:solidFill>
+          <a:ln>
+            <a:noFill/>
+          </a:ln>
+        </p:spPr>
+        <p:style>
+          <a:lnRef idx="1">
+            <a:schemeClr val="accent1"/>
+          </a:lnRef>
+          <a:fillRef idx="3">
+            <a:schemeClr val="accent1"/>
+          </a:fillRef>
+          <a:effectRef idx="2">
+            <a:schemeClr val="accent1"/>
+          </a:effectRef>
+          <a:fontRef idx="minor">
+            <a:schemeClr val="lt1"/>
+          </a:fontRef>
+        </p:style>
+        <p:txBody>
+          <a:bodyPr rtlCol="0" anchor="ctr"/>
+          <a:lstStyle/>
+          <a:p>
+            <a:pPr algn="ctr">
+              <a:defRPr sz="1150" b="1">
+                <a:solidFill>
+                  <a:srgbClr val="FFFFFF"/>
+                </a:solidFill>
+              </a:defRPr>
+            </a:pPr>
+            <a:r>
+              <a:t>2. Unutilized Food Waste</a:t>
+            </a:r>
+          </a:p>
+        </p:txBody>
+      </p:sp>
+      <p:sp>
+        <p:nvSpPr>
+          <p:cNvPr id="15" name="Down Arrow 14"/>
+          <p:cNvSpPr/>
+          <p:nvPr/>
+        </p:nvSpPr>
+        <p:spPr>
+          <a:xfrm>
+            <a:off x="8641080" y="4297680"/>
+            <a:ext cx="365760" cy="274320"/>
+          </a:xfrm>
+          <a:prstGeom prst="downArrow">
+            <a:avLst/>
+          </a:prstGeom>
+          <a:solidFill>
+            <a:srgbClr val="2563EB"/>
+          </a:solidFill>
+          <a:ln>
+            <a:noFill/>
+          </a:ln>
+        </p:spPr>
+        <p:style>
+          <a:lnRef idx="1">
+            <a:schemeClr val="accent1"/>
+          </a:lnRef>
+          <a:fillRef idx="3">
+            <a:schemeClr val="accent1"/>
+          </a:fillRef>
+          <a:effectRef idx="2">
+            <a:schemeClr val="accent1"/>
+          </a:effectRef>
+          <a:fontRef idx="minor">
+            <a:schemeClr val="lt1"/>
+          </a:fontRef>
+        </p:style>
+        <p:txBody>
+          <a:bodyPr rtlCol="0" anchor="ctr"/>
+          <a:lstStyle/>
+          <a:p>
+            <a:pPr algn="ctr"/>
+          </a:p>
+        </p:txBody>
+      </p:sp>
+      <p:sp>
+        <p:nvSpPr>
+          <p:cNvPr id="16" name="Rounded Rectangle 15"/>
+          <p:cNvSpPr/>
+          <p:nvPr/>
+        </p:nvSpPr>
+        <p:spPr>
+          <a:xfrm>
+            <a:off x="7589520" y="4663440"/>
+            <a:ext cx="2468880" cy="640080"/>
+          </a:xfrm>
+          <a:prstGeom prst="roundRect">
+            <a:avLst/>
+          </a:prstGeom>
+          <a:solidFill>
+            <a:srgbClr val="16A34A"/>
+          </a:solidFill>
+          <a:ln>
+            <a:noFill/>
+          </a:ln>
+        </p:spPr>
+        <p:style>
+          <a:lnRef idx="1">
+            <a:schemeClr val="accent1"/>
+          </a:lnRef>
+          <a:fillRef idx="3">
+            <a:schemeClr val="accent1"/>
+          </a:fillRef>
+          <a:effectRef idx="2">
+            <a:schemeClr val="accent1"/>
+          </a:effectRef>
+          <a:fontRef idx="minor">
+            <a:schemeClr val="lt1"/>
+          </a:fontRef>
+        </p:style>
+        <p:txBody>
+          <a:bodyPr rtlCol="0" anchor="ctr"/>
+          <a:lstStyle/>
+          <a:p>
+            <a:pPr algn="ctr">
+              <a:defRPr sz="1150" b="1">
+                <a:solidFill>
+                  <a:srgbClr val="FFFFFF"/>
+                </a:solidFill>
+              </a:defRPr>
+            </a:pPr>
+            <a:r>
+              <a:t>3. Underprivileged Citizens</a:t>
             </a:r>
           </a:p>
         </p:txBody>
@@ -3850,7 +4368,7 @@
               </a:defRPr>
             </a:pPr>
             <a:r>
-              <a:t>SECTION 01: STRATEGIC VISION</a:t>
+              <a:t>SECTION 01: PROJECT OVERVIEW</a:t>
             </a:r>
           </a:p>
         </p:txBody>
@@ -3886,7 +4404,7 @@
               </a:defRPr>
             </a:pPr>
             <a:r>
-              <a:t>Aahaar Platform Ecosystem Mind Map</a:t>
+              <a:t>Proposed Solution: AAHAAR Platform</a:t>
             </a:r>
           </a:p>
         </p:txBody>
@@ -3942,7 +4460,7 @@
             <a:avLst/>
           </a:prstGeom>
           <a:solidFill>
-            <a:srgbClr val="E2E8F0"/>
+            <a:srgbClr val="2563EB"/>
           </a:solidFill>
           <a:ln>
             <a:noFill/>
@@ -3970,40 +4488,16 @@
           </a:p>
         </p:txBody>
       </p:sp>
-      <p:pic>
-        <p:nvPicPr>
-          <p:cNvPr id="7" name="Picture 6" descr="aahaar_mindmap_real_logo.png"/>
-          <p:cNvPicPr>
-            <a:picLocks noChangeAspect="1"/>
-          </p:cNvPicPr>
-          <p:nvPr/>
-        </p:nvPicPr>
-        <p:blipFill>
-          <a:blip r:embed="rId2"/>
-          <a:stretch>
-            <a:fillRect/>
-          </a:stretch>
-        </p:blipFill>
-        <p:spPr>
-          <a:xfrm>
-            <a:off x="731520" y="1463040"/>
-            <a:ext cx="4572000" cy="4572000"/>
-          </a:xfrm>
-          <a:prstGeom prst="rect">
-            <a:avLst/>
-          </a:prstGeom>
-        </p:spPr>
-      </p:pic>
-      <p:sp>
-        <p:nvSpPr>
-          <p:cNvPr id="8" name="Rounded Rectangle 7"/>
+      <p:sp>
+        <p:nvSpPr>
+          <p:cNvPr id="7" name="Rounded Rectangle 6"/>
           <p:cNvSpPr/>
           <p:nvPr/>
         </p:nvSpPr>
         <p:spPr>
           <a:xfrm>
-            <a:off x="5943600" y="1463040"/>
-            <a:ext cx="5486400" cy="4572000"/>
+            <a:off x="731520" y="1645920"/>
+            <a:ext cx="5029200" cy="4572000"/>
           </a:xfrm>
           <a:prstGeom prst="roundRect">
             <a:avLst>
@@ -4043,20 +4537,20 @@
       </p:sp>
       <p:sp>
         <p:nvSpPr>
-          <p:cNvPr id="9" name="Rectangle 8"/>
+          <p:cNvPr id="8" name="Rectangle 7"/>
           <p:cNvSpPr/>
           <p:nvPr/>
         </p:nvSpPr>
         <p:spPr>
           <a:xfrm>
-            <a:off x="5943600" y="1572768"/>
+            <a:off x="731520" y="1755648"/>
             <a:ext cx="73152" cy="4352544"/>
           </a:xfrm>
           <a:prstGeom prst="rect">
             <a:avLst/>
           </a:prstGeom>
           <a:solidFill>
-            <a:srgbClr val="22C55E"/>
+            <a:srgbClr val="16A34A"/>
           </a:solidFill>
           <a:ln>
             <a:noFill/>
@@ -4086,14 +4580,14 @@
       </p:sp>
       <p:sp>
         <p:nvSpPr>
-          <p:cNvPr id="10" name="TextBox 9"/>
+          <p:cNvPr id="9" name="TextBox 8"/>
           <p:cNvSpPr txBox="1"/>
           <p:nvPr/>
         </p:nvSpPr>
         <p:spPr>
           <a:xfrm>
-            <a:off x="6217920" y="1645920"/>
-            <a:ext cx="4937760" cy="4206240"/>
+            <a:off x="1005840" y="1828800"/>
+            <a:ext cx="4480560" cy="4206240"/>
           </a:xfrm>
           <a:prstGeom prst="rect">
             <a:avLst/>
@@ -4118,7 +4612,7 @@
               </a:defRPr>
             </a:pPr>
             <a:r>
-              <a:t>Core Ecosystem Connections</a:t>
+              <a:t>Aahaar Core Architecture</a:t>
             </a:r>
           </a:p>
           <a:p>
@@ -4137,7 +4631,7 @@
               </a:defRPr>
             </a:pPr>
             <a:r>
-              <a:t>•  Donors: Corporate offices, hotels, and event venues list surplus food on the portal.</a:t>
+              <a:t>•  A unified web application bridging the gap between food donors and NGOs.</a:t>
             </a:r>
           </a:p>
           <a:p>
@@ -4156,7 +4650,7 @@
               </a:defRPr>
             </a:pPr>
             <a:r>
-              <a:t>•  Secure Handshake: Dual-party QR validation rules out pickup and transit delivery disputes.</a:t>
+              <a:t>•  Role-Based Dashboards: Custom panels for Donors, NGOs, Admin, and Volunteer riders.</a:t>
             </a:r>
           </a:p>
           <a:p>
@@ -4175,7 +4669,7 @@
               </a:defRPr>
             </a:pPr>
             <a:r>
-              <a:t>•  Verified NGOs: Credentials checked via administrative gates and managed by EVM DAO.</a:t>
+              <a:t>•  QR Handshake: Verification system prevents delivery disputes and guarantees arrival.</a:t>
             </a:r>
           </a:p>
           <a:p>
@@ -4194,7 +4688,383 @@
               </a:defRPr>
             </a:pPr>
             <a:r>
-              <a:t>•  Impact Incentives: Pre-populated Section 80G tax benefit files and live ESG carbon indexes.</a:t>
+              <a:t>•  Real-time Notifications: Socket.IO handles live updates while Firebase manages background push alerts.</a:t>
+            </a:r>
+          </a:p>
+          <a:p>
+            <a:pPr>
+              <a:lnSpc>
+                <a:spcPct val="105000"/>
+              </a:lnSpc>
+              <a:spcAft>
+                <a:spcPts val="500"/>
+              </a:spcAft>
+              <a:defRPr sz="1050">
+                <a:solidFill>
+                  <a:srgbClr val="475569"/>
+                </a:solidFill>
+                <a:latin typeface="Plus Jakarta Sans"/>
+              </a:defRPr>
+            </a:pPr>
+            <a:r>
+              <a:t>•  Exemption certificates: Automatically calculates Section 80G tax deductions.</a:t>
+            </a:r>
+          </a:p>
+        </p:txBody>
+      </p:sp>
+      <p:sp>
+        <p:nvSpPr>
+          <p:cNvPr id="10" name="Rounded Rectangle 9"/>
+          <p:cNvSpPr/>
+          <p:nvPr/>
+        </p:nvSpPr>
+        <p:spPr>
+          <a:xfrm>
+            <a:off x="6217920" y="1645920"/>
+            <a:ext cx="5212080" cy="4572000"/>
+          </a:xfrm>
+          <a:prstGeom prst="roundRect">
+            <a:avLst/>
+          </a:prstGeom>
+          <a:solidFill>
+            <a:srgbClr val="FFFFFF"/>
+          </a:solidFill>
+          <a:ln w="19050">
+            <a:solidFill>
+              <a:srgbClr val="E2E8F0"/>
+            </a:solidFill>
+          </a:ln>
+        </p:spPr>
+        <p:style>
+          <a:lnRef idx="1">
+            <a:schemeClr val="accent1"/>
+          </a:lnRef>
+          <a:fillRef idx="3">
+            <a:schemeClr val="accent1"/>
+          </a:fillRef>
+          <a:effectRef idx="2">
+            <a:schemeClr val="accent1"/>
+          </a:effectRef>
+          <a:fontRef idx="minor">
+            <a:schemeClr val="lt1"/>
+          </a:fontRef>
+        </p:style>
+        <p:txBody>
+          <a:bodyPr rtlCol="0" anchor="ctr"/>
+          <a:lstStyle/>
+          <a:p>
+            <a:pPr algn="ctr"/>
+          </a:p>
+        </p:txBody>
+      </p:sp>
+      <p:sp>
+        <p:nvSpPr>
+          <p:cNvPr id="11" name="TextBox 10"/>
+          <p:cNvSpPr txBox="1"/>
+          <p:nvPr/>
+        </p:nvSpPr>
+        <p:spPr>
+          <a:xfrm>
+            <a:off x="6492240" y="1920240"/>
+            <a:ext cx="4663440" cy="457200"/>
+          </a:xfrm>
+          <a:prstGeom prst="rect">
+            <a:avLst/>
+          </a:prstGeom>
+          <a:noFill/>
+        </p:spPr>
+        <p:txBody>
+          <a:bodyPr wrap="none">
+            <a:spAutoFit/>
+          </a:bodyPr>
+          <a:lstStyle/>
+          <a:p>
+            <a:pPr>
+              <a:defRPr sz="1500" b="1">
+                <a:solidFill>
+                  <a:srgbClr val="0F172A"/>
+                </a:solidFill>
+                <a:latin typeface="Plus Jakarta Sans"/>
+              </a:defRPr>
+            </a:pPr>
+            <a:r>
+              <a:t>Target Platform Stakeholders</a:t>
+            </a:r>
+          </a:p>
+        </p:txBody>
+      </p:sp>
+      <p:sp>
+        <p:nvSpPr>
+          <p:cNvPr id="12" name="Rounded Rectangle 11"/>
+          <p:cNvSpPr/>
+          <p:nvPr/>
+        </p:nvSpPr>
+        <p:spPr>
+          <a:xfrm>
+            <a:off x="6492240" y="2560320"/>
+            <a:ext cx="2194560" cy="1463040"/>
+          </a:xfrm>
+          <a:prstGeom prst="roundRect">
+            <a:avLst/>
+          </a:prstGeom>
+          <a:solidFill>
+            <a:srgbClr val="F8FAFC"/>
+          </a:solidFill>
+          <a:ln w="19050">
+            <a:solidFill>
+              <a:srgbClr val="2563EB"/>
+            </a:solidFill>
+          </a:ln>
+        </p:spPr>
+        <p:style>
+          <a:lnRef idx="1">
+            <a:schemeClr val="accent1"/>
+          </a:lnRef>
+          <a:fillRef idx="3">
+            <a:schemeClr val="accent1"/>
+          </a:fillRef>
+          <a:effectRef idx="2">
+            <a:schemeClr val="accent1"/>
+          </a:effectRef>
+          <a:fontRef idx="minor">
+            <a:schemeClr val="lt1"/>
+          </a:fontRef>
+        </p:style>
+        <p:txBody>
+          <a:bodyPr rtlCol="0" anchor="ctr" wrap="square"/>
+          <a:lstStyle/>
+          <a:p>
+            <a:pPr algn="ctr">
+              <a:spcAft>
+                <a:spcPts val="400"/>
+              </a:spcAft>
+              <a:defRPr b="1" sz="1150">
+                <a:solidFill>
+                  <a:srgbClr val="2563EB"/>
+                </a:solidFill>
+              </a:defRPr>
+            </a:pPr>
+            <a:r>
+              <a:t>Donors</a:t>
+            </a:r>
+          </a:p>
+          <a:p>
+            <a:pPr>
+              <a:defRPr sz="950">
+                <a:solidFill>
+                  <a:srgbClr val="475569"/>
+                </a:solidFill>
+              </a:defRPr>
+            </a:pPr>
+            <a:r>
+              <a:t>Restaurants, hotels, &amp; caterers listing excess food.</a:t>
+            </a:r>
+          </a:p>
+        </p:txBody>
+      </p:sp>
+      <p:sp>
+        <p:nvSpPr>
+          <p:cNvPr id="13" name="Rounded Rectangle 12"/>
+          <p:cNvSpPr/>
+          <p:nvPr/>
+        </p:nvSpPr>
+        <p:spPr>
+          <a:xfrm>
+            <a:off x="8869680" y="2560320"/>
+            <a:ext cx="2194560" cy="1463040"/>
+          </a:xfrm>
+          <a:prstGeom prst="roundRect">
+            <a:avLst/>
+          </a:prstGeom>
+          <a:solidFill>
+            <a:srgbClr val="F8FAFC"/>
+          </a:solidFill>
+          <a:ln w="19050">
+            <a:solidFill>
+              <a:srgbClr val="16A34A"/>
+            </a:solidFill>
+          </a:ln>
+        </p:spPr>
+        <p:style>
+          <a:lnRef idx="1">
+            <a:schemeClr val="accent1"/>
+          </a:lnRef>
+          <a:fillRef idx="3">
+            <a:schemeClr val="accent1"/>
+          </a:fillRef>
+          <a:effectRef idx="2">
+            <a:schemeClr val="accent1"/>
+          </a:effectRef>
+          <a:fontRef idx="minor">
+            <a:schemeClr val="lt1"/>
+          </a:fontRef>
+        </p:style>
+        <p:txBody>
+          <a:bodyPr rtlCol="0" anchor="ctr" wrap="square"/>
+          <a:lstStyle/>
+          <a:p>
+            <a:pPr algn="ctr">
+              <a:spcAft>
+                <a:spcPts val="400"/>
+              </a:spcAft>
+              <a:defRPr b="1" sz="1150">
+                <a:solidFill>
+                  <a:srgbClr val="16A34A"/>
+                </a:solidFill>
+              </a:defRPr>
+            </a:pPr>
+            <a:r>
+              <a:t>NGO Partners</a:t>
+            </a:r>
+          </a:p>
+          <a:p>
+            <a:pPr>
+              <a:defRPr sz="950">
+                <a:solidFill>
+                  <a:srgbClr val="475569"/>
+                </a:solidFill>
+              </a:defRPr>
+            </a:pPr>
+            <a:r>
+              <a:t>Verified local non-profits claiming &amp; feeding.</a:t>
+            </a:r>
+          </a:p>
+        </p:txBody>
+      </p:sp>
+      <p:sp>
+        <p:nvSpPr>
+          <p:cNvPr id="14" name="Rounded Rectangle 13"/>
+          <p:cNvSpPr/>
+          <p:nvPr/>
+        </p:nvSpPr>
+        <p:spPr>
+          <a:xfrm>
+            <a:off x="6492240" y="4389120"/>
+            <a:ext cx="2194560" cy="1463040"/>
+          </a:xfrm>
+          <a:prstGeom prst="roundRect">
+            <a:avLst/>
+          </a:prstGeom>
+          <a:solidFill>
+            <a:srgbClr val="F8FAFC"/>
+          </a:solidFill>
+          <a:ln w="19050">
+            <a:solidFill>
+              <a:srgbClr val="F97316"/>
+            </a:solidFill>
+          </a:ln>
+        </p:spPr>
+        <p:style>
+          <a:lnRef idx="1">
+            <a:schemeClr val="accent1"/>
+          </a:lnRef>
+          <a:fillRef idx="3">
+            <a:schemeClr val="accent1"/>
+          </a:fillRef>
+          <a:effectRef idx="2">
+            <a:schemeClr val="accent1"/>
+          </a:effectRef>
+          <a:fontRef idx="minor">
+            <a:schemeClr val="lt1"/>
+          </a:fontRef>
+        </p:style>
+        <p:txBody>
+          <a:bodyPr rtlCol="0" anchor="ctr" wrap="square"/>
+          <a:lstStyle/>
+          <a:p>
+            <a:pPr algn="ctr">
+              <a:spcAft>
+                <a:spcPts val="400"/>
+              </a:spcAft>
+              <a:defRPr b="1" sz="1150">
+                <a:solidFill>
+                  <a:srgbClr val="F97316"/>
+                </a:solidFill>
+              </a:defRPr>
+            </a:pPr>
+            <a:r>
+              <a:t>Volunteers / Riders</a:t>
+            </a:r>
+          </a:p>
+          <a:p>
+            <a:pPr>
+              <a:defRPr sz="950">
+                <a:solidFill>
+                  <a:srgbClr val="475569"/>
+                </a:solidFill>
+              </a:defRPr>
+            </a:pPr>
+            <a:r>
+              <a:t>Logistics coordinators handling physical transfer.</a:t>
+            </a:r>
+          </a:p>
+        </p:txBody>
+      </p:sp>
+      <p:sp>
+        <p:nvSpPr>
+          <p:cNvPr id="15" name="Rounded Rectangle 14"/>
+          <p:cNvSpPr/>
+          <p:nvPr/>
+        </p:nvSpPr>
+        <p:spPr>
+          <a:xfrm>
+            <a:off x="8869680" y="4389120"/>
+            <a:ext cx="2194560" cy="1463040"/>
+          </a:xfrm>
+          <a:prstGeom prst="roundRect">
+            <a:avLst/>
+          </a:prstGeom>
+          <a:solidFill>
+            <a:srgbClr val="F8FAFC"/>
+          </a:solidFill>
+          <a:ln w="19050">
+            <a:solidFill>
+              <a:srgbClr val="0F172A"/>
+            </a:solidFill>
+          </a:ln>
+        </p:spPr>
+        <p:style>
+          <a:lnRef idx="1">
+            <a:schemeClr val="accent1"/>
+          </a:lnRef>
+          <a:fillRef idx="3">
+            <a:schemeClr val="accent1"/>
+          </a:fillRef>
+          <a:effectRef idx="2">
+            <a:schemeClr val="accent1"/>
+          </a:effectRef>
+          <a:fontRef idx="minor">
+            <a:schemeClr val="lt1"/>
+          </a:fontRef>
+        </p:style>
+        <p:txBody>
+          <a:bodyPr rtlCol="0" anchor="ctr" wrap="square"/>
+          <a:lstStyle/>
+          <a:p>
+            <a:pPr algn="ctr">
+              <a:spcAft>
+                <a:spcPts val="400"/>
+              </a:spcAft>
+              <a:defRPr b="1" sz="1150">
+                <a:solidFill>
+                  <a:srgbClr val="0F172A"/>
+                </a:solidFill>
+              </a:defRPr>
+            </a:pPr>
+            <a:r>
+              <a:t>System Admins</a:t>
+            </a:r>
+          </a:p>
+          <a:p>
+            <a:pPr>
+              <a:defRPr sz="950">
+                <a:solidFill>
+                  <a:srgbClr val="475569"/>
+                </a:solidFill>
+              </a:defRPr>
+            </a:pPr>
+            <a:r>
+              <a:t>Vetting credentials &amp; validating compliance logs.</a:t>
             </a:r>
           </a:p>
         </p:txBody>
@@ -4291,7 +5161,7 @@
               </a:defRPr>
             </a:pPr>
             <a:r>
-              <a:t>SECTION 02: LOGISTICS VERIFICATION</a:t>
+              <a:t>SECTION 02: PROPOSED METHODOLOGY</a:t>
             </a:r>
           </a:p>
         </p:txBody>
@@ -4327,7 +5197,7 @@
               </a:defRPr>
             </a:pPr>
             <a:r>
-              <a:t>Zero-Leakage Handshake Verification</a:t>
+              <a:t>System Workflow Process Flowchart</a:t>
             </a:r>
           </a:p>
         </p:txBody>
@@ -4383,7 +5253,7 @@
             <a:avLst/>
           </a:prstGeom>
           <a:solidFill>
-            <a:srgbClr val="E2E8F0"/>
+            <a:srgbClr val="2563EB"/>
           </a:solidFill>
           <a:ln>
             <a:noFill/>
@@ -4411,52 +5281,26 @@
           </a:p>
         </p:txBody>
       </p:sp>
-      <p:pic>
-        <p:nvPicPr>
-          <p:cNvPr id="7" name="Picture 6" descr="aahaar_trust_handshake.png"/>
-          <p:cNvPicPr>
-            <a:picLocks noChangeAspect="1"/>
-          </p:cNvPicPr>
-          <p:nvPr/>
-        </p:nvPicPr>
-        <p:blipFill>
-          <a:blip r:embed="rId2"/>
-          <a:stretch>
-            <a:fillRect/>
-          </a:stretch>
-        </p:blipFill>
-        <p:spPr>
-          <a:xfrm>
-            <a:off x="731520" y="1463040"/>
-            <a:ext cx="4572000" cy="4572000"/>
-          </a:xfrm>
-          <a:prstGeom prst="rect">
-            <a:avLst/>
-          </a:prstGeom>
-        </p:spPr>
-      </p:pic>
-      <p:sp>
-        <p:nvSpPr>
-          <p:cNvPr id="8" name="Rounded Rectangle 7"/>
+      <p:sp>
+        <p:nvSpPr>
+          <p:cNvPr id="7" name="Rounded Rectangle 6"/>
           <p:cNvSpPr/>
           <p:nvPr/>
         </p:nvSpPr>
         <p:spPr>
           <a:xfrm>
-            <a:off x="5943600" y="1463040"/>
-            <a:ext cx="5486400" cy="4572000"/>
+            <a:off x="731520" y="1828800"/>
+            <a:ext cx="2194560" cy="1188720"/>
           </a:xfrm>
           <a:prstGeom prst="roundRect">
-            <a:avLst>
-              <a:gd name="adj" fmla="val 4000"/>
-            </a:avLst>
+            <a:avLst/>
           </a:prstGeom>
           <a:solidFill>
             <a:srgbClr val="FFFFFF"/>
           </a:solidFill>
-          <a:ln w="19050">
+          <a:ln w="25400">
             <a:solidFill>
-              <a:srgbClr val="E2E8F0"/>
+              <a:srgbClr val="2563EB"/>
             </a:solidFill>
           </a:ln>
         </p:spPr>
@@ -4475,29 +5319,53 @@
           </a:fontRef>
         </p:style>
         <p:txBody>
-          <a:bodyPr rtlCol="0" anchor="ctr"/>
-          <a:lstStyle/>
-          <a:p>
-            <a:pPr algn="ctr"/>
-          </a:p>
-        </p:txBody>
-      </p:sp>
-      <p:sp>
-        <p:nvSpPr>
-          <p:cNvPr id="9" name="Rectangle 8"/>
+          <a:bodyPr rtlCol="0" anchor="ctr" wrap="square"/>
+          <a:lstStyle/>
+          <a:p>
+            <a:pPr algn="ctr">
+              <a:defRPr b="1" sz="1200">
+                <a:solidFill>
+                  <a:srgbClr val="0F172A"/>
+                </a:solidFill>
+              </a:defRPr>
+            </a:pPr>
+            <a:r>
+              <a:t>1. Donor Listing</a:t>
+            </a:r>
+          </a:p>
+          <a:p>
+            <a:pPr algn="ctr">
+              <a:spcBef>
+                <a:spcPts val="300"/>
+              </a:spcBef>
+              <a:defRPr sz="900">
+                <a:solidFill>
+                  <a:srgbClr val="475569"/>
+                </a:solidFill>
+              </a:defRPr>
+            </a:pPr>
+            <a:r>
+              <a:t>Donor posts surplus food details</a:t>
+            </a:r>
+          </a:p>
+        </p:txBody>
+      </p:sp>
+      <p:sp>
+        <p:nvSpPr>
+          <p:cNvPr id="8" name="Right Arrow 7"/>
           <p:cNvSpPr/>
           <p:nvPr/>
         </p:nvSpPr>
         <p:spPr>
           <a:xfrm>
-            <a:off x="5943600" y="1572768"/>
-            <a:ext cx="73152" cy="4352544"/>
-          </a:xfrm>
-          <a:prstGeom prst="rect">
-            <a:avLst/>
-          </a:prstGeom>
-          <a:solidFill>
-            <a:srgbClr val="06B6D4"/>
+            <a:off x="3017520" y="2286000"/>
+            <a:ext cx="365760" cy="274320"/>
+          </a:xfrm>
+          <a:prstGeom prst="rightArrow">
+            <a:avLst/>
+          </a:prstGeom>
+          <a:solidFill>
+            <a:srgbClr val="2563EB"/>
           </a:solidFill>
           <a:ln>
             <a:noFill/>
@@ -4527,115 +5395,741 @@
       </p:sp>
       <p:sp>
         <p:nvSpPr>
-          <p:cNvPr id="10" name="TextBox 9"/>
-          <p:cNvSpPr txBox="1"/>
-          <p:nvPr/>
-        </p:nvSpPr>
-        <p:spPr>
-          <a:xfrm>
-            <a:off x="6217920" y="1645920"/>
-            <a:ext cx="4937760" cy="4206240"/>
-          </a:xfrm>
-          <a:prstGeom prst="rect">
-            <a:avLst/>
-          </a:prstGeom>
-          <a:noFill/>
-        </p:spPr>
-        <p:txBody>
-          <a:bodyPr wrap="square" lIns="0" rIns="0" tIns="0" bIns="0">
-            <a:spAutoFit/>
-          </a:bodyPr>
-          <a:lstStyle/>
-          <a:p>
-            <a:pPr>
-              <a:spcAft>
-                <a:spcPts val="1000"/>
-              </a:spcAft>
-              <a:defRPr sz="1400" b="1">
+          <p:cNvPr id="9" name="Rounded Rectangle 8"/>
+          <p:cNvSpPr/>
+          <p:nvPr/>
+        </p:nvSpPr>
+        <p:spPr>
+          <a:xfrm>
+            <a:off x="3474720" y="1828800"/>
+            <a:ext cx="2194560" cy="1188720"/>
+          </a:xfrm>
+          <a:prstGeom prst="roundRect">
+            <a:avLst/>
+          </a:prstGeom>
+          <a:solidFill>
+            <a:srgbClr val="FFFFFF"/>
+          </a:solidFill>
+          <a:ln w="25400">
+            <a:solidFill>
+              <a:srgbClr val="16A34A"/>
+            </a:solidFill>
+          </a:ln>
+        </p:spPr>
+        <p:style>
+          <a:lnRef idx="1">
+            <a:schemeClr val="accent1"/>
+          </a:lnRef>
+          <a:fillRef idx="3">
+            <a:schemeClr val="accent1"/>
+          </a:fillRef>
+          <a:effectRef idx="2">
+            <a:schemeClr val="accent1"/>
+          </a:effectRef>
+          <a:fontRef idx="minor">
+            <a:schemeClr val="lt1"/>
+          </a:fontRef>
+        </p:style>
+        <p:txBody>
+          <a:bodyPr rtlCol="0" anchor="ctr" wrap="square"/>
+          <a:lstStyle/>
+          <a:p>
+            <a:pPr algn="ctr">
+              <a:defRPr b="1" sz="1200">
                 <a:solidFill>
                   <a:srgbClr val="0F172A"/>
                 </a:solidFill>
-                <a:latin typeface="Plus Jakarta Sans"/>
-              </a:defRPr>
-            </a:pPr>
-            <a:r>
-              <a:t>Proof of Physical Delivery</a:t>
-            </a:r>
-          </a:p>
-          <a:p>
-            <a:pPr>
-              <a:lnSpc>
-                <a:spcPct val="105000"/>
-              </a:lnSpc>
-              <a:spcAft>
-                <a:spcPts val="500"/>
-              </a:spcAft>
-              <a:defRPr sz="1050">
+              </a:defRPr>
+            </a:pPr>
+            <a:r>
+              <a:t>2. Verification Alert</a:t>
+            </a:r>
+          </a:p>
+          <a:p>
+            <a:pPr algn="ctr">
+              <a:spcBef>
+                <a:spcPts val="300"/>
+              </a:spcBef>
+              <a:defRPr sz="900">
                 <a:solidFill>
                   <a:srgbClr val="475569"/>
                 </a:solidFill>
-                <a:latin typeface="Plus Jakarta Sans"/>
-              </a:defRPr>
-            </a:pPr>
-            <a:r>
-              <a:t>•  System generates a dynamic QR code and 6-digit OTP code when claims are approved.</a:t>
-            </a:r>
-          </a:p>
-          <a:p>
-            <a:pPr>
-              <a:lnSpc>
-                <a:spcPct val="105000"/>
-              </a:lnSpc>
-              <a:spcAft>
-                <a:spcPts val="500"/>
-              </a:spcAft>
-              <a:defRPr sz="1050">
+              </a:defRPr>
+            </a:pPr>
+            <a:r>
+              <a:t>Admin approves; alert dispatched</a:t>
+            </a:r>
+          </a:p>
+        </p:txBody>
+      </p:sp>
+      <p:sp>
+        <p:nvSpPr>
+          <p:cNvPr id="10" name="Right Arrow 9"/>
+          <p:cNvSpPr/>
+          <p:nvPr/>
+        </p:nvSpPr>
+        <p:spPr>
+          <a:xfrm>
+            <a:off x="5760720" y="2286000"/>
+            <a:ext cx="365760" cy="274320"/>
+          </a:xfrm>
+          <a:prstGeom prst="rightArrow">
+            <a:avLst/>
+          </a:prstGeom>
+          <a:solidFill>
+            <a:srgbClr val="2563EB"/>
+          </a:solidFill>
+          <a:ln>
+            <a:noFill/>
+          </a:ln>
+        </p:spPr>
+        <p:style>
+          <a:lnRef idx="1">
+            <a:schemeClr val="accent1"/>
+          </a:lnRef>
+          <a:fillRef idx="3">
+            <a:schemeClr val="accent1"/>
+          </a:fillRef>
+          <a:effectRef idx="2">
+            <a:schemeClr val="accent1"/>
+          </a:effectRef>
+          <a:fontRef idx="minor">
+            <a:schemeClr val="lt1"/>
+          </a:fontRef>
+        </p:style>
+        <p:txBody>
+          <a:bodyPr rtlCol="0" anchor="ctr"/>
+          <a:lstStyle/>
+          <a:p>
+            <a:pPr algn="ctr"/>
+          </a:p>
+        </p:txBody>
+      </p:sp>
+      <p:sp>
+        <p:nvSpPr>
+          <p:cNvPr id="11" name="Rounded Rectangle 10"/>
+          <p:cNvSpPr/>
+          <p:nvPr/>
+        </p:nvSpPr>
+        <p:spPr>
+          <a:xfrm>
+            <a:off x="6217920" y="1828800"/>
+            <a:ext cx="2194560" cy="1188720"/>
+          </a:xfrm>
+          <a:prstGeom prst="roundRect">
+            <a:avLst/>
+          </a:prstGeom>
+          <a:solidFill>
+            <a:srgbClr val="FFFFFF"/>
+          </a:solidFill>
+          <a:ln w="25400">
+            <a:solidFill>
+              <a:srgbClr val="2563EB"/>
+            </a:solidFill>
+          </a:ln>
+        </p:spPr>
+        <p:style>
+          <a:lnRef idx="1">
+            <a:schemeClr val="accent1"/>
+          </a:lnRef>
+          <a:fillRef idx="3">
+            <a:schemeClr val="accent1"/>
+          </a:fillRef>
+          <a:effectRef idx="2">
+            <a:schemeClr val="accent1"/>
+          </a:effectRef>
+          <a:fontRef idx="minor">
+            <a:schemeClr val="lt1"/>
+          </a:fontRef>
+        </p:style>
+        <p:txBody>
+          <a:bodyPr rtlCol="0" anchor="ctr" wrap="square"/>
+          <a:lstStyle/>
+          <a:p>
+            <a:pPr algn="ctr">
+              <a:defRPr b="1" sz="1200">
+                <a:solidFill>
+                  <a:srgbClr val="0F172A"/>
+                </a:solidFill>
+              </a:defRPr>
+            </a:pPr>
+            <a:r>
+              <a:t>3. NGO Allocation</a:t>
+            </a:r>
+          </a:p>
+          <a:p>
+            <a:pPr algn="ctr">
+              <a:spcBef>
+                <a:spcPts val="300"/>
+              </a:spcBef>
+              <a:defRPr sz="900">
                 <a:solidFill>
                   <a:srgbClr val="475569"/>
                 </a:solidFill>
-                <a:latin typeface="Plus Jakarta Sans"/>
-              </a:defRPr>
-            </a:pPr>
-            <a:r>
-              <a:t>•  NGO rider displays the QR code at the physical pickup site to verify arrival coordinates.</a:t>
-            </a:r>
-          </a:p>
-          <a:p>
-            <a:pPr>
-              <a:lnSpc>
-                <a:spcPct val="105000"/>
-              </a:lnSpc>
-              <a:spcAft>
-                <a:spcPts val="500"/>
-              </a:spcAft>
-              <a:defRPr sz="1050">
+              </a:defRPr>
+            </a:pPr>
+            <a:r>
+              <a:t>NGO claims allocation slots</a:t>
+            </a:r>
+          </a:p>
+        </p:txBody>
+      </p:sp>
+      <p:sp>
+        <p:nvSpPr>
+          <p:cNvPr id="12" name="Right Arrow 11"/>
+          <p:cNvSpPr/>
+          <p:nvPr/>
+        </p:nvSpPr>
+        <p:spPr>
+          <a:xfrm>
+            <a:off x="8503920" y="2286000"/>
+            <a:ext cx="365760" cy="274320"/>
+          </a:xfrm>
+          <a:prstGeom prst="rightArrow">
+            <a:avLst/>
+          </a:prstGeom>
+          <a:solidFill>
+            <a:srgbClr val="2563EB"/>
+          </a:solidFill>
+          <a:ln>
+            <a:noFill/>
+          </a:ln>
+        </p:spPr>
+        <p:style>
+          <a:lnRef idx="1">
+            <a:schemeClr val="accent1"/>
+          </a:lnRef>
+          <a:fillRef idx="3">
+            <a:schemeClr val="accent1"/>
+          </a:fillRef>
+          <a:effectRef idx="2">
+            <a:schemeClr val="accent1"/>
+          </a:effectRef>
+          <a:fontRef idx="minor">
+            <a:schemeClr val="lt1"/>
+          </a:fontRef>
+        </p:style>
+        <p:txBody>
+          <a:bodyPr rtlCol="0" anchor="ctr"/>
+          <a:lstStyle/>
+          <a:p>
+            <a:pPr algn="ctr"/>
+          </a:p>
+        </p:txBody>
+      </p:sp>
+      <p:sp>
+        <p:nvSpPr>
+          <p:cNvPr id="13" name="Rounded Rectangle 12"/>
+          <p:cNvSpPr/>
+          <p:nvPr/>
+        </p:nvSpPr>
+        <p:spPr>
+          <a:xfrm>
+            <a:off x="8961120" y="1828800"/>
+            <a:ext cx="2194560" cy="1188720"/>
+          </a:xfrm>
+          <a:prstGeom prst="roundRect">
+            <a:avLst/>
+          </a:prstGeom>
+          <a:solidFill>
+            <a:srgbClr val="FFFFFF"/>
+          </a:solidFill>
+          <a:ln w="25400">
+            <a:solidFill>
+              <a:srgbClr val="16A34A"/>
+            </a:solidFill>
+          </a:ln>
+        </p:spPr>
+        <p:style>
+          <a:lnRef idx="1">
+            <a:schemeClr val="accent1"/>
+          </a:lnRef>
+          <a:fillRef idx="3">
+            <a:schemeClr val="accent1"/>
+          </a:fillRef>
+          <a:effectRef idx="2">
+            <a:schemeClr val="accent1"/>
+          </a:effectRef>
+          <a:fontRef idx="minor">
+            <a:schemeClr val="lt1"/>
+          </a:fontRef>
+        </p:style>
+        <p:txBody>
+          <a:bodyPr rtlCol="0" anchor="ctr" wrap="square"/>
+          <a:lstStyle/>
+          <a:p>
+            <a:pPr algn="ctr">
+              <a:defRPr b="1" sz="1200">
+                <a:solidFill>
+                  <a:srgbClr val="0F172A"/>
+                </a:solidFill>
+              </a:defRPr>
+            </a:pPr>
+            <a:r>
+              <a:t>4. Rider Assignment</a:t>
+            </a:r>
+          </a:p>
+          <a:p>
+            <a:pPr algn="ctr">
+              <a:spcBef>
+                <a:spcPts val="300"/>
+              </a:spcBef>
+              <a:defRPr sz="900">
                 <a:solidFill>
                   <a:srgbClr val="475569"/>
                 </a:solidFill>
-                <a:latin typeface="Plus Jakarta Sans"/>
-              </a:defRPr>
-            </a:pPr>
-            <a:r>
-              <a:t>•  Donor scans the QR code to sign off the transaction and commit verification to the blockchain.</a:t>
-            </a:r>
-          </a:p>
-          <a:p>
-            <a:pPr>
-              <a:lnSpc>
-                <a:spcPct val="105000"/>
-              </a:lnSpc>
-              <a:spcAft>
-                <a:spcPts val="500"/>
-              </a:spcAft>
-              <a:defRPr sz="1050">
+              </a:defRPr>
+            </a:pPr>
+            <a:r>
+              <a:t>Volunteer / Rider coordinates transport</a:t>
+            </a:r>
+          </a:p>
+        </p:txBody>
+      </p:sp>
+      <p:sp>
+        <p:nvSpPr>
+          <p:cNvPr id="14" name="Down Arrow 13"/>
+          <p:cNvSpPr/>
+          <p:nvPr/>
+        </p:nvSpPr>
+        <p:spPr>
+          <a:xfrm>
+            <a:off x="9875520" y="3108960"/>
+            <a:ext cx="274320" cy="914400"/>
+          </a:xfrm>
+          <a:prstGeom prst="downArrow">
+            <a:avLst/>
+          </a:prstGeom>
+          <a:solidFill>
+            <a:srgbClr val="2563EB"/>
+          </a:solidFill>
+          <a:ln>
+            <a:noFill/>
+          </a:ln>
+        </p:spPr>
+        <p:style>
+          <a:lnRef idx="1">
+            <a:schemeClr val="accent1"/>
+          </a:lnRef>
+          <a:fillRef idx="3">
+            <a:schemeClr val="accent1"/>
+          </a:fillRef>
+          <a:effectRef idx="2">
+            <a:schemeClr val="accent1"/>
+          </a:effectRef>
+          <a:fontRef idx="minor">
+            <a:schemeClr val="lt1"/>
+          </a:fontRef>
+        </p:style>
+        <p:txBody>
+          <a:bodyPr rtlCol="0" anchor="ctr"/>
+          <a:lstStyle/>
+          <a:p>
+            <a:pPr algn="ctr"/>
+          </a:p>
+        </p:txBody>
+      </p:sp>
+      <p:sp>
+        <p:nvSpPr>
+          <p:cNvPr id="15" name="Rounded Rectangle 14"/>
+          <p:cNvSpPr/>
+          <p:nvPr/>
+        </p:nvSpPr>
+        <p:spPr>
+          <a:xfrm>
+            <a:off x="8961120" y="4114800"/>
+            <a:ext cx="2194560" cy="1188720"/>
+          </a:xfrm>
+          <a:prstGeom prst="roundRect">
+            <a:avLst/>
+          </a:prstGeom>
+          <a:solidFill>
+            <a:srgbClr val="FFFFFF"/>
+          </a:solidFill>
+          <a:ln w="25400">
+            <a:solidFill>
+              <a:srgbClr val="2563EB"/>
+            </a:solidFill>
+          </a:ln>
+        </p:spPr>
+        <p:style>
+          <a:lnRef idx="1">
+            <a:schemeClr val="accent1"/>
+          </a:lnRef>
+          <a:fillRef idx="3">
+            <a:schemeClr val="accent1"/>
+          </a:fillRef>
+          <a:effectRef idx="2">
+            <a:schemeClr val="accent1"/>
+          </a:effectRef>
+          <a:fontRef idx="minor">
+            <a:schemeClr val="lt1"/>
+          </a:fontRef>
+        </p:style>
+        <p:txBody>
+          <a:bodyPr rtlCol="0" anchor="ctr" wrap="square"/>
+          <a:lstStyle/>
+          <a:p>
+            <a:pPr algn="ctr">
+              <a:defRPr b="1" sz="1200">
+                <a:solidFill>
+                  <a:srgbClr val="0F172A"/>
+                </a:solidFill>
+              </a:defRPr>
+            </a:pPr>
+            <a:r>
+              <a:t>5. Handshake Pickup</a:t>
+            </a:r>
+          </a:p>
+          <a:p>
+            <a:pPr algn="ctr">
+              <a:spcBef>
+                <a:spcPts val="300"/>
+              </a:spcBef>
+              <a:defRPr sz="900">
                 <a:solidFill>
                   <a:srgbClr val="475569"/>
                 </a:solidFill>
-                <a:latin typeface="Plus Jakarta Sans"/>
-              </a:defRPr>
-            </a:pPr>
-            <a:r>
-              <a:t>•  Solidity smart contract marks completion, awarding reputation scores on-chain.</a:t>
+              </a:defRPr>
+            </a:pPr>
+            <a:r>
+              <a:t>Rider physically arrives at site</a:t>
+            </a:r>
+          </a:p>
+        </p:txBody>
+      </p:sp>
+      <p:sp>
+        <p:nvSpPr>
+          <p:cNvPr id="16" name="Down Arrow 15"/>
+          <p:cNvSpPr/>
+          <p:nvPr/>
+        </p:nvSpPr>
+        <p:spPr>
+          <a:xfrm>
+            <a:off x="8503920" y="4572000"/>
+            <a:ext cx="365760" cy="274320"/>
+          </a:xfrm>
+          <a:prstGeom prst="downArrow">
+            <a:avLst/>
+          </a:prstGeom>
+          <a:solidFill>
+            <a:srgbClr val="2563EB"/>
+          </a:solidFill>
+          <a:ln>
+            <a:noFill/>
+          </a:ln>
+        </p:spPr>
+        <p:style>
+          <a:lnRef idx="1">
+            <a:schemeClr val="accent1"/>
+          </a:lnRef>
+          <a:fillRef idx="3">
+            <a:schemeClr val="accent1"/>
+          </a:fillRef>
+          <a:effectRef idx="2">
+            <a:schemeClr val="accent1"/>
+          </a:effectRef>
+          <a:fontRef idx="minor">
+            <a:schemeClr val="lt1"/>
+          </a:fontRef>
+        </p:style>
+        <p:txBody>
+          <a:bodyPr rtlCol="0" anchor="ctr"/>
+          <a:lstStyle/>
+          <a:p>
+            <a:pPr algn="ctr"/>
+          </a:p>
+        </p:txBody>
+      </p:sp>
+      <p:sp>
+        <p:nvSpPr>
+          <p:cNvPr id="17" name="Rounded Rectangle 16"/>
+          <p:cNvSpPr/>
+          <p:nvPr/>
+        </p:nvSpPr>
+        <p:spPr>
+          <a:xfrm>
+            <a:off x="6217920" y="4114800"/>
+            <a:ext cx="2194560" cy="1188720"/>
+          </a:xfrm>
+          <a:prstGeom prst="roundRect">
+            <a:avLst/>
+          </a:prstGeom>
+          <a:solidFill>
+            <a:srgbClr val="FFFFFF"/>
+          </a:solidFill>
+          <a:ln w="25400">
+            <a:solidFill>
+              <a:srgbClr val="16A34A"/>
+            </a:solidFill>
+          </a:ln>
+        </p:spPr>
+        <p:style>
+          <a:lnRef idx="1">
+            <a:schemeClr val="accent1"/>
+          </a:lnRef>
+          <a:fillRef idx="3">
+            <a:schemeClr val="accent1"/>
+          </a:fillRef>
+          <a:effectRef idx="2">
+            <a:schemeClr val="accent1"/>
+          </a:effectRef>
+          <a:fontRef idx="minor">
+            <a:schemeClr val="lt1"/>
+          </a:fontRef>
+        </p:style>
+        <p:txBody>
+          <a:bodyPr rtlCol="0" anchor="ctr" wrap="square"/>
+          <a:lstStyle/>
+          <a:p>
+            <a:pPr algn="ctr">
+              <a:defRPr b="1" sz="1200">
+                <a:solidFill>
+                  <a:srgbClr val="0F172A"/>
+                </a:solidFill>
+              </a:defRPr>
+            </a:pPr>
+            <a:r>
+              <a:t>6. QR Verification</a:t>
+            </a:r>
+          </a:p>
+          <a:p>
+            <a:pPr algn="ctr">
+              <a:spcBef>
+                <a:spcPts val="300"/>
+              </a:spcBef>
+              <a:defRPr sz="900">
+                <a:solidFill>
+                  <a:srgbClr val="475569"/>
+                </a:solidFill>
+              </a:defRPr>
+            </a:pPr>
+            <a:r>
+              <a:t>Donor scans rider's dynamic QR</a:t>
+            </a:r>
+          </a:p>
+        </p:txBody>
+      </p:sp>
+      <p:sp>
+        <p:nvSpPr>
+          <p:cNvPr id="18" name="Down Arrow 17"/>
+          <p:cNvSpPr/>
+          <p:nvPr/>
+        </p:nvSpPr>
+        <p:spPr>
+          <a:xfrm>
+            <a:off x="5760720" y="4572000"/>
+            <a:ext cx="365760" cy="274320"/>
+          </a:xfrm>
+          <a:prstGeom prst="downArrow">
+            <a:avLst/>
+          </a:prstGeom>
+          <a:solidFill>
+            <a:srgbClr val="2563EB"/>
+          </a:solidFill>
+          <a:ln>
+            <a:noFill/>
+          </a:ln>
+        </p:spPr>
+        <p:style>
+          <a:lnRef idx="1">
+            <a:schemeClr val="accent1"/>
+          </a:lnRef>
+          <a:fillRef idx="3">
+            <a:schemeClr val="accent1"/>
+          </a:fillRef>
+          <a:effectRef idx="2">
+            <a:schemeClr val="accent1"/>
+          </a:effectRef>
+          <a:fontRef idx="minor">
+            <a:schemeClr val="lt1"/>
+          </a:fontRef>
+        </p:style>
+        <p:txBody>
+          <a:bodyPr rtlCol="0" anchor="ctr"/>
+          <a:lstStyle/>
+          <a:p>
+            <a:pPr algn="ctr"/>
+          </a:p>
+        </p:txBody>
+      </p:sp>
+      <p:sp>
+        <p:nvSpPr>
+          <p:cNvPr id="19" name="Rounded Rectangle 18"/>
+          <p:cNvSpPr/>
+          <p:nvPr/>
+        </p:nvSpPr>
+        <p:spPr>
+          <a:xfrm>
+            <a:off x="3474720" y="4114800"/>
+            <a:ext cx="2194560" cy="1188720"/>
+          </a:xfrm>
+          <a:prstGeom prst="roundRect">
+            <a:avLst/>
+          </a:prstGeom>
+          <a:solidFill>
+            <a:srgbClr val="FFFFFF"/>
+          </a:solidFill>
+          <a:ln w="25400">
+            <a:solidFill>
+              <a:srgbClr val="2563EB"/>
+            </a:solidFill>
+          </a:ln>
+        </p:spPr>
+        <p:style>
+          <a:lnRef idx="1">
+            <a:schemeClr val="accent1"/>
+          </a:lnRef>
+          <a:fillRef idx="3">
+            <a:schemeClr val="accent1"/>
+          </a:fillRef>
+          <a:effectRef idx="2">
+            <a:schemeClr val="accent1"/>
+          </a:effectRef>
+          <a:fontRef idx="minor">
+            <a:schemeClr val="lt1"/>
+          </a:fontRef>
+        </p:style>
+        <p:txBody>
+          <a:bodyPr rtlCol="0" anchor="ctr" wrap="square"/>
+          <a:lstStyle/>
+          <a:p>
+            <a:pPr algn="ctr">
+              <a:defRPr b="1" sz="1200">
+                <a:solidFill>
+                  <a:srgbClr val="0F172A"/>
+                </a:solidFill>
+              </a:defRPr>
+            </a:pPr>
+            <a:r>
+              <a:t>7. Safe Delivery</a:t>
+            </a:r>
+          </a:p>
+          <a:p>
+            <a:pPr algn="ctr">
+              <a:spcBef>
+                <a:spcPts val="300"/>
+              </a:spcBef>
+              <a:defRPr sz="900">
+                <a:solidFill>
+                  <a:srgbClr val="475569"/>
+                </a:solidFill>
+              </a:defRPr>
+            </a:pPr>
+            <a:r>
+              <a:t>Food delivered to NGO shelters</a:t>
+            </a:r>
+          </a:p>
+        </p:txBody>
+      </p:sp>
+      <p:sp>
+        <p:nvSpPr>
+          <p:cNvPr id="20" name="Down Arrow 19"/>
+          <p:cNvSpPr/>
+          <p:nvPr/>
+        </p:nvSpPr>
+        <p:spPr>
+          <a:xfrm>
+            <a:off x="3017520" y="4572000"/>
+            <a:ext cx="365760" cy="274320"/>
+          </a:xfrm>
+          <a:prstGeom prst="downArrow">
+            <a:avLst/>
+          </a:prstGeom>
+          <a:solidFill>
+            <a:srgbClr val="2563EB"/>
+          </a:solidFill>
+          <a:ln>
+            <a:noFill/>
+          </a:ln>
+        </p:spPr>
+        <p:style>
+          <a:lnRef idx="1">
+            <a:schemeClr val="accent1"/>
+          </a:lnRef>
+          <a:fillRef idx="3">
+            <a:schemeClr val="accent1"/>
+          </a:fillRef>
+          <a:effectRef idx="2">
+            <a:schemeClr val="accent1"/>
+          </a:effectRef>
+          <a:fontRef idx="minor">
+            <a:schemeClr val="lt1"/>
+          </a:fontRef>
+        </p:style>
+        <p:txBody>
+          <a:bodyPr rtlCol="0" anchor="ctr"/>
+          <a:lstStyle/>
+          <a:p>
+            <a:pPr algn="ctr"/>
+          </a:p>
+        </p:txBody>
+      </p:sp>
+      <p:sp>
+        <p:nvSpPr>
+          <p:cNvPr id="21" name="Rounded Rectangle 20"/>
+          <p:cNvSpPr/>
+          <p:nvPr/>
+        </p:nvSpPr>
+        <p:spPr>
+          <a:xfrm>
+            <a:off x="731520" y="4114800"/>
+            <a:ext cx="2194560" cy="1188720"/>
+          </a:xfrm>
+          <a:prstGeom prst="roundRect">
+            <a:avLst/>
+          </a:prstGeom>
+          <a:solidFill>
+            <a:srgbClr val="FFFFFF"/>
+          </a:solidFill>
+          <a:ln w="25400">
+            <a:solidFill>
+              <a:srgbClr val="16A34A"/>
+            </a:solidFill>
+          </a:ln>
+        </p:spPr>
+        <p:style>
+          <a:lnRef idx="1">
+            <a:schemeClr val="accent1"/>
+          </a:lnRef>
+          <a:fillRef idx="3">
+            <a:schemeClr val="accent1"/>
+          </a:fillRef>
+          <a:effectRef idx="2">
+            <a:schemeClr val="accent1"/>
+          </a:effectRef>
+          <a:fontRef idx="minor">
+            <a:schemeClr val="lt1"/>
+          </a:fontRef>
+        </p:style>
+        <p:txBody>
+          <a:bodyPr rtlCol="0" anchor="ctr" wrap="square"/>
+          <a:lstStyle/>
+          <a:p>
+            <a:pPr algn="ctr">
+              <a:defRPr b="1" sz="1200">
+                <a:solidFill>
+                  <a:srgbClr val="0F172A"/>
+                </a:solidFill>
+              </a:defRPr>
+            </a:pPr>
+            <a:r>
+              <a:t>8. 80G Tax Shield</a:t>
+            </a:r>
+          </a:p>
+          <a:p>
+            <a:pPr algn="ctr">
+              <a:spcBef>
+                <a:spcPts val="300"/>
+              </a:spcBef>
+              <a:defRPr sz="900">
+                <a:solidFill>
+                  <a:srgbClr val="475569"/>
+                </a:solidFill>
+              </a:defRPr>
+            </a:pPr>
+            <a:r>
+              <a:t>Section 80G tax PDF dispatched</a:t>
             </a:r>
           </a:p>
         </p:txBody>
@@ -4732,7 +6226,7 @@
               </a:defRPr>
             </a:pPr>
             <a:r>
-              <a:t>SECTION 03: COMPLIANCE AUTOMATION</a:t>
+              <a:t>SECTION 02: PROPOSED METHODOLOGY</a:t>
             </a:r>
           </a:p>
         </p:txBody>
@@ -4768,7 +6262,7 @@
               </a:defRPr>
             </a:pPr>
             <a:r>
-              <a:t>Automated Tax Benefit Valuation</a:t>
+              <a:t>System Architecture &amp; Communications</a:t>
             </a:r>
           </a:p>
         </p:txBody>
@@ -4824,7 +6318,7 @@
             <a:avLst/>
           </a:prstGeom>
           <a:solidFill>
-            <a:srgbClr val="E2E8F0"/>
+            <a:srgbClr val="2563EB"/>
           </a:solidFill>
           <a:ln>
             <a:noFill/>
@@ -4852,52 +6346,26 @@
           </a:p>
         </p:txBody>
       </p:sp>
-      <p:pic>
-        <p:nvPicPr>
-          <p:cNvPr id="7" name="Picture 6" descr="aahaar_tax_exemption.png"/>
-          <p:cNvPicPr>
-            <a:picLocks noChangeAspect="1"/>
-          </p:cNvPicPr>
-          <p:nvPr/>
-        </p:nvPicPr>
-        <p:blipFill>
-          <a:blip r:embed="rId2"/>
-          <a:stretch>
-            <a:fillRect/>
-          </a:stretch>
-        </p:blipFill>
-        <p:spPr>
-          <a:xfrm>
-            <a:off x="731520" y="1463040"/>
-            <a:ext cx="4572000" cy="4572000"/>
-          </a:xfrm>
-          <a:prstGeom prst="rect">
-            <a:avLst/>
-          </a:prstGeom>
-        </p:spPr>
-      </p:pic>
-      <p:sp>
-        <p:nvSpPr>
-          <p:cNvPr id="8" name="Rounded Rectangle 7"/>
+      <p:sp>
+        <p:nvSpPr>
+          <p:cNvPr id="7" name="Rounded Rectangle 6"/>
           <p:cNvSpPr/>
           <p:nvPr/>
         </p:nvSpPr>
         <p:spPr>
           <a:xfrm>
-            <a:off x="5943600" y="1463040"/>
-            <a:ext cx="5486400" cy="4572000"/>
+            <a:off x="1371600" y="1645920"/>
+            <a:ext cx="2926080" cy="3200400"/>
           </a:xfrm>
           <a:prstGeom prst="roundRect">
-            <a:avLst>
-              <a:gd name="adj" fmla="val 4000"/>
-            </a:avLst>
+            <a:avLst/>
           </a:prstGeom>
           <a:solidFill>
             <a:srgbClr val="FFFFFF"/>
           </a:solidFill>
-          <a:ln w="19050">
+          <a:ln w="25400">
             <a:solidFill>
-              <a:srgbClr val="E2E8F0"/>
+              <a:srgbClr val="2563EB"/>
             </a:solidFill>
           </a:ln>
         </p:spPr>
@@ -4916,32 +6384,91 @@
           </a:fontRef>
         </p:style>
         <p:txBody>
-          <a:bodyPr rtlCol="0" anchor="ctr"/>
-          <a:lstStyle/>
-          <a:p>
-            <a:pPr algn="ctr"/>
-          </a:p>
-        </p:txBody>
-      </p:sp>
-      <p:sp>
-        <p:nvSpPr>
-          <p:cNvPr id="9" name="Rectangle 8"/>
+          <a:bodyPr rtlCol="0" anchor="ctr" wrap="square"/>
+          <a:lstStyle/>
+          <a:p>
+            <a:pPr algn="ctr">
+              <a:spcAft>
+                <a:spcPts val="1200"/>
+              </a:spcAft>
+              <a:defRPr b="1" sz="1250">
+                <a:solidFill>
+                  <a:srgbClr val="2563EB"/>
+                </a:solidFill>
+              </a:defRPr>
+            </a:pPr>
+            <a:r>
+              <a:t>Presentation Layer (Client)</a:t>
+            </a:r>
+          </a:p>
+          <a:p>
+            <a:pPr>
+              <a:spcAft>
+                <a:spcPts val="800"/>
+              </a:spcAft>
+              <a:defRPr sz="1050">
+                <a:solidFill>
+                  <a:srgbClr val="0F172A"/>
+                </a:solidFill>
+              </a:defRPr>
+            </a:pPr>
+            <a:r>
+              <a:t>▪  React Web Application</a:t>
+            </a:r>
+          </a:p>
+          <a:p>
+            <a:pPr>
+              <a:spcAft>
+                <a:spcPts val="800"/>
+              </a:spcAft>
+              <a:defRPr sz="1050">
+                <a:solidFill>
+                  <a:srgbClr val="0F172A"/>
+                </a:solidFill>
+              </a:defRPr>
+            </a:pPr>
+            <a:r>
+              <a:t>▪  Tailwind CSS Layouts</a:t>
+            </a:r>
+          </a:p>
+          <a:p>
+            <a:pPr>
+              <a:spcAft>
+                <a:spcPts val="800"/>
+              </a:spcAft>
+              <a:defRPr sz="1050">
+                <a:solidFill>
+                  <a:srgbClr val="0F172A"/>
+                </a:solidFill>
+              </a:defRPr>
+            </a:pPr>
+            <a:r>
+              <a:t>▪  Socket.IO Client</a:t>
+            </a:r>
+          </a:p>
+        </p:txBody>
+      </p:sp>
+      <p:sp>
+        <p:nvSpPr>
+          <p:cNvPr id="8" name="Rounded Rectangle 7"/>
           <p:cNvSpPr/>
           <p:nvPr/>
         </p:nvSpPr>
         <p:spPr>
           <a:xfrm>
-            <a:off x="5943600" y="1572768"/>
-            <a:ext cx="73152" cy="4352544"/>
-          </a:xfrm>
-          <a:prstGeom prst="rect">
-            <a:avLst/>
-          </a:prstGeom>
-          <a:solidFill>
-            <a:srgbClr val="F97316"/>
-          </a:solidFill>
-          <a:ln>
-            <a:noFill/>
+            <a:off x="4663440" y="1645920"/>
+            <a:ext cx="2926080" cy="3200400"/>
+          </a:xfrm>
+          <a:prstGeom prst="roundRect">
+            <a:avLst/>
+          </a:prstGeom>
+          <a:solidFill>
+            <a:srgbClr val="FFFFFF"/>
+          </a:solidFill>
+          <a:ln w="25400">
+            <a:solidFill>
+              <a:srgbClr val="16A34A"/>
+            </a:solidFill>
           </a:ln>
         </p:spPr>
         <p:style>
@@ -4959,125 +6486,367 @@
           </a:fontRef>
         </p:style>
         <p:txBody>
-          <a:bodyPr rtlCol="0" anchor="ctr"/>
-          <a:lstStyle/>
-          <a:p>
-            <a:pPr algn="ctr"/>
-          </a:p>
-        </p:txBody>
-      </p:sp>
-      <p:sp>
-        <p:nvSpPr>
-          <p:cNvPr id="10" name="TextBox 9"/>
-          <p:cNvSpPr txBox="1"/>
-          <p:nvPr/>
-        </p:nvSpPr>
-        <p:spPr>
-          <a:xfrm>
-            <a:off x="6217920" y="1645920"/>
-            <a:ext cx="4937760" cy="4206240"/>
-          </a:xfrm>
-          <a:prstGeom prst="rect">
-            <a:avLst/>
-          </a:prstGeom>
-          <a:noFill/>
-        </p:spPr>
-        <p:txBody>
-          <a:bodyPr wrap="square" lIns="0" rIns="0" tIns="0" bIns="0">
-            <a:spAutoFit/>
-          </a:bodyPr>
-          <a:lstStyle/>
+          <a:bodyPr rtlCol="0" anchor="ctr" wrap="square"/>
+          <a:lstStyle/>
+          <a:p>
+            <a:pPr algn="ctr">
+              <a:spcAft>
+                <a:spcPts val="1200"/>
+              </a:spcAft>
+              <a:defRPr b="1" sz="1250">
+                <a:solidFill>
+                  <a:srgbClr val="16A34A"/>
+                </a:solidFill>
+              </a:defRPr>
+            </a:pPr>
+            <a:r>
+              <a:t>Application Layer (Server)</a:t>
+            </a:r>
+          </a:p>
           <a:p>
             <a:pPr>
               <a:spcAft>
-                <a:spcPts val="1000"/>
-              </a:spcAft>
-              <a:defRPr sz="1400" b="1">
-                <a:solidFill>
-                  <a:srgbClr val="0F172A"/>
-                </a:solidFill>
-                <a:latin typeface="Plus Jakarta Sans"/>
-              </a:defRPr>
-            </a:pPr>
-            <a:r>
-              <a:t>50% Tax Exemption Protocol</a:t>
-            </a:r>
-          </a:p>
-          <a:p>
-            <a:pPr>
-              <a:lnSpc>
-                <a:spcPct val="105000"/>
-              </a:lnSpc>
-              <a:spcAft>
-                <a:spcPts val="500"/>
+                <a:spcPts val="800"/>
               </a:spcAft>
               <a:defRPr sz="1050">
                 <a:solidFill>
-                  <a:srgbClr val="475569"/>
-                </a:solidFill>
-                <a:latin typeface="Plus Jakarta Sans"/>
-              </a:defRPr>
-            </a:pPr>
-            <a:r>
-              <a:t>•  System converts food category and weight weights into fair procurement values.</a:t>
+                  <a:srgbClr val="0F172A"/>
+                </a:solidFill>
+              </a:defRPr>
+            </a:pPr>
+            <a:r>
+              <a:t>▪  Node.js API Endpoint Server</a:t>
             </a:r>
           </a:p>
           <a:p>
             <a:pPr>
-              <a:lnSpc>
-                <a:spcPct val="105000"/>
-              </a:lnSpc>
               <a:spcAft>
-                <a:spcPts val="500"/>
+                <a:spcPts val="800"/>
               </a:spcAft>
               <a:defRPr sz="1050">
                 <a:solidFill>
-                  <a:srgbClr val="475569"/>
-                </a:solidFill>
-                <a:latin typeface="Plus Jakarta Sans"/>
-              </a:defRPr>
-            </a:pPr>
-            <a:r>
-              <a:t>•  Enables corporate donors to legally claim a 50% Section 80G tax deduction.</a:t>
+                  <a:srgbClr val="0F172A"/>
+                </a:solidFill>
+              </a:defRPr>
+            </a:pPr>
+            <a:r>
+              <a:t>▪  Express Route Controllers</a:t>
             </a:r>
           </a:p>
           <a:p>
             <a:pPr>
-              <a:lnSpc>
-                <a:spcPct val="105000"/>
-              </a:lnSpc>
               <a:spcAft>
-                <a:spcPts val="500"/>
+                <a:spcPts val="800"/>
               </a:spcAft>
               <a:defRPr sz="1050">
                 <a:solidFill>
-                  <a:srgbClr val="475569"/>
-                </a:solidFill>
-                <a:latin typeface="Plus Jakarta Sans"/>
-              </a:defRPr>
-            </a:pPr>
-            <a:r>
-              <a:t>•  Generates compliant, watermarked PDF certificates containing smart smartphone-scannable QR verification.</a:t>
+                  <a:srgbClr val="0F172A"/>
+                </a:solidFill>
+              </a:defRPr>
+            </a:pPr>
+            <a:r>
+              <a:t>▪  JWT Token Authentication</a:t>
+            </a:r>
+          </a:p>
+        </p:txBody>
+      </p:sp>
+      <p:sp>
+        <p:nvSpPr>
+          <p:cNvPr id="9" name="Rounded Rectangle 8"/>
+          <p:cNvSpPr/>
+          <p:nvPr/>
+        </p:nvSpPr>
+        <p:spPr>
+          <a:xfrm>
+            <a:off x="7955279" y="1645920"/>
+            <a:ext cx="2926080" cy="3200400"/>
+          </a:xfrm>
+          <a:prstGeom prst="roundRect">
+            <a:avLst/>
+          </a:prstGeom>
+          <a:solidFill>
+            <a:srgbClr val="FFFFFF"/>
+          </a:solidFill>
+          <a:ln w="25400">
+            <a:solidFill>
+              <a:srgbClr val="F97316"/>
+            </a:solidFill>
+          </a:ln>
+        </p:spPr>
+        <p:style>
+          <a:lnRef idx="1">
+            <a:schemeClr val="accent1"/>
+          </a:lnRef>
+          <a:fillRef idx="3">
+            <a:schemeClr val="accent1"/>
+          </a:fillRef>
+          <a:effectRef idx="2">
+            <a:schemeClr val="accent1"/>
+          </a:effectRef>
+          <a:fontRef idx="minor">
+            <a:schemeClr val="lt1"/>
+          </a:fontRef>
+        </p:style>
+        <p:txBody>
+          <a:bodyPr rtlCol="0" anchor="ctr" wrap="square"/>
+          <a:lstStyle/>
+          <a:p>
+            <a:pPr algn="ctr">
+              <a:spcAft>
+                <a:spcPts val="1200"/>
+              </a:spcAft>
+              <a:defRPr b="1" sz="1250">
+                <a:solidFill>
+                  <a:srgbClr val="F97316"/>
+                </a:solidFill>
+              </a:defRPr>
+            </a:pPr>
+            <a:r>
+              <a:t>Resource Layer (Storage)</a:t>
             </a:r>
           </a:p>
           <a:p>
             <a:pPr>
-              <a:lnSpc>
-                <a:spcPct val="105000"/>
-              </a:lnSpc>
               <a:spcAft>
-                <a:spcPts val="500"/>
+                <a:spcPts val="800"/>
               </a:spcAft>
               <a:defRPr sz="1050">
                 <a:solidFill>
+                  <a:srgbClr val="0F172A"/>
+                </a:solidFill>
+              </a:defRPr>
+            </a:pPr>
+            <a:r>
+              <a:t>▪  MongoDB Atlas Database</a:t>
+            </a:r>
+          </a:p>
+          <a:p>
+            <a:pPr>
+              <a:spcAft>
+                <a:spcPts val="800"/>
+              </a:spcAft>
+              <a:defRPr sz="1050">
+                <a:solidFill>
+                  <a:srgbClr val="0F172A"/>
+                </a:solidFill>
+              </a:defRPr>
+            </a:pPr>
+            <a:r>
+              <a:t>▪  Cloudinary Media Assets</a:t>
+            </a:r>
+          </a:p>
+          <a:p>
+            <a:pPr>
+              <a:spcAft>
+                <a:spcPts val="800"/>
+              </a:spcAft>
+              <a:defRPr sz="1050">
+                <a:solidFill>
+                  <a:srgbClr val="0F172A"/>
+                </a:solidFill>
+              </a:defRPr>
+            </a:pPr>
+            <a:r>
+              <a:t>▪  On-Chain Log Ledger</a:t>
+            </a:r>
+          </a:p>
+        </p:txBody>
+      </p:sp>
+      <p:sp>
+        <p:nvSpPr>
+          <p:cNvPr id="10" name="Right Arrow 9"/>
+          <p:cNvSpPr/>
+          <p:nvPr/>
+        </p:nvSpPr>
+        <p:spPr>
+          <a:xfrm>
+            <a:off x="4343400" y="2926080"/>
+            <a:ext cx="274320" cy="274320"/>
+          </a:xfrm>
+          <a:prstGeom prst="rightArrow">
+            <a:avLst/>
+          </a:prstGeom>
+          <a:solidFill>
+            <a:srgbClr val="2563EB"/>
+          </a:solidFill>
+          <a:ln>
+            <a:noFill/>
+          </a:ln>
+        </p:spPr>
+        <p:style>
+          <a:lnRef idx="1">
+            <a:schemeClr val="accent1"/>
+          </a:lnRef>
+          <a:fillRef idx="3">
+            <a:schemeClr val="accent1"/>
+          </a:fillRef>
+          <a:effectRef idx="2">
+            <a:schemeClr val="accent1"/>
+          </a:effectRef>
+          <a:fontRef idx="minor">
+            <a:schemeClr val="lt1"/>
+          </a:fontRef>
+        </p:style>
+        <p:txBody>
+          <a:bodyPr rtlCol="0" anchor="ctr"/>
+          <a:lstStyle/>
+          <a:p>
+            <a:pPr algn="ctr"/>
+          </a:p>
+        </p:txBody>
+      </p:sp>
+      <p:sp>
+        <p:nvSpPr>
+          <p:cNvPr id="11" name="Right Arrow 10"/>
+          <p:cNvSpPr/>
+          <p:nvPr/>
+        </p:nvSpPr>
+        <p:spPr>
+          <a:xfrm>
+            <a:off x="7635240" y="2926080"/>
+            <a:ext cx="274320" cy="274320"/>
+          </a:xfrm>
+          <a:prstGeom prst="rightArrow">
+            <a:avLst/>
+          </a:prstGeom>
+          <a:solidFill>
+            <a:srgbClr val="2563EB"/>
+          </a:solidFill>
+          <a:ln>
+            <a:noFill/>
+          </a:ln>
+        </p:spPr>
+        <p:style>
+          <a:lnRef idx="1">
+            <a:schemeClr val="accent1"/>
+          </a:lnRef>
+          <a:fillRef idx="3">
+            <a:schemeClr val="accent1"/>
+          </a:fillRef>
+          <a:effectRef idx="2">
+            <a:schemeClr val="accent1"/>
+          </a:effectRef>
+          <a:fontRef idx="minor">
+            <a:schemeClr val="lt1"/>
+          </a:fontRef>
+        </p:style>
+        <p:txBody>
+          <a:bodyPr rtlCol="0" anchor="ctr"/>
+          <a:lstStyle/>
+          <a:p>
+            <a:pPr algn="ctr"/>
+          </a:p>
+        </p:txBody>
+      </p:sp>
+      <p:sp>
+        <p:nvSpPr>
+          <p:cNvPr id="12" name="Rounded Rectangle 11"/>
+          <p:cNvSpPr/>
+          <p:nvPr/>
+        </p:nvSpPr>
+        <p:spPr>
+          <a:xfrm>
+            <a:off x="1371600" y="5120640"/>
+            <a:ext cx="9509760" cy="1188720"/>
+          </a:xfrm>
+          <a:prstGeom prst="roundRect">
+            <a:avLst/>
+          </a:prstGeom>
+          <a:solidFill>
+            <a:srgbClr val="FFFFFF"/>
+          </a:solidFill>
+          <a:ln w="19050">
+            <a:solidFill>
+              <a:srgbClr val="475569"/>
+            </a:solidFill>
+          </a:ln>
+        </p:spPr>
+        <p:style>
+          <a:lnRef idx="1">
+            <a:schemeClr val="accent1"/>
+          </a:lnRef>
+          <a:fillRef idx="3">
+            <a:schemeClr val="accent1"/>
+          </a:fillRef>
+          <a:effectRef idx="2">
+            <a:schemeClr val="accent1"/>
+          </a:effectRef>
+          <a:fontRef idx="minor">
+            <a:schemeClr val="lt1"/>
+          </a:fontRef>
+        </p:style>
+        <p:txBody>
+          <a:bodyPr rtlCol="0" anchor="ctr" wrap="square"/>
+          <a:lstStyle/>
+          <a:p>
+            <a:pPr algn="ctr">
+              <a:spcAft>
+                <a:spcPts val="400"/>
+              </a:spcAft>
+              <a:defRPr b="1" sz="1200">
+                <a:solidFill>
+                  <a:srgbClr val="0F172A"/>
+                </a:solidFill>
+              </a:defRPr>
+            </a:pPr>
+            <a:r>
+              <a:t>Omni-channel Notification Engine Gateway</a:t>
+            </a:r>
+          </a:p>
+          <a:p>
+            <a:pPr>
+              <a:defRPr sz="1050">
+                <a:solidFill>
                   <a:srgbClr val="475569"/>
                 </a:solidFill>
-                <a:latin typeface="Plus Jakarta Sans"/>
-              </a:defRPr>
-            </a:pPr>
-            <a:r>
-              <a:t>•  Verification receipts are locked until admin verifies donor credentials to prevent fraud.</a:t>
-            </a:r>
+              </a:defRPr>
+            </a:pPr>
+            <a:r>
+              <a:t>• Live Screen Synchronization (Socket.IO)    • Background Mobile Alerts (Firebase FCM)    • Transactional SMTP (Email Receipts)</a:t>
+            </a:r>
+          </a:p>
+        </p:txBody>
+      </p:sp>
+      <p:sp>
+        <p:nvSpPr>
+          <p:cNvPr id="13" name="Down Arrow 12"/>
+          <p:cNvSpPr/>
+          <p:nvPr/>
+        </p:nvSpPr>
+        <p:spPr>
+          <a:xfrm>
+            <a:off x="5989320" y="4892040"/>
+            <a:ext cx="182880" cy="210312"/>
+          </a:xfrm>
+          <a:prstGeom prst="downArrow">
+            <a:avLst/>
+          </a:prstGeom>
+          <a:solidFill>
+            <a:srgbClr val="2563EB"/>
+          </a:solidFill>
+          <a:ln>
+            <a:noFill/>
+          </a:ln>
+        </p:spPr>
+        <p:style>
+          <a:lnRef idx="1">
+            <a:schemeClr val="accent1"/>
+          </a:lnRef>
+          <a:fillRef idx="3">
+            <a:schemeClr val="accent1"/>
+          </a:fillRef>
+          <a:effectRef idx="2">
+            <a:schemeClr val="accent1"/>
+          </a:effectRef>
+          <a:fontRef idx="minor">
+            <a:schemeClr val="lt1"/>
+          </a:fontRef>
+        </p:style>
+        <p:txBody>
+          <a:bodyPr rtlCol="0" anchor="ctr"/>
+          <a:lstStyle/>
+          <a:p>
+            <a:pPr algn="ctr"/>
           </a:p>
         </p:txBody>
       </p:sp>
@@ -5173,7 +6942,7 @@
               </a:defRPr>
             </a:pPr>
             <a:r>
-              <a:t>SECTION 03: COMPLIANCE AUTOMATION</a:t>
+              <a:t>SECTION 03: PLATFORM CAPABILITIES</a:t>
             </a:r>
           </a:p>
         </p:txBody>
@@ -5209,7 +6978,7 @@
               </a:defRPr>
             </a:pPr>
             <a:r>
-              <a:t>Real-Time Environmental &amp; Carbon Offsets</a:t>
+              <a:t>Key Platform Features &amp; Dashboards</a:t>
             </a:r>
           </a:p>
         </p:txBody>
@@ -5265,7 +7034,7 @@
             <a:avLst/>
           </a:prstGeom>
           <a:solidFill>
-            <a:srgbClr val="E2E8F0"/>
+            <a:srgbClr val="2563EB"/>
           </a:solidFill>
           <a:ln>
             <a:noFill/>
@@ -5293,45 +7062,19 @@
           </a:p>
         </p:txBody>
       </p:sp>
-      <p:pic>
-        <p:nvPicPr>
-          <p:cNvPr id="7" name="Picture 6" descr="aahaar_esg_carbon.png"/>
-          <p:cNvPicPr>
-            <a:picLocks noChangeAspect="1"/>
-          </p:cNvPicPr>
-          <p:nvPr/>
-        </p:nvPicPr>
-        <p:blipFill>
-          <a:blip r:embed="rId2"/>
-          <a:stretch>
-            <a:fillRect/>
-          </a:stretch>
-        </p:blipFill>
-        <p:spPr>
-          <a:xfrm>
-            <a:off x="731520" y="1463040"/>
-            <a:ext cx="4572000" cy="4572000"/>
-          </a:xfrm>
-          <a:prstGeom prst="rect">
-            <a:avLst/>
-          </a:prstGeom>
-        </p:spPr>
-      </p:pic>
-      <p:sp>
-        <p:nvSpPr>
-          <p:cNvPr id="8" name="Rounded Rectangle 7"/>
+      <p:sp>
+        <p:nvSpPr>
+          <p:cNvPr id="7" name="Rounded Rectangle 6"/>
           <p:cNvSpPr/>
           <p:nvPr/>
         </p:nvSpPr>
         <p:spPr>
           <a:xfrm>
-            <a:off x="5943600" y="1463040"/>
-            <a:ext cx="5486400" cy="4572000"/>
+            <a:off x="731520" y="1645920"/>
+            <a:ext cx="2468880" cy="1188720"/>
           </a:xfrm>
           <a:prstGeom prst="roundRect">
-            <a:avLst>
-              <a:gd name="adj" fmla="val 4000"/>
-            </a:avLst>
+            <a:avLst/>
           </a:prstGeom>
           <a:solidFill>
             <a:srgbClr val="FFFFFF"/>
@@ -5366,20 +7109,20 @@
       </p:sp>
       <p:sp>
         <p:nvSpPr>
-          <p:cNvPr id="9" name="Rectangle 8"/>
+          <p:cNvPr id="8" name="Oval 7"/>
           <p:cNvSpPr/>
           <p:nvPr/>
         </p:nvSpPr>
         <p:spPr>
           <a:xfrm>
-            <a:off x="5943600" y="1572768"/>
-            <a:ext cx="73152" cy="4352544"/>
-          </a:xfrm>
-          <a:prstGeom prst="rect">
-            <a:avLst/>
-          </a:prstGeom>
-          <a:solidFill>
-            <a:srgbClr val="22C55E"/>
+            <a:off x="914400" y="2103120"/>
+            <a:ext cx="137160" cy="137160"/>
+          </a:xfrm>
+          <a:prstGeom prst="ellipse">
+            <a:avLst/>
+          </a:prstGeom>
+          <a:solidFill>
+            <a:srgbClr val="16A34A"/>
           </a:solidFill>
           <a:ln>
             <a:noFill/>
@@ -5409,14 +7152,14 @@
       </p:sp>
       <p:sp>
         <p:nvSpPr>
-          <p:cNvPr id="10" name="TextBox 9"/>
+          <p:cNvPr id="9" name="TextBox 8"/>
           <p:cNvSpPr txBox="1"/>
           <p:nvPr/>
         </p:nvSpPr>
         <p:spPr>
           <a:xfrm>
-            <a:off x="6217920" y="1645920"/>
-            <a:ext cx="4937760" cy="4206240"/>
+            <a:off x="1143000" y="1965960"/>
+            <a:ext cx="1920240" cy="548640"/>
           </a:xfrm>
           <a:prstGeom prst="rect">
             <a:avLst/>
@@ -5424,16 +7167,13 @@
           <a:noFill/>
         </p:spPr>
         <p:txBody>
-          <a:bodyPr wrap="square" lIns="0" rIns="0" tIns="0" bIns="0">
+          <a:bodyPr wrap="square">
             <a:spAutoFit/>
           </a:bodyPr>
           <a:lstStyle/>
           <a:p>
             <a:pPr>
-              <a:spcAft>
-                <a:spcPts val="1000"/>
-              </a:spcAft>
-              <a:defRPr sz="1400" b="1">
+              <a:defRPr sz="1150" b="1">
                 <a:solidFill>
                   <a:srgbClr val="0F172A"/>
                 </a:solidFill>
@@ -5441,83 +7181,1371 @@
               </a:defRPr>
             </a:pPr>
             <a:r>
-              <a:t>ESG Footprint Tracking</a:t>
-            </a:r>
-          </a:p>
+              <a:t>User Authentication</a:t>
+            </a:r>
+          </a:p>
+        </p:txBody>
+      </p:sp>
+      <p:sp>
+        <p:nvSpPr>
+          <p:cNvPr id="10" name="Rounded Rectangle 9"/>
+          <p:cNvSpPr/>
+          <p:nvPr/>
+        </p:nvSpPr>
+        <p:spPr>
+          <a:xfrm>
+            <a:off x="3474720" y="1645920"/>
+            <a:ext cx="2468880" cy="1188720"/>
+          </a:xfrm>
+          <a:prstGeom prst="roundRect">
+            <a:avLst/>
+          </a:prstGeom>
+          <a:solidFill>
+            <a:srgbClr val="FFFFFF"/>
+          </a:solidFill>
+          <a:ln w="19050">
+            <a:solidFill>
+              <a:srgbClr val="E2E8F0"/>
+            </a:solidFill>
+          </a:ln>
+        </p:spPr>
+        <p:style>
+          <a:lnRef idx="1">
+            <a:schemeClr val="accent1"/>
+          </a:lnRef>
+          <a:fillRef idx="3">
+            <a:schemeClr val="accent1"/>
+          </a:fillRef>
+          <a:effectRef idx="2">
+            <a:schemeClr val="accent1"/>
+          </a:effectRef>
+          <a:fontRef idx="minor">
+            <a:schemeClr val="lt1"/>
+          </a:fontRef>
+        </p:style>
+        <p:txBody>
+          <a:bodyPr rtlCol="0" anchor="ctr"/>
+          <a:lstStyle/>
+          <a:p>
+            <a:pPr algn="ctr"/>
+          </a:p>
+        </p:txBody>
+      </p:sp>
+      <p:sp>
+        <p:nvSpPr>
+          <p:cNvPr id="11" name="Oval 10"/>
+          <p:cNvSpPr/>
+          <p:nvPr/>
+        </p:nvSpPr>
+        <p:spPr>
+          <a:xfrm>
+            <a:off x="3657600" y="2103120"/>
+            <a:ext cx="137160" cy="137160"/>
+          </a:xfrm>
+          <a:prstGeom prst="ellipse">
+            <a:avLst/>
+          </a:prstGeom>
+          <a:solidFill>
+            <a:srgbClr val="16A34A"/>
+          </a:solidFill>
+          <a:ln>
+            <a:noFill/>
+          </a:ln>
+        </p:spPr>
+        <p:style>
+          <a:lnRef idx="1">
+            <a:schemeClr val="accent1"/>
+          </a:lnRef>
+          <a:fillRef idx="3">
+            <a:schemeClr val="accent1"/>
+          </a:fillRef>
+          <a:effectRef idx="2">
+            <a:schemeClr val="accent1"/>
+          </a:effectRef>
+          <a:fontRef idx="minor">
+            <a:schemeClr val="lt1"/>
+          </a:fontRef>
+        </p:style>
+        <p:txBody>
+          <a:bodyPr rtlCol="0" anchor="ctr"/>
+          <a:lstStyle/>
+          <a:p>
+            <a:pPr algn="ctr"/>
+          </a:p>
+        </p:txBody>
+      </p:sp>
+      <p:sp>
+        <p:nvSpPr>
+          <p:cNvPr id="12" name="TextBox 11"/>
+          <p:cNvSpPr txBox="1"/>
+          <p:nvPr/>
+        </p:nvSpPr>
+        <p:spPr>
+          <a:xfrm>
+            <a:off x="3886200" y="1965960"/>
+            <a:ext cx="1920240" cy="548640"/>
+          </a:xfrm>
+          <a:prstGeom prst="rect">
+            <a:avLst/>
+          </a:prstGeom>
+          <a:noFill/>
+        </p:spPr>
+        <p:txBody>
+          <a:bodyPr wrap="square">
+            <a:spAutoFit/>
+          </a:bodyPr>
+          <a:lstStyle/>
           <a:p>
             <a:pPr>
-              <a:lnSpc>
-                <a:spcPct val="105000"/>
-              </a:lnSpc>
-              <a:spcAft>
-                <a:spcPts val="500"/>
-              </a:spcAft>
-              <a:defRPr sz="1050">
-                <a:solidFill>
-                  <a:srgbClr val="475569"/>
+              <a:defRPr sz="1150" b="1">
+                <a:solidFill>
+                  <a:srgbClr val="0F172A"/>
                 </a:solidFill>
                 <a:latin typeface="Plus Jakarta Sans"/>
               </a:defRPr>
             </a:pPr>
             <a:r>
-              <a:t>•  Diverting organic waste from landfills avoids anaerobic methane emissions.</a:t>
-            </a:r>
-          </a:p>
+              <a:t>Food Donation Logs</a:t>
+            </a:r>
+          </a:p>
+        </p:txBody>
+      </p:sp>
+      <p:sp>
+        <p:nvSpPr>
+          <p:cNvPr id="13" name="Rounded Rectangle 12"/>
+          <p:cNvSpPr/>
+          <p:nvPr/>
+        </p:nvSpPr>
+        <p:spPr>
+          <a:xfrm>
+            <a:off x="6217920" y="1645920"/>
+            <a:ext cx="2468880" cy="1188720"/>
+          </a:xfrm>
+          <a:prstGeom prst="roundRect">
+            <a:avLst/>
+          </a:prstGeom>
+          <a:solidFill>
+            <a:srgbClr val="FFFFFF"/>
+          </a:solidFill>
+          <a:ln w="19050">
+            <a:solidFill>
+              <a:srgbClr val="E2E8F0"/>
+            </a:solidFill>
+          </a:ln>
+        </p:spPr>
+        <p:style>
+          <a:lnRef idx="1">
+            <a:schemeClr val="accent1"/>
+          </a:lnRef>
+          <a:fillRef idx="3">
+            <a:schemeClr val="accent1"/>
+          </a:fillRef>
+          <a:effectRef idx="2">
+            <a:schemeClr val="accent1"/>
+          </a:effectRef>
+          <a:fontRef idx="minor">
+            <a:schemeClr val="lt1"/>
+          </a:fontRef>
+        </p:style>
+        <p:txBody>
+          <a:bodyPr rtlCol="0" anchor="ctr"/>
+          <a:lstStyle/>
+          <a:p>
+            <a:pPr algn="ctr"/>
+          </a:p>
+        </p:txBody>
+      </p:sp>
+      <p:sp>
+        <p:nvSpPr>
+          <p:cNvPr id="14" name="Oval 13"/>
+          <p:cNvSpPr/>
+          <p:nvPr/>
+        </p:nvSpPr>
+        <p:spPr>
+          <a:xfrm>
+            <a:off x="6400800" y="2103120"/>
+            <a:ext cx="137160" cy="137160"/>
+          </a:xfrm>
+          <a:prstGeom prst="ellipse">
+            <a:avLst/>
+          </a:prstGeom>
+          <a:solidFill>
+            <a:srgbClr val="16A34A"/>
+          </a:solidFill>
+          <a:ln>
+            <a:noFill/>
+          </a:ln>
+        </p:spPr>
+        <p:style>
+          <a:lnRef idx="1">
+            <a:schemeClr val="accent1"/>
+          </a:lnRef>
+          <a:fillRef idx="3">
+            <a:schemeClr val="accent1"/>
+          </a:fillRef>
+          <a:effectRef idx="2">
+            <a:schemeClr val="accent1"/>
+          </a:effectRef>
+          <a:fontRef idx="minor">
+            <a:schemeClr val="lt1"/>
+          </a:fontRef>
+        </p:style>
+        <p:txBody>
+          <a:bodyPr rtlCol="0" anchor="ctr"/>
+          <a:lstStyle/>
+          <a:p>
+            <a:pPr algn="ctr"/>
+          </a:p>
+        </p:txBody>
+      </p:sp>
+      <p:sp>
+        <p:nvSpPr>
+          <p:cNvPr id="15" name="TextBox 14"/>
+          <p:cNvSpPr txBox="1"/>
+          <p:nvPr/>
+        </p:nvSpPr>
+        <p:spPr>
+          <a:xfrm>
+            <a:off x="6629400" y="1965960"/>
+            <a:ext cx="1920240" cy="548640"/>
+          </a:xfrm>
+          <a:prstGeom prst="rect">
+            <a:avLst/>
+          </a:prstGeom>
+          <a:noFill/>
+        </p:spPr>
+        <p:txBody>
+          <a:bodyPr wrap="square">
+            <a:spAutoFit/>
+          </a:bodyPr>
+          <a:lstStyle/>
           <a:p>
             <a:pPr>
-              <a:lnSpc>
-                <a:spcPct val="105000"/>
-              </a:lnSpc>
-              <a:spcAft>
-                <a:spcPts val="500"/>
-              </a:spcAft>
-              <a:defRPr sz="1050">
-                <a:solidFill>
-                  <a:srgbClr val="475569"/>
+              <a:defRPr sz="1150" b="1">
+                <a:solidFill>
+                  <a:srgbClr val="0F172A"/>
                 </a:solidFill>
                 <a:latin typeface="Plus Jakarta Sans"/>
               </a:defRPr>
             </a:pPr>
             <a:r>
-              <a:t>•  Applies scientific offset models: 2.5 kg CO₂ reduction per kg of surplus food rescued.</a:t>
-            </a:r>
-          </a:p>
+              <a:t>NGO Vetting Gateway</a:t>
+            </a:r>
+          </a:p>
+        </p:txBody>
+      </p:sp>
+      <p:sp>
+        <p:nvSpPr>
+          <p:cNvPr id="16" name="Rounded Rectangle 15"/>
+          <p:cNvSpPr/>
+          <p:nvPr/>
+        </p:nvSpPr>
+        <p:spPr>
+          <a:xfrm>
+            <a:off x="8961120" y="1645920"/>
+            <a:ext cx="2468880" cy="1188720"/>
+          </a:xfrm>
+          <a:prstGeom prst="roundRect">
+            <a:avLst/>
+          </a:prstGeom>
+          <a:solidFill>
+            <a:srgbClr val="FFFFFF"/>
+          </a:solidFill>
+          <a:ln w="19050">
+            <a:solidFill>
+              <a:srgbClr val="E2E8F0"/>
+            </a:solidFill>
+          </a:ln>
+        </p:spPr>
+        <p:style>
+          <a:lnRef idx="1">
+            <a:schemeClr val="accent1"/>
+          </a:lnRef>
+          <a:fillRef idx="3">
+            <a:schemeClr val="accent1"/>
+          </a:fillRef>
+          <a:effectRef idx="2">
+            <a:schemeClr val="accent1"/>
+          </a:effectRef>
+          <a:fontRef idx="minor">
+            <a:schemeClr val="lt1"/>
+          </a:fontRef>
+        </p:style>
+        <p:txBody>
+          <a:bodyPr rtlCol="0" anchor="ctr"/>
+          <a:lstStyle/>
+          <a:p>
+            <a:pPr algn="ctr"/>
+          </a:p>
+        </p:txBody>
+      </p:sp>
+      <p:sp>
+        <p:nvSpPr>
+          <p:cNvPr id="17" name="Oval 16"/>
+          <p:cNvSpPr/>
+          <p:nvPr/>
+        </p:nvSpPr>
+        <p:spPr>
+          <a:xfrm>
+            <a:off x="9144000" y="2103120"/>
+            <a:ext cx="137160" cy="137160"/>
+          </a:xfrm>
+          <a:prstGeom prst="ellipse">
+            <a:avLst/>
+          </a:prstGeom>
+          <a:solidFill>
+            <a:srgbClr val="16A34A"/>
+          </a:solidFill>
+          <a:ln>
+            <a:noFill/>
+          </a:ln>
+        </p:spPr>
+        <p:style>
+          <a:lnRef idx="1">
+            <a:schemeClr val="accent1"/>
+          </a:lnRef>
+          <a:fillRef idx="3">
+            <a:schemeClr val="accent1"/>
+          </a:fillRef>
+          <a:effectRef idx="2">
+            <a:schemeClr val="accent1"/>
+          </a:effectRef>
+          <a:fontRef idx="minor">
+            <a:schemeClr val="lt1"/>
+          </a:fontRef>
+        </p:style>
+        <p:txBody>
+          <a:bodyPr rtlCol="0" anchor="ctr"/>
+          <a:lstStyle/>
+          <a:p>
+            <a:pPr algn="ctr"/>
+          </a:p>
+        </p:txBody>
+      </p:sp>
+      <p:sp>
+        <p:nvSpPr>
+          <p:cNvPr id="18" name="TextBox 17"/>
+          <p:cNvSpPr txBox="1"/>
+          <p:nvPr/>
+        </p:nvSpPr>
+        <p:spPr>
+          <a:xfrm>
+            <a:off x="9372600" y="1965960"/>
+            <a:ext cx="1920240" cy="548640"/>
+          </a:xfrm>
+          <a:prstGeom prst="rect">
+            <a:avLst/>
+          </a:prstGeom>
+          <a:noFill/>
+        </p:spPr>
+        <p:txBody>
+          <a:bodyPr wrap="square">
+            <a:spAutoFit/>
+          </a:bodyPr>
+          <a:lstStyle/>
           <a:p>
             <a:pPr>
-              <a:lnSpc>
-                <a:spcPct val="105000"/>
-              </a:lnSpc>
-              <a:spcAft>
-                <a:spcPts val="500"/>
-              </a:spcAft>
-              <a:defRPr sz="1050">
-                <a:solidFill>
-                  <a:srgbClr val="475569"/>
+              <a:defRPr sz="1150" b="1">
+                <a:solidFill>
+                  <a:srgbClr val="0F172A"/>
                 </a:solidFill>
                 <a:latin typeface="Plus Jakarta Sans"/>
               </a:defRPr>
             </a:pPr>
             <a:r>
-              <a:t>•  Translates carbon numbers into mature tree equivalents (22 kg CO₂/tree/year).</a:t>
-            </a:r>
-          </a:p>
+              <a:t>Admin Dashboard</a:t>
+            </a:r>
+          </a:p>
+        </p:txBody>
+      </p:sp>
+      <p:sp>
+        <p:nvSpPr>
+          <p:cNvPr id="19" name="Rounded Rectangle 18"/>
+          <p:cNvSpPr/>
+          <p:nvPr/>
+        </p:nvSpPr>
+        <p:spPr>
+          <a:xfrm>
+            <a:off x="731520" y="3200400"/>
+            <a:ext cx="2468880" cy="1188720"/>
+          </a:xfrm>
+          <a:prstGeom prst="roundRect">
+            <a:avLst/>
+          </a:prstGeom>
+          <a:solidFill>
+            <a:srgbClr val="FFFFFF"/>
+          </a:solidFill>
+          <a:ln w="19050">
+            <a:solidFill>
+              <a:srgbClr val="E2E8F0"/>
+            </a:solidFill>
+          </a:ln>
+        </p:spPr>
+        <p:style>
+          <a:lnRef idx="1">
+            <a:schemeClr val="accent1"/>
+          </a:lnRef>
+          <a:fillRef idx="3">
+            <a:schemeClr val="accent1"/>
+          </a:fillRef>
+          <a:effectRef idx="2">
+            <a:schemeClr val="accent1"/>
+          </a:effectRef>
+          <a:fontRef idx="minor">
+            <a:schemeClr val="lt1"/>
+          </a:fontRef>
+        </p:style>
+        <p:txBody>
+          <a:bodyPr rtlCol="0" anchor="ctr"/>
+          <a:lstStyle/>
+          <a:p>
+            <a:pPr algn="ctr"/>
+          </a:p>
+        </p:txBody>
+      </p:sp>
+      <p:sp>
+        <p:nvSpPr>
+          <p:cNvPr id="20" name="Oval 19"/>
+          <p:cNvSpPr/>
+          <p:nvPr/>
+        </p:nvSpPr>
+        <p:spPr>
+          <a:xfrm>
+            <a:off x="914400" y="3657600"/>
+            <a:ext cx="137160" cy="137160"/>
+          </a:xfrm>
+          <a:prstGeom prst="ellipse">
+            <a:avLst/>
+          </a:prstGeom>
+          <a:solidFill>
+            <a:srgbClr val="16A34A"/>
+          </a:solidFill>
+          <a:ln>
+            <a:noFill/>
+          </a:ln>
+        </p:spPr>
+        <p:style>
+          <a:lnRef idx="1">
+            <a:schemeClr val="accent1"/>
+          </a:lnRef>
+          <a:fillRef idx="3">
+            <a:schemeClr val="accent1"/>
+          </a:fillRef>
+          <a:effectRef idx="2">
+            <a:schemeClr val="accent1"/>
+          </a:effectRef>
+          <a:fontRef idx="minor">
+            <a:schemeClr val="lt1"/>
+          </a:fontRef>
+        </p:style>
+        <p:txBody>
+          <a:bodyPr rtlCol="0" anchor="ctr"/>
+          <a:lstStyle/>
+          <a:p>
+            <a:pPr algn="ctr"/>
+          </a:p>
+        </p:txBody>
+      </p:sp>
+      <p:sp>
+        <p:nvSpPr>
+          <p:cNvPr id="21" name="TextBox 20"/>
+          <p:cNvSpPr txBox="1"/>
+          <p:nvPr/>
+        </p:nvSpPr>
+        <p:spPr>
+          <a:xfrm>
+            <a:off x="1143000" y="3520440"/>
+            <a:ext cx="1920240" cy="548640"/>
+          </a:xfrm>
+          <a:prstGeom prst="rect">
+            <a:avLst/>
+          </a:prstGeom>
+          <a:noFill/>
+        </p:spPr>
+        <p:txBody>
+          <a:bodyPr wrap="square">
+            <a:spAutoFit/>
+          </a:bodyPr>
+          <a:lstStyle/>
           <a:p>
             <a:pPr>
-              <a:lnSpc>
-                <a:spcPct val="105000"/>
-              </a:lnSpc>
-              <a:spcAft>
-                <a:spcPts val="500"/>
-              </a:spcAft>
-              <a:defRPr sz="1050">
-                <a:solidFill>
-                  <a:srgbClr val="475569"/>
+              <a:defRPr sz="1150" b="1">
+                <a:solidFill>
+                  <a:srgbClr val="0F172A"/>
                 </a:solidFill>
                 <a:latin typeface="Plus Jakarta Sans"/>
               </a:defRPr>
             </a:pPr>
             <a:r>
-              <a:t>•  Prepares clean, board-ready sustainability metrics for annual CSR reports.</a:t>
+              <a:t>Rider Coordination</a:t>
+            </a:r>
+          </a:p>
+        </p:txBody>
+      </p:sp>
+      <p:sp>
+        <p:nvSpPr>
+          <p:cNvPr id="22" name="Rounded Rectangle 21"/>
+          <p:cNvSpPr/>
+          <p:nvPr/>
+        </p:nvSpPr>
+        <p:spPr>
+          <a:xfrm>
+            <a:off x="3474720" y="3200400"/>
+            <a:ext cx="2468880" cy="1188720"/>
+          </a:xfrm>
+          <a:prstGeom prst="roundRect">
+            <a:avLst/>
+          </a:prstGeom>
+          <a:solidFill>
+            <a:srgbClr val="FFFFFF"/>
+          </a:solidFill>
+          <a:ln w="19050">
+            <a:solidFill>
+              <a:srgbClr val="E2E8F0"/>
+            </a:solidFill>
+          </a:ln>
+        </p:spPr>
+        <p:style>
+          <a:lnRef idx="1">
+            <a:schemeClr val="accent1"/>
+          </a:lnRef>
+          <a:fillRef idx="3">
+            <a:schemeClr val="accent1"/>
+          </a:fillRef>
+          <a:effectRef idx="2">
+            <a:schemeClr val="accent1"/>
+          </a:effectRef>
+          <a:fontRef idx="minor">
+            <a:schemeClr val="lt1"/>
+          </a:fontRef>
+        </p:style>
+        <p:txBody>
+          <a:bodyPr rtlCol="0" anchor="ctr"/>
+          <a:lstStyle/>
+          <a:p>
+            <a:pPr algn="ctr"/>
+          </a:p>
+        </p:txBody>
+      </p:sp>
+      <p:sp>
+        <p:nvSpPr>
+          <p:cNvPr id="23" name="Oval 22"/>
+          <p:cNvSpPr/>
+          <p:nvPr/>
+        </p:nvSpPr>
+        <p:spPr>
+          <a:xfrm>
+            <a:off x="3657600" y="3657600"/>
+            <a:ext cx="137160" cy="137160"/>
+          </a:xfrm>
+          <a:prstGeom prst="ellipse">
+            <a:avLst/>
+          </a:prstGeom>
+          <a:solidFill>
+            <a:srgbClr val="16A34A"/>
+          </a:solidFill>
+          <a:ln>
+            <a:noFill/>
+          </a:ln>
+        </p:spPr>
+        <p:style>
+          <a:lnRef idx="1">
+            <a:schemeClr val="accent1"/>
+          </a:lnRef>
+          <a:fillRef idx="3">
+            <a:schemeClr val="accent1"/>
+          </a:fillRef>
+          <a:effectRef idx="2">
+            <a:schemeClr val="accent1"/>
+          </a:effectRef>
+          <a:fontRef idx="minor">
+            <a:schemeClr val="lt1"/>
+          </a:fontRef>
+        </p:style>
+        <p:txBody>
+          <a:bodyPr rtlCol="0" anchor="ctr"/>
+          <a:lstStyle/>
+          <a:p>
+            <a:pPr algn="ctr"/>
+          </a:p>
+        </p:txBody>
+      </p:sp>
+      <p:sp>
+        <p:nvSpPr>
+          <p:cNvPr id="24" name="TextBox 23"/>
+          <p:cNvSpPr txBox="1"/>
+          <p:nvPr/>
+        </p:nvSpPr>
+        <p:spPr>
+          <a:xfrm>
+            <a:off x="3886200" y="3520440"/>
+            <a:ext cx="1920240" cy="548640"/>
+          </a:xfrm>
+          <a:prstGeom prst="rect">
+            <a:avLst/>
+          </a:prstGeom>
+          <a:noFill/>
+        </p:spPr>
+        <p:txBody>
+          <a:bodyPr wrap="square">
+            <a:spAutoFit/>
+          </a:bodyPr>
+          <a:lstStyle/>
+          <a:p>
+            <a:pPr>
+              <a:defRPr sz="1150" b="1">
+                <a:solidFill>
+                  <a:srgbClr val="0F172A"/>
+                </a:solidFill>
+                <a:latin typeface="Plus Jakarta Sans"/>
+              </a:defRPr>
+            </a:pPr>
+            <a:r>
+              <a:t>Live Notifications</a:t>
+            </a:r>
+          </a:p>
+        </p:txBody>
+      </p:sp>
+      <p:sp>
+        <p:nvSpPr>
+          <p:cNvPr id="25" name="Rounded Rectangle 24"/>
+          <p:cNvSpPr/>
+          <p:nvPr/>
+        </p:nvSpPr>
+        <p:spPr>
+          <a:xfrm>
+            <a:off x="6217920" y="3200400"/>
+            <a:ext cx="2468880" cy="1188720"/>
+          </a:xfrm>
+          <a:prstGeom prst="roundRect">
+            <a:avLst/>
+          </a:prstGeom>
+          <a:solidFill>
+            <a:srgbClr val="FFFFFF"/>
+          </a:solidFill>
+          <a:ln w="19050">
+            <a:solidFill>
+              <a:srgbClr val="E2E8F0"/>
+            </a:solidFill>
+          </a:ln>
+        </p:spPr>
+        <p:style>
+          <a:lnRef idx="1">
+            <a:schemeClr val="accent1"/>
+          </a:lnRef>
+          <a:fillRef idx="3">
+            <a:schemeClr val="accent1"/>
+          </a:fillRef>
+          <a:effectRef idx="2">
+            <a:schemeClr val="accent1"/>
+          </a:effectRef>
+          <a:fontRef idx="minor">
+            <a:schemeClr val="lt1"/>
+          </a:fontRef>
+        </p:style>
+        <p:txBody>
+          <a:bodyPr rtlCol="0" anchor="ctr"/>
+          <a:lstStyle/>
+          <a:p>
+            <a:pPr algn="ctr"/>
+          </a:p>
+        </p:txBody>
+      </p:sp>
+      <p:sp>
+        <p:nvSpPr>
+          <p:cNvPr id="26" name="Oval 25"/>
+          <p:cNvSpPr/>
+          <p:nvPr/>
+        </p:nvSpPr>
+        <p:spPr>
+          <a:xfrm>
+            <a:off x="6400800" y="3657600"/>
+            <a:ext cx="137160" cy="137160"/>
+          </a:xfrm>
+          <a:prstGeom prst="ellipse">
+            <a:avLst/>
+          </a:prstGeom>
+          <a:solidFill>
+            <a:srgbClr val="16A34A"/>
+          </a:solidFill>
+          <a:ln>
+            <a:noFill/>
+          </a:ln>
+        </p:spPr>
+        <p:style>
+          <a:lnRef idx="1">
+            <a:schemeClr val="accent1"/>
+          </a:lnRef>
+          <a:fillRef idx="3">
+            <a:schemeClr val="accent1"/>
+          </a:fillRef>
+          <a:effectRef idx="2">
+            <a:schemeClr val="accent1"/>
+          </a:effectRef>
+          <a:fontRef idx="minor">
+            <a:schemeClr val="lt1"/>
+          </a:fontRef>
+        </p:style>
+        <p:txBody>
+          <a:bodyPr rtlCol="0" anchor="ctr"/>
+          <a:lstStyle/>
+          <a:p>
+            <a:pPr algn="ctr"/>
+          </a:p>
+        </p:txBody>
+      </p:sp>
+      <p:sp>
+        <p:nvSpPr>
+          <p:cNvPr id="27" name="TextBox 26"/>
+          <p:cNvSpPr txBox="1"/>
+          <p:nvPr/>
+        </p:nvSpPr>
+        <p:spPr>
+          <a:xfrm>
+            <a:off x="6629400" y="3520440"/>
+            <a:ext cx="1920240" cy="548640"/>
+          </a:xfrm>
+          <a:prstGeom prst="rect">
+            <a:avLst/>
+          </a:prstGeom>
+          <a:noFill/>
+        </p:spPr>
+        <p:txBody>
+          <a:bodyPr wrap="square">
+            <a:spAutoFit/>
+          </a:bodyPr>
+          <a:lstStyle/>
+          <a:p>
+            <a:pPr>
+              <a:defRPr sz="1150" b="1">
+                <a:solidFill>
+                  <a:srgbClr val="0F172A"/>
+                </a:solidFill>
+                <a:latin typeface="Plus Jakarta Sans"/>
+              </a:defRPr>
+            </a:pPr>
+            <a:r>
+              <a:t>QR Code Verification</a:t>
+            </a:r>
+          </a:p>
+        </p:txBody>
+      </p:sp>
+      <p:sp>
+        <p:nvSpPr>
+          <p:cNvPr id="28" name="Rounded Rectangle 27"/>
+          <p:cNvSpPr/>
+          <p:nvPr/>
+        </p:nvSpPr>
+        <p:spPr>
+          <a:xfrm>
+            <a:off x="8961120" y="3200400"/>
+            <a:ext cx="2468880" cy="1188720"/>
+          </a:xfrm>
+          <a:prstGeom prst="roundRect">
+            <a:avLst/>
+          </a:prstGeom>
+          <a:solidFill>
+            <a:srgbClr val="FFFFFF"/>
+          </a:solidFill>
+          <a:ln w="19050">
+            <a:solidFill>
+              <a:srgbClr val="E2E8F0"/>
+            </a:solidFill>
+          </a:ln>
+        </p:spPr>
+        <p:style>
+          <a:lnRef idx="1">
+            <a:schemeClr val="accent1"/>
+          </a:lnRef>
+          <a:fillRef idx="3">
+            <a:schemeClr val="accent1"/>
+          </a:fillRef>
+          <a:effectRef idx="2">
+            <a:schemeClr val="accent1"/>
+          </a:effectRef>
+          <a:fontRef idx="minor">
+            <a:schemeClr val="lt1"/>
+          </a:fontRef>
+        </p:style>
+        <p:txBody>
+          <a:bodyPr rtlCol="0" anchor="ctr"/>
+          <a:lstStyle/>
+          <a:p>
+            <a:pPr algn="ctr"/>
+          </a:p>
+        </p:txBody>
+      </p:sp>
+      <p:sp>
+        <p:nvSpPr>
+          <p:cNvPr id="29" name="Oval 28"/>
+          <p:cNvSpPr/>
+          <p:nvPr/>
+        </p:nvSpPr>
+        <p:spPr>
+          <a:xfrm>
+            <a:off x="9144000" y="3657600"/>
+            <a:ext cx="137160" cy="137160"/>
+          </a:xfrm>
+          <a:prstGeom prst="ellipse">
+            <a:avLst/>
+          </a:prstGeom>
+          <a:solidFill>
+            <a:srgbClr val="16A34A"/>
+          </a:solidFill>
+          <a:ln>
+            <a:noFill/>
+          </a:ln>
+        </p:spPr>
+        <p:style>
+          <a:lnRef idx="1">
+            <a:schemeClr val="accent1"/>
+          </a:lnRef>
+          <a:fillRef idx="3">
+            <a:schemeClr val="accent1"/>
+          </a:fillRef>
+          <a:effectRef idx="2">
+            <a:schemeClr val="accent1"/>
+          </a:effectRef>
+          <a:fontRef idx="minor">
+            <a:schemeClr val="lt1"/>
+          </a:fontRef>
+        </p:style>
+        <p:txBody>
+          <a:bodyPr rtlCol="0" anchor="ctr"/>
+          <a:lstStyle/>
+          <a:p>
+            <a:pPr algn="ctr"/>
+          </a:p>
+        </p:txBody>
+      </p:sp>
+      <p:sp>
+        <p:nvSpPr>
+          <p:cNvPr id="30" name="TextBox 29"/>
+          <p:cNvSpPr txBox="1"/>
+          <p:nvPr/>
+        </p:nvSpPr>
+        <p:spPr>
+          <a:xfrm>
+            <a:off x="9372600" y="3520440"/>
+            <a:ext cx="1920240" cy="548640"/>
+          </a:xfrm>
+          <a:prstGeom prst="rect">
+            <a:avLst/>
+          </a:prstGeom>
+          <a:noFill/>
+        </p:spPr>
+        <p:txBody>
+          <a:bodyPr wrap="square">
+            <a:spAutoFit/>
+          </a:bodyPr>
+          <a:lstStyle/>
+          <a:p>
+            <a:pPr>
+              <a:defRPr sz="1150" b="1">
+                <a:solidFill>
+                  <a:srgbClr val="0F172A"/>
+                </a:solidFill>
+                <a:latin typeface="Plus Jakarta Sans"/>
+              </a:defRPr>
+            </a:pPr>
+            <a:r>
+              <a:t>Real-Time Tracking</a:t>
+            </a:r>
+          </a:p>
+        </p:txBody>
+      </p:sp>
+      <p:sp>
+        <p:nvSpPr>
+          <p:cNvPr id="31" name="Rounded Rectangle 30"/>
+          <p:cNvSpPr/>
+          <p:nvPr/>
+        </p:nvSpPr>
+        <p:spPr>
+          <a:xfrm>
+            <a:off x="731520" y="4754880"/>
+            <a:ext cx="2468880" cy="1188720"/>
+          </a:xfrm>
+          <a:prstGeom prst="roundRect">
+            <a:avLst/>
+          </a:prstGeom>
+          <a:solidFill>
+            <a:srgbClr val="FFFFFF"/>
+          </a:solidFill>
+          <a:ln w="19050">
+            <a:solidFill>
+              <a:srgbClr val="E2E8F0"/>
+            </a:solidFill>
+          </a:ln>
+        </p:spPr>
+        <p:style>
+          <a:lnRef idx="1">
+            <a:schemeClr val="accent1"/>
+          </a:lnRef>
+          <a:fillRef idx="3">
+            <a:schemeClr val="accent1"/>
+          </a:fillRef>
+          <a:effectRef idx="2">
+            <a:schemeClr val="accent1"/>
+          </a:effectRef>
+          <a:fontRef idx="minor">
+            <a:schemeClr val="lt1"/>
+          </a:fontRef>
+        </p:style>
+        <p:txBody>
+          <a:bodyPr rtlCol="0" anchor="ctr"/>
+          <a:lstStyle/>
+          <a:p>
+            <a:pPr algn="ctr"/>
+          </a:p>
+        </p:txBody>
+      </p:sp>
+      <p:sp>
+        <p:nvSpPr>
+          <p:cNvPr id="32" name="Oval 31"/>
+          <p:cNvSpPr/>
+          <p:nvPr/>
+        </p:nvSpPr>
+        <p:spPr>
+          <a:xfrm>
+            <a:off x="914400" y="5212080"/>
+            <a:ext cx="137160" cy="137160"/>
+          </a:xfrm>
+          <a:prstGeom prst="ellipse">
+            <a:avLst/>
+          </a:prstGeom>
+          <a:solidFill>
+            <a:srgbClr val="16A34A"/>
+          </a:solidFill>
+          <a:ln>
+            <a:noFill/>
+          </a:ln>
+        </p:spPr>
+        <p:style>
+          <a:lnRef idx="1">
+            <a:schemeClr val="accent1"/>
+          </a:lnRef>
+          <a:fillRef idx="3">
+            <a:schemeClr val="accent1"/>
+          </a:fillRef>
+          <a:effectRef idx="2">
+            <a:schemeClr val="accent1"/>
+          </a:effectRef>
+          <a:fontRef idx="minor">
+            <a:schemeClr val="lt1"/>
+          </a:fontRef>
+        </p:style>
+        <p:txBody>
+          <a:bodyPr rtlCol="0" anchor="ctr"/>
+          <a:lstStyle/>
+          <a:p>
+            <a:pPr algn="ctr"/>
+          </a:p>
+        </p:txBody>
+      </p:sp>
+      <p:sp>
+        <p:nvSpPr>
+          <p:cNvPr id="33" name="TextBox 32"/>
+          <p:cNvSpPr txBox="1"/>
+          <p:nvPr/>
+        </p:nvSpPr>
+        <p:spPr>
+          <a:xfrm>
+            <a:off x="1143000" y="5074920"/>
+            <a:ext cx="1920240" cy="548640"/>
+          </a:xfrm>
+          <a:prstGeom prst="rect">
+            <a:avLst/>
+          </a:prstGeom>
+          <a:noFill/>
+        </p:spPr>
+        <p:txBody>
+          <a:bodyPr wrap="square">
+            <a:spAutoFit/>
+          </a:bodyPr>
+          <a:lstStyle/>
+          <a:p>
+            <a:pPr>
+              <a:defRPr sz="1150" b="1">
+                <a:solidFill>
+                  <a:srgbClr val="0F172A"/>
+                </a:solidFill>
+                <a:latin typeface="Plus Jakarta Sans"/>
+              </a:defRPr>
+            </a:pPr>
+            <a:r>
+              <a:t>80G Tax Certificates</a:t>
+            </a:r>
+          </a:p>
+        </p:txBody>
+      </p:sp>
+      <p:sp>
+        <p:nvSpPr>
+          <p:cNvPr id="34" name="Rounded Rectangle 33"/>
+          <p:cNvSpPr/>
+          <p:nvPr/>
+        </p:nvSpPr>
+        <p:spPr>
+          <a:xfrm>
+            <a:off x="3474720" y="4754880"/>
+            <a:ext cx="2468880" cy="1188720"/>
+          </a:xfrm>
+          <a:prstGeom prst="roundRect">
+            <a:avLst/>
+          </a:prstGeom>
+          <a:solidFill>
+            <a:srgbClr val="FFFFFF"/>
+          </a:solidFill>
+          <a:ln w="19050">
+            <a:solidFill>
+              <a:srgbClr val="E2E8F0"/>
+            </a:solidFill>
+          </a:ln>
+        </p:spPr>
+        <p:style>
+          <a:lnRef idx="1">
+            <a:schemeClr val="accent1"/>
+          </a:lnRef>
+          <a:fillRef idx="3">
+            <a:schemeClr val="accent1"/>
+          </a:fillRef>
+          <a:effectRef idx="2">
+            <a:schemeClr val="accent1"/>
+          </a:effectRef>
+          <a:fontRef idx="minor">
+            <a:schemeClr val="lt1"/>
+          </a:fontRef>
+        </p:style>
+        <p:txBody>
+          <a:bodyPr rtlCol="0" anchor="ctr"/>
+          <a:lstStyle/>
+          <a:p>
+            <a:pPr algn="ctr"/>
+          </a:p>
+        </p:txBody>
+      </p:sp>
+      <p:sp>
+        <p:nvSpPr>
+          <p:cNvPr id="35" name="Oval 34"/>
+          <p:cNvSpPr/>
+          <p:nvPr/>
+        </p:nvSpPr>
+        <p:spPr>
+          <a:xfrm>
+            <a:off x="3657600" y="5212080"/>
+            <a:ext cx="137160" cy="137160"/>
+          </a:xfrm>
+          <a:prstGeom prst="ellipse">
+            <a:avLst/>
+          </a:prstGeom>
+          <a:solidFill>
+            <a:srgbClr val="16A34A"/>
+          </a:solidFill>
+          <a:ln>
+            <a:noFill/>
+          </a:ln>
+        </p:spPr>
+        <p:style>
+          <a:lnRef idx="1">
+            <a:schemeClr val="accent1"/>
+          </a:lnRef>
+          <a:fillRef idx="3">
+            <a:schemeClr val="accent1"/>
+          </a:fillRef>
+          <a:effectRef idx="2">
+            <a:schemeClr val="accent1"/>
+          </a:effectRef>
+          <a:fontRef idx="minor">
+            <a:schemeClr val="lt1"/>
+          </a:fontRef>
+        </p:style>
+        <p:txBody>
+          <a:bodyPr rtlCol="0" anchor="ctr"/>
+          <a:lstStyle/>
+          <a:p>
+            <a:pPr algn="ctr"/>
+          </a:p>
+        </p:txBody>
+      </p:sp>
+      <p:sp>
+        <p:nvSpPr>
+          <p:cNvPr id="36" name="TextBox 35"/>
+          <p:cNvSpPr txBox="1"/>
+          <p:nvPr/>
+        </p:nvSpPr>
+        <p:spPr>
+          <a:xfrm>
+            <a:off x="3886200" y="5074920"/>
+            <a:ext cx="1920240" cy="548640"/>
+          </a:xfrm>
+          <a:prstGeom prst="rect">
+            <a:avLst/>
+          </a:prstGeom>
+          <a:noFill/>
+        </p:spPr>
+        <p:txBody>
+          <a:bodyPr wrap="square">
+            <a:spAutoFit/>
+          </a:bodyPr>
+          <a:lstStyle/>
+          <a:p>
+            <a:pPr>
+              <a:defRPr sz="1150" b="1">
+                <a:solidFill>
+                  <a:srgbClr val="0F172A"/>
+                </a:solidFill>
+                <a:latin typeface="Plus Jakarta Sans"/>
+              </a:defRPr>
+            </a:pPr>
+            <a:r>
+              <a:t>Visual Analytics</a:t>
+            </a:r>
+          </a:p>
+        </p:txBody>
+      </p:sp>
+      <p:sp>
+        <p:nvSpPr>
+          <p:cNvPr id="37" name="Rounded Rectangle 36"/>
+          <p:cNvSpPr/>
+          <p:nvPr/>
+        </p:nvSpPr>
+        <p:spPr>
+          <a:xfrm>
+            <a:off x="6217920" y="4754880"/>
+            <a:ext cx="2468880" cy="1188720"/>
+          </a:xfrm>
+          <a:prstGeom prst="roundRect">
+            <a:avLst/>
+          </a:prstGeom>
+          <a:solidFill>
+            <a:srgbClr val="FFFFFF"/>
+          </a:solidFill>
+          <a:ln w="19050">
+            <a:solidFill>
+              <a:srgbClr val="E2E8F0"/>
+            </a:solidFill>
+          </a:ln>
+        </p:spPr>
+        <p:style>
+          <a:lnRef idx="1">
+            <a:schemeClr val="accent1"/>
+          </a:lnRef>
+          <a:fillRef idx="3">
+            <a:schemeClr val="accent1"/>
+          </a:fillRef>
+          <a:effectRef idx="2">
+            <a:schemeClr val="accent1"/>
+          </a:effectRef>
+          <a:fontRef idx="minor">
+            <a:schemeClr val="lt1"/>
+          </a:fontRef>
+        </p:style>
+        <p:txBody>
+          <a:bodyPr rtlCol="0" anchor="ctr"/>
+          <a:lstStyle/>
+          <a:p>
+            <a:pPr algn="ctr"/>
+          </a:p>
+        </p:txBody>
+      </p:sp>
+      <p:sp>
+        <p:nvSpPr>
+          <p:cNvPr id="38" name="Oval 37"/>
+          <p:cNvSpPr/>
+          <p:nvPr/>
+        </p:nvSpPr>
+        <p:spPr>
+          <a:xfrm>
+            <a:off x="6400800" y="5212080"/>
+            <a:ext cx="137160" cy="137160"/>
+          </a:xfrm>
+          <a:prstGeom prst="ellipse">
+            <a:avLst/>
+          </a:prstGeom>
+          <a:solidFill>
+            <a:srgbClr val="16A34A"/>
+          </a:solidFill>
+          <a:ln>
+            <a:noFill/>
+          </a:ln>
+        </p:spPr>
+        <p:style>
+          <a:lnRef idx="1">
+            <a:schemeClr val="accent1"/>
+          </a:lnRef>
+          <a:fillRef idx="3">
+            <a:schemeClr val="accent1"/>
+          </a:fillRef>
+          <a:effectRef idx="2">
+            <a:schemeClr val="accent1"/>
+          </a:effectRef>
+          <a:fontRef idx="minor">
+            <a:schemeClr val="lt1"/>
+          </a:fontRef>
+        </p:style>
+        <p:txBody>
+          <a:bodyPr rtlCol="0" anchor="ctr"/>
+          <a:lstStyle/>
+          <a:p>
+            <a:pPr algn="ctr"/>
+          </a:p>
+        </p:txBody>
+      </p:sp>
+      <p:sp>
+        <p:nvSpPr>
+          <p:cNvPr id="39" name="TextBox 38"/>
+          <p:cNvSpPr txBox="1"/>
+          <p:nvPr/>
+        </p:nvSpPr>
+        <p:spPr>
+          <a:xfrm>
+            <a:off x="6629400" y="5074920"/>
+            <a:ext cx="1920240" cy="548640"/>
+          </a:xfrm>
+          <a:prstGeom prst="rect">
+            <a:avLst/>
+          </a:prstGeom>
+          <a:noFill/>
+        </p:spPr>
+        <p:txBody>
+          <a:bodyPr wrap="square">
+            <a:spAutoFit/>
+          </a:bodyPr>
+          <a:lstStyle/>
+          <a:p>
+            <a:pPr>
+              <a:defRPr sz="1150" b="1">
+                <a:solidFill>
+                  <a:srgbClr val="0F172A"/>
+                </a:solidFill>
+                <a:latin typeface="Plus Jakarta Sans"/>
+              </a:defRPr>
+            </a:pPr>
+            <a:r>
+              <a:t>Secure Login Sync</a:t>
+            </a:r>
+          </a:p>
+        </p:txBody>
+      </p:sp>
+      <p:sp>
+        <p:nvSpPr>
+          <p:cNvPr id="40" name="Rounded Rectangle 39"/>
+          <p:cNvSpPr/>
+          <p:nvPr/>
+        </p:nvSpPr>
+        <p:spPr>
+          <a:xfrm>
+            <a:off x="8961120" y="4754880"/>
+            <a:ext cx="2468880" cy="1188720"/>
+          </a:xfrm>
+          <a:prstGeom prst="roundRect">
+            <a:avLst/>
+          </a:prstGeom>
+          <a:solidFill>
+            <a:srgbClr val="FFFFFF"/>
+          </a:solidFill>
+          <a:ln w="19050">
+            <a:solidFill>
+              <a:srgbClr val="E2E8F0"/>
+            </a:solidFill>
+          </a:ln>
+        </p:spPr>
+        <p:style>
+          <a:lnRef idx="1">
+            <a:schemeClr val="accent1"/>
+          </a:lnRef>
+          <a:fillRef idx="3">
+            <a:schemeClr val="accent1"/>
+          </a:fillRef>
+          <a:effectRef idx="2">
+            <a:schemeClr val="accent1"/>
+          </a:effectRef>
+          <a:fontRef idx="minor">
+            <a:schemeClr val="lt1"/>
+          </a:fontRef>
+        </p:style>
+        <p:txBody>
+          <a:bodyPr rtlCol="0" anchor="ctr"/>
+          <a:lstStyle/>
+          <a:p>
+            <a:pPr algn="ctr"/>
+          </a:p>
+        </p:txBody>
+      </p:sp>
+      <p:sp>
+        <p:nvSpPr>
+          <p:cNvPr id="41" name="Oval 40"/>
+          <p:cNvSpPr/>
+          <p:nvPr/>
+        </p:nvSpPr>
+        <p:spPr>
+          <a:xfrm>
+            <a:off x="9144000" y="5212080"/>
+            <a:ext cx="137160" cy="137160"/>
+          </a:xfrm>
+          <a:prstGeom prst="ellipse">
+            <a:avLst/>
+          </a:prstGeom>
+          <a:solidFill>
+            <a:srgbClr val="16A34A"/>
+          </a:solidFill>
+          <a:ln>
+            <a:noFill/>
+          </a:ln>
+        </p:spPr>
+        <p:style>
+          <a:lnRef idx="1">
+            <a:schemeClr val="accent1"/>
+          </a:lnRef>
+          <a:fillRef idx="3">
+            <a:schemeClr val="accent1"/>
+          </a:fillRef>
+          <a:effectRef idx="2">
+            <a:schemeClr val="accent1"/>
+          </a:effectRef>
+          <a:fontRef idx="minor">
+            <a:schemeClr val="lt1"/>
+          </a:fontRef>
+        </p:style>
+        <p:txBody>
+          <a:bodyPr rtlCol="0" anchor="ctr"/>
+          <a:lstStyle/>
+          <a:p>
+            <a:pPr algn="ctr"/>
+          </a:p>
+        </p:txBody>
+      </p:sp>
+      <p:sp>
+        <p:nvSpPr>
+          <p:cNvPr id="42" name="TextBox 41"/>
+          <p:cNvSpPr txBox="1"/>
+          <p:nvPr/>
+        </p:nvSpPr>
+        <p:spPr>
+          <a:xfrm>
+            <a:off x="9372600" y="5074920"/>
+            <a:ext cx="1920240" cy="548640"/>
+          </a:xfrm>
+          <a:prstGeom prst="rect">
+            <a:avLst/>
+          </a:prstGeom>
+          <a:noFill/>
+        </p:spPr>
+        <p:txBody>
+          <a:bodyPr wrap="square">
+            <a:spAutoFit/>
+          </a:bodyPr>
+          <a:lstStyle/>
+          <a:p>
+            <a:pPr>
+              <a:defRPr sz="1150" b="1">
+                <a:solidFill>
+                  <a:srgbClr val="0F172A"/>
+                </a:solidFill>
+                <a:latin typeface="Plus Jakarta Sans"/>
+              </a:defRPr>
+            </a:pPr>
+            <a:r>
+              <a:t>Mobile Optimization</a:t>
             </a:r>
           </a:p>
         </p:txBody>
@@ -5614,7 +8642,7 @@
               </a:defRPr>
             </a:pPr>
             <a:r>
-              <a:t>SECTION 04: TECHNICAL ARCHITECTURE</a:t>
+              <a:t>SECTION 03: TECHNICAL SPECIFICATIONS</a:t>
             </a:r>
           </a:p>
         </p:txBody>
@@ -5650,7 +8678,7 @@
               </a:defRPr>
             </a:pPr>
             <a:r>
-              <a:t>Proposed System Architecture &amp; Sync</a:t>
+              <a:t>Technology Stack Layers</a:t>
             </a:r>
           </a:p>
         </p:txBody>
@@ -5706,7 +8734,7 @@
             <a:avLst/>
           </a:prstGeom>
           <a:solidFill>
-            <a:srgbClr val="E2E8F0"/>
+            <a:srgbClr val="2563EB"/>
           </a:solidFill>
           <a:ln>
             <a:noFill/>
@@ -5734,45 +8762,19 @@
           </a:p>
         </p:txBody>
       </p:sp>
-      <p:pic>
-        <p:nvPicPr>
-          <p:cNvPr id="7" name="Picture 6" descr="proposed_system_architecture.png"/>
-          <p:cNvPicPr>
-            <a:picLocks noChangeAspect="1"/>
-          </p:cNvPicPr>
-          <p:nvPr/>
-        </p:nvPicPr>
-        <p:blipFill>
-          <a:blip r:embed="rId2"/>
-          <a:stretch>
-            <a:fillRect/>
-          </a:stretch>
-        </p:blipFill>
-        <p:spPr>
-          <a:xfrm>
-            <a:off x="731520" y="1463040"/>
-            <a:ext cx="4572000" cy="4572000"/>
-          </a:xfrm>
-          <a:prstGeom prst="rect">
-            <a:avLst/>
-          </a:prstGeom>
-        </p:spPr>
-      </p:pic>
-      <p:sp>
-        <p:nvSpPr>
-          <p:cNvPr id="8" name="Rounded Rectangle 7"/>
+      <p:sp>
+        <p:nvSpPr>
+          <p:cNvPr id="7" name="Rounded Rectangle 6"/>
           <p:cNvSpPr/>
           <p:nvPr/>
         </p:nvSpPr>
         <p:spPr>
           <a:xfrm>
-            <a:off x="5943600" y="1463040"/>
-            <a:ext cx="5486400" cy="4572000"/>
+            <a:off x="731520" y="1645920"/>
+            <a:ext cx="2011680" cy="4572000"/>
           </a:xfrm>
           <a:prstGeom prst="roundRect">
-            <a:avLst>
-              <a:gd name="adj" fmla="val 4000"/>
-            </a:avLst>
+            <a:avLst/>
           </a:prstGeom>
           <a:solidFill>
             <a:srgbClr val="FFFFFF"/>
@@ -5807,20 +8809,20 @@
       </p:sp>
       <p:sp>
         <p:nvSpPr>
-          <p:cNvPr id="9" name="Rectangle 8"/>
+          <p:cNvPr id="8" name="Rectangle 7"/>
           <p:cNvSpPr/>
           <p:nvPr/>
         </p:nvSpPr>
         <p:spPr>
           <a:xfrm>
-            <a:off x="5943600" y="1572768"/>
-            <a:ext cx="73152" cy="4352544"/>
+            <a:off x="731520" y="1645920"/>
+            <a:ext cx="2011680" cy="548640"/>
           </a:xfrm>
           <a:prstGeom prst="rect">
             <a:avLst/>
           </a:prstGeom>
           <a:solidFill>
-            <a:srgbClr val="06B6D4"/>
+            <a:srgbClr val="2563EB"/>
           </a:solidFill>
           <a:ln>
             <a:noFill/>
@@ -5850,14 +8852,50 @@
       </p:sp>
       <p:sp>
         <p:nvSpPr>
+          <p:cNvPr id="9" name="TextBox 8"/>
+          <p:cNvSpPr txBox="1"/>
+          <p:nvPr/>
+        </p:nvSpPr>
+        <p:spPr>
+          <a:xfrm>
+            <a:off x="731520" y="1755648"/>
+            <a:ext cx="2011680" cy="365760"/>
+          </a:xfrm>
+          <a:prstGeom prst="rect">
+            <a:avLst/>
+          </a:prstGeom>
+          <a:noFill/>
+        </p:spPr>
+        <p:txBody>
+          <a:bodyPr wrap="none">
+            <a:spAutoFit/>
+          </a:bodyPr>
+          <a:lstStyle/>
+          <a:p>
+            <a:pPr algn="ctr">
+              <a:defRPr sz="1100" b="1">
+                <a:solidFill>
+                  <a:srgbClr val="FFFFFF"/>
+                </a:solidFill>
+                <a:latin typeface="Plus Jakarta Sans"/>
+              </a:defRPr>
+            </a:pPr>
+            <a:r>
+              <a:t>FRONTEND</a:t>
+            </a:r>
+          </a:p>
+        </p:txBody>
+      </p:sp>
+      <p:sp>
+        <p:nvSpPr>
           <p:cNvPr id="10" name="TextBox 9"/>
           <p:cNvSpPr txBox="1"/>
           <p:nvPr/>
         </p:nvSpPr>
         <p:spPr>
           <a:xfrm>
-            <a:off x="6217920" y="1645920"/>
-            <a:ext cx="4937760" cy="4206240"/>
+            <a:off x="868680" y="2468880"/>
+            <a:ext cx="1737360" cy="3474720"/>
           </a:xfrm>
           <a:prstGeom prst="rect">
             <a:avLst/>
@@ -5865,100 +8903,826 @@
           <a:noFill/>
         </p:spPr>
         <p:txBody>
-          <a:bodyPr wrap="square" lIns="0" rIns="0" tIns="0" bIns="0">
+          <a:bodyPr wrap="square">
             <a:spAutoFit/>
           </a:bodyPr>
           <a:lstStyle/>
+          <a:p/>
           <a:p>
             <a:pPr>
               <a:spcAft>
                 <a:spcPts val="1000"/>
               </a:spcAft>
-              <a:defRPr sz="1400" b="1">
-                <a:solidFill>
-                  <a:srgbClr val="0F172A"/>
-                </a:solidFill>
-                <a:latin typeface="Plus Jakarta Sans"/>
-              </a:defRPr>
-            </a:pPr>
-            <a:r>
-              <a:t>Notification &amp; Event Listeners</a:t>
+              <a:defRPr sz="1050">
+                <a:solidFill>
+                  <a:srgbClr val="475569"/>
+                </a:solidFill>
+              </a:defRPr>
+            </a:pPr>
+            <a:r>
+              <a:t>✔  React.js Library</a:t>
             </a:r>
           </a:p>
           <a:p>
             <a:pPr>
-              <a:lnSpc>
-                <a:spcPct val="105000"/>
-              </a:lnSpc>
               <a:spcAft>
-                <a:spcPts val="500"/>
+                <a:spcPts val="1000"/>
               </a:spcAft>
               <a:defRPr sz="1050">
                 <a:solidFill>
                   <a:srgbClr val="475569"/>
                 </a:solidFill>
-                <a:latin typeface="Plus Jakarta Sans"/>
-              </a:defRPr>
-            </a:pPr>
-            <a:r>
-              <a:t>•  Socket.IO connection feeds real-time updates directly to admin and user dashboards.</a:t>
+              </a:defRPr>
+            </a:pPr>
+            <a:r>
+              <a:t>✔  Tailwind CSS Framework</a:t>
             </a:r>
           </a:p>
           <a:p>
             <a:pPr>
-              <a:lnSpc>
-                <a:spcPct val="105000"/>
-              </a:lnSpc>
               <a:spcAft>
-                <a:spcPts val="500"/>
+                <a:spcPts val="1000"/>
               </a:spcAft>
               <a:defRPr sz="1050">
                 <a:solidFill>
                   <a:srgbClr val="475569"/>
                 </a:solidFill>
+              </a:defRPr>
+            </a:pPr>
+            <a:r>
+              <a:t>✔  JavaScript (ES6+)</a:t>
+            </a:r>
+          </a:p>
+        </p:txBody>
+      </p:sp>
+      <p:sp>
+        <p:nvSpPr>
+          <p:cNvPr id="11" name="Rounded Rectangle 10"/>
+          <p:cNvSpPr/>
+          <p:nvPr/>
+        </p:nvSpPr>
+        <p:spPr>
+          <a:xfrm>
+            <a:off x="2907791" y="1645920"/>
+            <a:ext cx="2011680" cy="4572000"/>
+          </a:xfrm>
+          <a:prstGeom prst="roundRect">
+            <a:avLst/>
+          </a:prstGeom>
+          <a:solidFill>
+            <a:srgbClr val="FFFFFF"/>
+          </a:solidFill>
+          <a:ln w="19050">
+            <a:solidFill>
+              <a:srgbClr val="E2E8F0"/>
+            </a:solidFill>
+          </a:ln>
+        </p:spPr>
+        <p:style>
+          <a:lnRef idx="1">
+            <a:schemeClr val="accent1"/>
+          </a:lnRef>
+          <a:fillRef idx="3">
+            <a:schemeClr val="accent1"/>
+          </a:fillRef>
+          <a:effectRef idx="2">
+            <a:schemeClr val="accent1"/>
+          </a:effectRef>
+          <a:fontRef idx="minor">
+            <a:schemeClr val="lt1"/>
+          </a:fontRef>
+        </p:style>
+        <p:txBody>
+          <a:bodyPr rtlCol="0" anchor="ctr"/>
+          <a:lstStyle/>
+          <a:p>
+            <a:pPr algn="ctr"/>
+          </a:p>
+        </p:txBody>
+      </p:sp>
+      <p:sp>
+        <p:nvSpPr>
+          <p:cNvPr id="12" name="Rectangle 11"/>
+          <p:cNvSpPr/>
+          <p:nvPr/>
+        </p:nvSpPr>
+        <p:spPr>
+          <a:xfrm>
+            <a:off x="2907791" y="1645920"/>
+            <a:ext cx="2011680" cy="548640"/>
+          </a:xfrm>
+          <a:prstGeom prst="rect">
+            <a:avLst/>
+          </a:prstGeom>
+          <a:solidFill>
+            <a:srgbClr val="16A34A"/>
+          </a:solidFill>
+          <a:ln>
+            <a:noFill/>
+          </a:ln>
+        </p:spPr>
+        <p:style>
+          <a:lnRef idx="1">
+            <a:schemeClr val="accent1"/>
+          </a:lnRef>
+          <a:fillRef idx="3">
+            <a:schemeClr val="accent1"/>
+          </a:fillRef>
+          <a:effectRef idx="2">
+            <a:schemeClr val="accent1"/>
+          </a:effectRef>
+          <a:fontRef idx="minor">
+            <a:schemeClr val="lt1"/>
+          </a:fontRef>
+        </p:style>
+        <p:txBody>
+          <a:bodyPr rtlCol="0" anchor="ctr"/>
+          <a:lstStyle/>
+          <a:p>
+            <a:pPr algn="ctr"/>
+          </a:p>
+        </p:txBody>
+      </p:sp>
+      <p:sp>
+        <p:nvSpPr>
+          <p:cNvPr id="13" name="TextBox 12"/>
+          <p:cNvSpPr txBox="1"/>
+          <p:nvPr/>
+        </p:nvSpPr>
+        <p:spPr>
+          <a:xfrm>
+            <a:off x="2907791" y="1755648"/>
+            <a:ext cx="2011680" cy="365760"/>
+          </a:xfrm>
+          <a:prstGeom prst="rect">
+            <a:avLst/>
+          </a:prstGeom>
+          <a:noFill/>
+        </p:spPr>
+        <p:txBody>
+          <a:bodyPr wrap="none">
+            <a:spAutoFit/>
+          </a:bodyPr>
+          <a:lstStyle/>
+          <a:p>
+            <a:pPr algn="ctr">
+              <a:defRPr sz="1100" b="1">
+                <a:solidFill>
+                  <a:srgbClr val="FFFFFF"/>
+                </a:solidFill>
                 <a:latin typeface="Plus Jakarta Sans"/>
               </a:defRPr>
             </a:pPr>
             <a:r>
-              <a:t>•  Firebase Cloud Messaging (FCM) drives offline alerts to browser tabs.</a:t>
-            </a:r>
-          </a:p>
+              <a:t>BACKEND</a:t>
+            </a:r>
+          </a:p>
+        </p:txBody>
+      </p:sp>
+      <p:sp>
+        <p:nvSpPr>
+          <p:cNvPr id="14" name="TextBox 13"/>
+          <p:cNvSpPr txBox="1"/>
+          <p:nvPr/>
+        </p:nvSpPr>
+        <p:spPr>
+          <a:xfrm>
+            <a:off x="3044951" y="2468880"/>
+            <a:ext cx="1737360" cy="3474720"/>
+          </a:xfrm>
+          <a:prstGeom prst="rect">
+            <a:avLst/>
+          </a:prstGeom>
+          <a:noFill/>
+        </p:spPr>
+        <p:txBody>
+          <a:bodyPr wrap="square">
+            <a:spAutoFit/>
+          </a:bodyPr>
+          <a:lstStyle/>
+          <a:p/>
           <a:p>
             <a:pPr>
-              <a:lnSpc>
-                <a:spcPct val="105000"/>
-              </a:lnSpc>
               <a:spcAft>
-                <a:spcPts val="500"/>
+                <a:spcPts val="1000"/>
               </a:spcAft>
               <a:defRPr sz="1050">
                 <a:solidFill>
                   <a:srgbClr val="475569"/>
                 </a:solidFill>
-                <a:latin typeface="Plus Jakarta Sans"/>
-              </a:defRPr>
-            </a:pPr>
-            <a:r>
-              <a:t>•  Twilio SMS gateway sends immediate OTP codes to logistics drivers.</a:t>
+              </a:defRPr>
+            </a:pPr>
+            <a:r>
+              <a:t>✔  Node.js Runtime</a:t>
             </a:r>
           </a:p>
           <a:p>
             <a:pPr>
-              <a:lnSpc>
-                <a:spcPct val="105000"/>
-              </a:lnSpc>
               <a:spcAft>
-                <a:spcPts val="500"/>
+                <a:spcPts val="1000"/>
               </a:spcAft>
               <a:defRPr sz="1050">
                 <a:solidFill>
                   <a:srgbClr val="475569"/>
                 </a:solidFill>
+              </a:defRPr>
+            </a:pPr>
+            <a:r>
+              <a:t>✔  Express API Controllers</a:t>
+            </a:r>
+          </a:p>
+          <a:p>
+            <a:pPr>
+              <a:spcAft>
+                <a:spcPts val="1000"/>
+              </a:spcAft>
+              <a:defRPr sz="1050">
+                <a:solidFill>
+                  <a:srgbClr val="475569"/>
+                </a:solidFill>
+              </a:defRPr>
+            </a:pPr>
+            <a:r>
+              <a:t>✔  JSON Web Tokens (JWT)</a:t>
+            </a:r>
+          </a:p>
+        </p:txBody>
+      </p:sp>
+      <p:sp>
+        <p:nvSpPr>
+          <p:cNvPr id="15" name="Rounded Rectangle 14"/>
+          <p:cNvSpPr/>
+          <p:nvPr/>
+        </p:nvSpPr>
+        <p:spPr>
+          <a:xfrm>
+            <a:off x="5084064" y="1645920"/>
+            <a:ext cx="2011680" cy="4572000"/>
+          </a:xfrm>
+          <a:prstGeom prst="roundRect">
+            <a:avLst/>
+          </a:prstGeom>
+          <a:solidFill>
+            <a:srgbClr val="FFFFFF"/>
+          </a:solidFill>
+          <a:ln w="19050">
+            <a:solidFill>
+              <a:srgbClr val="E2E8F0"/>
+            </a:solidFill>
+          </a:ln>
+        </p:spPr>
+        <p:style>
+          <a:lnRef idx="1">
+            <a:schemeClr val="accent1"/>
+          </a:lnRef>
+          <a:fillRef idx="3">
+            <a:schemeClr val="accent1"/>
+          </a:fillRef>
+          <a:effectRef idx="2">
+            <a:schemeClr val="accent1"/>
+          </a:effectRef>
+          <a:fontRef idx="minor">
+            <a:schemeClr val="lt1"/>
+          </a:fontRef>
+        </p:style>
+        <p:txBody>
+          <a:bodyPr rtlCol="0" anchor="ctr"/>
+          <a:lstStyle/>
+          <a:p>
+            <a:pPr algn="ctr"/>
+          </a:p>
+        </p:txBody>
+      </p:sp>
+      <p:sp>
+        <p:nvSpPr>
+          <p:cNvPr id="16" name="Rectangle 15"/>
+          <p:cNvSpPr/>
+          <p:nvPr/>
+        </p:nvSpPr>
+        <p:spPr>
+          <a:xfrm>
+            <a:off x="5084064" y="1645920"/>
+            <a:ext cx="2011680" cy="548640"/>
+          </a:xfrm>
+          <a:prstGeom prst="rect">
+            <a:avLst/>
+          </a:prstGeom>
+          <a:solidFill>
+            <a:srgbClr val="F97316"/>
+          </a:solidFill>
+          <a:ln>
+            <a:noFill/>
+          </a:ln>
+        </p:spPr>
+        <p:style>
+          <a:lnRef idx="1">
+            <a:schemeClr val="accent1"/>
+          </a:lnRef>
+          <a:fillRef idx="3">
+            <a:schemeClr val="accent1"/>
+          </a:fillRef>
+          <a:effectRef idx="2">
+            <a:schemeClr val="accent1"/>
+          </a:effectRef>
+          <a:fontRef idx="minor">
+            <a:schemeClr val="lt1"/>
+          </a:fontRef>
+        </p:style>
+        <p:txBody>
+          <a:bodyPr rtlCol="0" anchor="ctr"/>
+          <a:lstStyle/>
+          <a:p>
+            <a:pPr algn="ctr"/>
+          </a:p>
+        </p:txBody>
+      </p:sp>
+      <p:sp>
+        <p:nvSpPr>
+          <p:cNvPr id="17" name="TextBox 16"/>
+          <p:cNvSpPr txBox="1"/>
+          <p:nvPr/>
+        </p:nvSpPr>
+        <p:spPr>
+          <a:xfrm>
+            <a:off x="5084064" y="1755648"/>
+            <a:ext cx="2011680" cy="365760"/>
+          </a:xfrm>
+          <a:prstGeom prst="rect">
+            <a:avLst/>
+          </a:prstGeom>
+          <a:noFill/>
+        </p:spPr>
+        <p:txBody>
+          <a:bodyPr wrap="none">
+            <a:spAutoFit/>
+          </a:bodyPr>
+          <a:lstStyle/>
+          <a:p>
+            <a:pPr algn="ctr">
+              <a:defRPr sz="1100" b="1">
+                <a:solidFill>
+                  <a:srgbClr val="FFFFFF"/>
+                </a:solidFill>
                 <a:latin typeface="Plus Jakarta Sans"/>
               </a:defRPr>
             </a:pPr>
             <a:r>
-              <a:t>•  Node.js background event listener synchronizes EVM smart contract logs to MongoDB.</a:t>
+              <a:t>DATABASE</a:t>
+            </a:r>
+          </a:p>
+        </p:txBody>
+      </p:sp>
+      <p:sp>
+        <p:nvSpPr>
+          <p:cNvPr id="18" name="TextBox 17"/>
+          <p:cNvSpPr txBox="1"/>
+          <p:nvPr/>
+        </p:nvSpPr>
+        <p:spPr>
+          <a:xfrm>
+            <a:off x="5221224" y="2468880"/>
+            <a:ext cx="1737360" cy="3474720"/>
+          </a:xfrm>
+          <a:prstGeom prst="rect">
+            <a:avLst/>
+          </a:prstGeom>
+          <a:noFill/>
+        </p:spPr>
+        <p:txBody>
+          <a:bodyPr wrap="square">
+            <a:spAutoFit/>
+          </a:bodyPr>
+          <a:lstStyle/>
+          <a:p/>
+          <a:p>
+            <a:pPr>
+              <a:spcAft>
+                <a:spcPts val="1000"/>
+              </a:spcAft>
+              <a:defRPr sz="1050">
+                <a:solidFill>
+                  <a:srgbClr val="475569"/>
+                </a:solidFill>
+              </a:defRPr>
+            </a:pPr>
+            <a:r>
+              <a:t>✔  MongoDB Atlas Store</a:t>
+            </a:r>
+          </a:p>
+          <a:p>
+            <a:pPr>
+              <a:spcAft>
+                <a:spcPts val="1000"/>
+              </a:spcAft>
+              <a:defRPr sz="1050">
+                <a:solidFill>
+                  <a:srgbClr val="475569"/>
+                </a:solidFill>
+              </a:defRPr>
+            </a:pPr>
+            <a:r>
+              <a:t>✔  Cloudinary Assets Store</a:t>
+            </a:r>
+          </a:p>
+          <a:p>
+            <a:pPr>
+              <a:spcAft>
+                <a:spcPts val="1000"/>
+              </a:spcAft>
+              <a:defRPr sz="1050">
+                <a:solidFill>
+                  <a:srgbClr val="475569"/>
+                </a:solidFill>
+              </a:defRPr>
+            </a:pPr>
+            <a:r>
+              <a:t>✔  On-Chain Log System</a:t>
+            </a:r>
+          </a:p>
+        </p:txBody>
+      </p:sp>
+      <p:sp>
+        <p:nvSpPr>
+          <p:cNvPr id="19" name="Rounded Rectangle 18"/>
+          <p:cNvSpPr/>
+          <p:nvPr/>
+        </p:nvSpPr>
+        <p:spPr>
+          <a:xfrm>
+            <a:off x="7260336" y="1645920"/>
+            <a:ext cx="2011680" cy="4572000"/>
+          </a:xfrm>
+          <a:prstGeom prst="roundRect">
+            <a:avLst/>
+          </a:prstGeom>
+          <a:solidFill>
+            <a:srgbClr val="FFFFFF"/>
+          </a:solidFill>
+          <a:ln w="19050">
+            <a:solidFill>
+              <a:srgbClr val="E2E8F0"/>
+            </a:solidFill>
+          </a:ln>
+        </p:spPr>
+        <p:style>
+          <a:lnRef idx="1">
+            <a:schemeClr val="accent1"/>
+          </a:lnRef>
+          <a:fillRef idx="3">
+            <a:schemeClr val="accent1"/>
+          </a:fillRef>
+          <a:effectRef idx="2">
+            <a:schemeClr val="accent1"/>
+          </a:effectRef>
+          <a:fontRef idx="minor">
+            <a:schemeClr val="lt1"/>
+          </a:fontRef>
+        </p:style>
+        <p:txBody>
+          <a:bodyPr rtlCol="0" anchor="ctr"/>
+          <a:lstStyle/>
+          <a:p>
+            <a:pPr algn="ctr"/>
+          </a:p>
+        </p:txBody>
+      </p:sp>
+      <p:sp>
+        <p:nvSpPr>
+          <p:cNvPr id="20" name="Rectangle 19"/>
+          <p:cNvSpPr/>
+          <p:nvPr/>
+        </p:nvSpPr>
+        <p:spPr>
+          <a:xfrm>
+            <a:off x="7260336" y="1645920"/>
+            <a:ext cx="2011680" cy="548640"/>
+          </a:xfrm>
+          <a:prstGeom prst="rect">
+            <a:avLst/>
+          </a:prstGeom>
+          <a:solidFill>
+            <a:srgbClr val="0F172A"/>
+          </a:solidFill>
+          <a:ln>
+            <a:noFill/>
+          </a:ln>
+        </p:spPr>
+        <p:style>
+          <a:lnRef idx="1">
+            <a:schemeClr val="accent1"/>
+          </a:lnRef>
+          <a:fillRef idx="3">
+            <a:schemeClr val="accent1"/>
+          </a:fillRef>
+          <a:effectRef idx="2">
+            <a:schemeClr val="accent1"/>
+          </a:effectRef>
+          <a:fontRef idx="minor">
+            <a:schemeClr val="lt1"/>
+          </a:fontRef>
+        </p:style>
+        <p:txBody>
+          <a:bodyPr rtlCol="0" anchor="ctr"/>
+          <a:lstStyle/>
+          <a:p>
+            <a:pPr algn="ctr"/>
+          </a:p>
+        </p:txBody>
+      </p:sp>
+      <p:sp>
+        <p:nvSpPr>
+          <p:cNvPr id="21" name="TextBox 20"/>
+          <p:cNvSpPr txBox="1"/>
+          <p:nvPr/>
+        </p:nvSpPr>
+        <p:spPr>
+          <a:xfrm>
+            <a:off x="7260336" y="1755648"/>
+            <a:ext cx="2011680" cy="365760"/>
+          </a:xfrm>
+          <a:prstGeom prst="rect">
+            <a:avLst/>
+          </a:prstGeom>
+          <a:noFill/>
+        </p:spPr>
+        <p:txBody>
+          <a:bodyPr wrap="none">
+            <a:spAutoFit/>
+          </a:bodyPr>
+          <a:lstStyle/>
+          <a:p>
+            <a:pPr algn="ctr">
+              <a:defRPr sz="1100" b="1">
+                <a:solidFill>
+                  <a:srgbClr val="FFFFFF"/>
+                </a:solidFill>
+                <a:latin typeface="Plus Jakarta Sans"/>
+              </a:defRPr>
+            </a:pPr>
+            <a:r>
+              <a:t>COMMUNICATIONS</a:t>
+            </a:r>
+          </a:p>
+        </p:txBody>
+      </p:sp>
+      <p:sp>
+        <p:nvSpPr>
+          <p:cNvPr id="22" name="TextBox 21"/>
+          <p:cNvSpPr txBox="1"/>
+          <p:nvPr/>
+        </p:nvSpPr>
+        <p:spPr>
+          <a:xfrm>
+            <a:off x="7397496" y="2468880"/>
+            <a:ext cx="1737360" cy="3474720"/>
+          </a:xfrm>
+          <a:prstGeom prst="rect">
+            <a:avLst/>
+          </a:prstGeom>
+          <a:noFill/>
+        </p:spPr>
+        <p:txBody>
+          <a:bodyPr wrap="square">
+            <a:spAutoFit/>
+          </a:bodyPr>
+          <a:lstStyle/>
+          <a:p/>
+          <a:p>
+            <a:pPr>
+              <a:spcAft>
+                <a:spcPts val="1000"/>
+              </a:spcAft>
+              <a:defRPr sz="1050">
+                <a:solidFill>
+                  <a:srgbClr val="475569"/>
+                </a:solidFill>
+              </a:defRPr>
+            </a:pPr>
+            <a:r>
+              <a:t>✔  Socket.IO Engine</a:t>
+            </a:r>
+          </a:p>
+          <a:p>
+            <a:pPr>
+              <a:spcAft>
+                <a:spcPts val="1000"/>
+              </a:spcAft>
+              <a:defRPr sz="1050">
+                <a:solidFill>
+                  <a:srgbClr val="475569"/>
+                </a:solidFill>
+              </a:defRPr>
+            </a:pPr>
+            <a:r>
+              <a:t>✔  Firebase Push (FCM)</a:t>
+            </a:r>
+          </a:p>
+          <a:p>
+            <a:pPr>
+              <a:spcAft>
+                <a:spcPts val="1000"/>
+              </a:spcAft>
+              <a:defRPr sz="1050">
+                <a:solidFill>
+                  <a:srgbClr val="475569"/>
+                </a:solidFill>
+              </a:defRPr>
+            </a:pPr>
+            <a:r>
+              <a:t>✔  Nodemailer SMTP</a:t>
+            </a:r>
+          </a:p>
+        </p:txBody>
+      </p:sp>
+      <p:sp>
+        <p:nvSpPr>
+          <p:cNvPr id="23" name="Rounded Rectangle 22"/>
+          <p:cNvSpPr/>
+          <p:nvPr/>
+        </p:nvSpPr>
+        <p:spPr>
+          <a:xfrm>
+            <a:off x="9436608" y="1645920"/>
+            <a:ext cx="2011680" cy="4572000"/>
+          </a:xfrm>
+          <a:prstGeom prst="roundRect">
+            <a:avLst/>
+          </a:prstGeom>
+          <a:solidFill>
+            <a:srgbClr val="FFFFFF"/>
+          </a:solidFill>
+          <a:ln w="19050">
+            <a:solidFill>
+              <a:srgbClr val="E2E8F0"/>
+            </a:solidFill>
+          </a:ln>
+        </p:spPr>
+        <p:style>
+          <a:lnRef idx="1">
+            <a:schemeClr val="accent1"/>
+          </a:lnRef>
+          <a:fillRef idx="3">
+            <a:schemeClr val="accent1"/>
+          </a:fillRef>
+          <a:effectRef idx="2">
+            <a:schemeClr val="accent1"/>
+          </a:effectRef>
+          <a:fontRef idx="minor">
+            <a:schemeClr val="lt1"/>
+          </a:fontRef>
+        </p:style>
+        <p:txBody>
+          <a:bodyPr rtlCol="0" anchor="ctr"/>
+          <a:lstStyle/>
+          <a:p>
+            <a:pPr algn="ctr"/>
+          </a:p>
+        </p:txBody>
+      </p:sp>
+      <p:sp>
+        <p:nvSpPr>
+          <p:cNvPr id="24" name="Rectangle 23"/>
+          <p:cNvSpPr/>
+          <p:nvPr/>
+        </p:nvSpPr>
+        <p:spPr>
+          <a:xfrm>
+            <a:off x="9436608" y="1645920"/>
+            <a:ext cx="2011680" cy="548640"/>
+          </a:xfrm>
+          <a:prstGeom prst="rect">
+            <a:avLst/>
+          </a:prstGeom>
+          <a:solidFill>
+            <a:srgbClr val="475569"/>
+          </a:solidFill>
+          <a:ln>
+            <a:noFill/>
+          </a:ln>
+        </p:spPr>
+        <p:style>
+          <a:lnRef idx="1">
+            <a:schemeClr val="accent1"/>
+          </a:lnRef>
+          <a:fillRef idx="3">
+            <a:schemeClr val="accent1"/>
+          </a:fillRef>
+          <a:effectRef idx="2">
+            <a:schemeClr val="accent1"/>
+          </a:effectRef>
+          <a:fontRef idx="minor">
+            <a:schemeClr val="lt1"/>
+          </a:fontRef>
+        </p:style>
+        <p:txBody>
+          <a:bodyPr rtlCol="0" anchor="ctr"/>
+          <a:lstStyle/>
+          <a:p>
+            <a:pPr algn="ctr"/>
+          </a:p>
+        </p:txBody>
+      </p:sp>
+      <p:sp>
+        <p:nvSpPr>
+          <p:cNvPr id="25" name="TextBox 24"/>
+          <p:cNvSpPr txBox="1"/>
+          <p:nvPr/>
+        </p:nvSpPr>
+        <p:spPr>
+          <a:xfrm>
+            <a:off x="9436608" y="1755648"/>
+            <a:ext cx="2011680" cy="365760"/>
+          </a:xfrm>
+          <a:prstGeom prst="rect">
+            <a:avLst/>
+          </a:prstGeom>
+          <a:noFill/>
+        </p:spPr>
+        <p:txBody>
+          <a:bodyPr wrap="none">
+            <a:spAutoFit/>
+          </a:bodyPr>
+          <a:lstStyle/>
+          <a:p>
+            <a:pPr algn="ctr">
+              <a:defRPr sz="1100" b="1">
+                <a:solidFill>
+                  <a:srgbClr val="FFFFFF"/>
+                </a:solidFill>
+                <a:latin typeface="Plus Jakarta Sans"/>
+              </a:defRPr>
+            </a:pPr>
+            <a:r>
+              <a:t>DEPLOYMENT</a:t>
+            </a:r>
+          </a:p>
+        </p:txBody>
+      </p:sp>
+      <p:sp>
+        <p:nvSpPr>
+          <p:cNvPr id="26" name="TextBox 25"/>
+          <p:cNvSpPr txBox="1"/>
+          <p:nvPr/>
+        </p:nvSpPr>
+        <p:spPr>
+          <a:xfrm>
+            <a:off x="9573768" y="2468880"/>
+            <a:ext cx="1737360" cy="3474720"/>
+          </a:xfrm>
+          <a:prstGeom prst="rect">
+            <a:avLst/>
+          </a:prstGeom>
+          <a:noFill/>
+        </p:spPr>
+        <p:txBody>
+          <a:bodyPr wrap="square">
+            <a:spAutoFit/>
+          </a:bodyPr>
+          <a:lstStyle/>
+          <a:p/>
+          <a:p>
+            <a:pPr>
+              <a:spcAft>
+                <a:spcPts val="1000"/>
+              </a:spcAft>
+              <a:defRPr sz="1050">
+                <a:solidFill>
+                  <a:srgbClr val="475569"/>
+                </a:solidFill>
+              </a:defRPr>
+            </a:pPr>
+            <a:r>
+              <a:t>✔  Vercel Frontend Host</a:t>
+            </a:r>
+          </a:p>
+          <a:p>
+            <a:pPr>
+              <a:spcAft>
+                <a:spcPts val="1000"/>
+              </a:spcAft>
+              <a:defRPr sz="1050">
+                <a:solidFill>
+                  <a:srgbClr val="475569"/>
+                </a:solidFill>
+              </a:defRPr>
+            </a:pPr>
+            <a:r>
+              <a:t>✔  Render Backend API</a:t>
+            </a:r>
+          </a:p>
+          <a:p>
+            <a:pPr>
+              <a:spcAft>
+                <a:spcPts val="1000"/>
+              </a:spcAft>
+              <a:defRPr sz="1050">
+                <a:solidFill>
+                  <a:srgbClr val="475569"/>
+                </a:solidFill>
+              </a:defRPr>
+            </a:pPr>
+            <a:r>
+              <a:t>✔  GitHub Collaboration</a:t>
             </a:r>
           </a:p>
         </p:txBody>
@@ -5996,7 +9760,7 @@
             <a:avLst/>
           </a:prstGeom>
           <a:solidFill>
-            <a:srgbClr val="0A0F1E"/>
+            <a:srgbClr val="F8FAFC"/>
           </a:solidFill>
           <a:ln>
             <a:noFill/>
@@ -6032,8 +9796,8 @@
         </p:nvSpPr>
         <p:spPr>
           <a:xfrm>
-            <a:off x="914400" y="1371600"/>
-            <a:ext cx="10362895" cy="1371600"/>
+            <a:off x="731520" y="365760"/>
+            <a:ext cx="7315200" cy="365760"/>
           </a:xfrm>
           <a:prstGeom prst="rect">
             <a:avLst/>
@@ -6046,48 +9810,16 @@
           </a:bodyPr>
           <a:lstStyle/>
           <a:p>
-            <a:pPr algn="ctr">
-              <a:defRPr sz="3600" b="1">
-                <a:solidFill>
-                  <a:srgbClr val="FFFFFF"/>
+            <a:pPr>
+              <a:defRPr sz="1000" b="1">
+                <a:solidFill>
+                  <a:srgbClr val="F97316"/>
                 </a:solidFill>
                 <a:latin typeface="Plus Jakarta Sans"/>
               </a:defRPr>
             </a:pPr>
             <a:r>
-              <a:t>AAHAAR: DIGITIZING TRUST, FEEDING LIVES</a:t>
-            </a:r>
-          </a:p>
-          <a:p>
-            <a:pPr algn="ctr">
-              <a:spcBef>
-                <a:spcPts val="600"/>
-              </a:spcBef>
-              <a:defRPr sz="1600" b="1">
-                <a:solidFill>
-                  <a:srgbClr val="F97316"/>
-                </a:solidFill>
-                <a:latin typeface="Plus Jakarta Sans"/>
-              </a:defRPr>
-            </a:pPr>
-            <a:r>
-              <a:t>Together, We Can Eliminate Food Waste, Empower Communities, and Build a Sustainable Future.</a:t>
-            </a:r>
-          </a:p>
-          <a:p>
-            <a:pPr algn="ctr">
-              <a:spcBef>
-                <a:spcPts val="800"/>
-              </a:spcBef>
-              <a:defRPr sz="1250" b="1">
-                <a:solidFill>
-                  <a:srgbClr val="22C55E"/>
-                </a:solidFill>
-                <a:latin typeface="Plus Jakarta Sans"/>
-              </a:defRPr>
-            </a:pPr>
-            <a:r>
-              <a:t>AAHAAR — Feeding People. Empowering NGOs. Transforming CSR. Protecting the Planet.</a:t>
+              <a:t>SECTION 04: PROJECT PROGRESSION</a:t>
             </a:r>
           </a:p>
         </p:txBody>
@@ -6100,8 +9832,8 @@
         </p:nvSpPr>
         <p:spPr>
           <a:xfrm>
-            <a:off x="1828800" y="3291840"/>
-            <a:ext cx="8534095" cy="1828800"/>
+            <a:off x="731520" y="640080"/>
+            <a:ext cx="8229600" cy="548640"/>
           </a:xfrm>
           <a:prstGeom prst="rect">
             <a:avLst/>
@@ -6113,53 +9845,17 @@
             <a:spAutoFit/>
           </a:bodyPr>
           <a:lstStyle/>
-          <a:p/>
-          <a:p>
-            <a:pPr algn="ctr">
-              <a:spcBef>
-                <a:spcPts val="1000"/>
-              </a:spcBef>
-              <a:defRPr sz="1250">
-                <a:solidFill>
-                  <a:srgbClr val="FFFFFF"/>
+          <a:p>
+            <a:pPr>
+              <a:defRPr sz="2400" b="1">
+                <a:solidFill>
+                  <a:srgbClr val="0F172A"/>
                 </a:solidFill>
                 <a:latin typeface="Plus Jakarta Sans"/>
               </a:defRPr>
             </a:pPr>
             <a:r>
-              <a:t>Enterprise Utility: Complete SaaS solution addressing corporate CSR and green ESG targets.</a:t>
-            </a:r>
-          </a:p>
-          <a:p>
-            <a:pPr algn="ctr">
-              <a:spcBef>
-                <a:spcPts val="1000"/>
-              </a:spcBef>
-              <a:defRPr sz="1250">
-                <a:solidFill>
-                  <a:srgbClr val="FFFFFF"/>
-                </a:solidFill>
-                <a:latin typeface="Plus Jakarta Sans"/>
-              </a:defRPr>
-            </a:pPr>
-            <a:r>
-              <a:t>Operational Codebase: Deployed system integrating Express APIs, Socket.IO, and Solidity contracts.</a:t>
-            </a:r>
-          </a:p>
-          <a:p>
-            <a:pPr algn="ctr">
-              <a:spcBef>
-                <a:spcPts val="1000"/>
-              </a:spcBef>
-              <a:defRPr sz="1250">
-                <a:solidFill>
-                  <a:srgbClr val="FFFFFF"/>
-                </a:solidFill>
-                <a:latin typeface="Plus Jakarta Sans"/>
-              </a:defRPr>
-            </a:pPr>
-            <a:r>
-              <a:t>Call to Action: Inviting foundations (like Reliance Foundation) and enterprise leaders to partner.</a:t>
+              <a:t>Future Scope &amp; Innovations</a:t>
             </a:r>
           </a:p>
         </p:txBody>
@@ -6172,8 +9868,8 @@
         </p:nvSpPr>
         <p:spPr>
           <a:xfrm>
-            <a:off x="914400" y="5852160"/>
-            <a:ext cx="10362895" cy="457200"/>
+            <a:off x="8686800" y="365760"/>
+            <a:ext cx="2743200" cy="365760"/>
           </a:xfrm>
           <a:prstGeom prst="rect">
             <a:avLst/>
@@ -6186,16 +9882,1927 @@
           </a:bodyPr>
           <a:lstStyle/>
           <a:p>
-            <a:pPr algn="ctr">
+            <a:pPr algn="r">
+              <a:defRPr sz="900" b="1">
+                <a:solidFill>
+                  <a:srgbClr val="475569"/>
+                </a:solidFill>
+                <a:latin typeface="Plus Jakarta Sans"/>
+              </a:defRPr>
+            </a:pPr>
+            <a:r>
+              <a:t>AAHAAR ENTERPRISE SYSTEM</a:t>
+            </a:r>
+          </a:p>
+        </p:txBody>
+      </p:sp>
+      <p:sp>
+        <p:nvSpPr>
+          <p:cNvPr id="6" name="Rectangle 5"/>
+          <p:cNvSpPr/>
+          <p:nvPr/>
+        </p:nvSpPr>
+        <p:spPr>
+          <a:xfrm>
+            <a:off x="731520" y="1234440"/>
+            <a:ext cx="10728655" cy="18288"/>
+          </a:xfrm>
+          <a:prstGeom prst="rect">
+            <a:avLst/>
+          </a:prstGeom>
+          <a:solidFill>
+            <a:srgbClr val="2563EB"/>
+          </a:solidFill>
+          <a:ln>
+            <a:noFill/>
+          </a:ln>
+        </p:spPr>
+        <p:style>
+          <a:lnRef idx="1">
+            <a:schemeClr val="accent1"/>
+          </a:lnRef>
+          <a:fillRef idx="3">
+            <a:schemeClr val="accent1"/>
+          </a:fillRef>
+          <a:effectRef idx="2">
+            <a:schemeClr val="accent1"/>
+          </a:effectRef>
+          <a:fontRef idx="minor">
+            <a:schemeClr val="lt1"/>
+          </a:fontRef>
+        </p:style>
+        <p:txBody>
+          <a:bodyPr rtlCol="0" anchor="ctr"/>
+          <a:lstStyle/>
+          <a:p>
+            <a:pPr algn="ctr"/>
+          </a:p>
+        </p:txBody>
+      </p:sp>
+      <p:sp>
+        <p:nvSpPr>
+          <p:cNvPr id="7" name="Rounded Rectangle 6"/>
+          <p:cNvSpPr/>
+          <p:nvPr/>
+        </p:nvSpPr>
+        <p:spPr>
+          <a:xfrm>
+            <a:off x="731520" y="1645920"/>
+            <a:ext cx="3383280" cy="2011680"/>
+          </a:xfrm>
+          <a:prstGeom prst="roundRect">
+            <a:avLst/>
+          </a:prstGeom>
+          <a:solidFill>
+            <a:srgbClr val="FFFFFF"/>
+          </a:solidFill>
+          <a:ln w="19050">
+            <a:solidFill>
+              <a:srgbClr val="2563EB"/>
+            </a:solidFill>
+          </a:ln>
+        </p:spPr>
+        <p:style>
+          <a:lnRef idx="1">
+            <a:schemeClr val="accent1"/>
+          </a:lnRef>
+          <a:fillRef idx="3">
+            <a:schemeClr val="accent1"/>
+          </a:fillRef>
+          <a:effectRef idx="2">
+            <a:schemeClr val="accent1"/>
+          </a:effectRef>
+          <a:fontRef idx="minor">
+            <a:schemeClr val="lt1"/>
+          </a:fontRef>
+        </p:style>
+        <p:txBody>
+          <a:bodyPr rtlCol="0" anchor="ctr"/>
+          <a:lstStyle/>
+          <a:p>
+            <a:pPr algn="ctr"/>
+          </a:p>
+        </p:txBody>
+      </p:sp>
+      <p:sp>
+        <p:nvSpPr>
+          <p:cNvPr id="8" name="Rectangle 7"/>
+          <p:cNvSpPr/>
+          <p:nvPr/>
+        </p:nvSpPr>
+        <p:spPr>
+          <a:xfrm>
+            <a:off x="1005840" y="1920240"/>
+            <a:ext cx="73152" cy="411480"/>
+          </a:xfrm>
+          <a:prstGeom prst="rect">
+            <a:avLst/>
+          </a:prstGeom>
+          <a:solidFill>
+            <a:srgbClr val="F97316"/>
+          </a:solidFill>
+          <a:ln>
+            <a:noFill/>
+          </a:ln>
+        </p:spPr>
+        <p:style>
+          <a:lnRef idx="1">
+            <a:schemeClr val="accent1"/>
+          </a:lnRef>
+          <a:fillRef idx="3">
+            <a:schemeClr val="accent1"/>
+          </a:fillRef>
+          <a:effectRef idx="2">
+            <a:schemeClr val="accent1"/>
+          </a:effectRef>
+          <a:fontRef idx="minor">
+            <a:schemeClr val="lt1"/>
+          </a:fontRef>
+        </p:style>
+        <p:txBody>
+          <a:bodyPr rtlCol="0" anchor="ctr"/>
+          <a:lstStyle/>
+          <a:p>
+            <a:pPr algn="ctr"/>
+          </a:p>
+        </p:txBody>
+      </p:sp>
+      <p:sp>
+        <p:nvSpPr>
+          <p:cNvPr id="9" name="TextBox 8"/>
+          <p:cNvSpPr txBox="1"/>
+          <p:nvPr/>
+        </p:nvSpPr>
+        <p:spPr>
+          <a:xfrm>
+            <a:off x="1188720" y="1874520"/>
+            <a:ext cx="2743200" cy="1554480"/>
+          </a:xfrm>
+          <a:prstGeom prst="rect">
+            <a:avLst/>
+          </a:prstGeom>
+          <a:noFill/>
+        </p:spPr>
+        <p:txBody>
+          <a:bodyPr wrap="square">
+            <a:spAutoFit/>
+          </a:bodyPr>
+          <a:lstStyle/>
+          <a:p>
+            <a:pPr>
+              <a:spcAft>
+                <a:spcPts val="600"/>
+              </a:spcAft>
+              <a:defRPr b="1" sz="1300">
+                <a:solidFill>
+                  <a:srgbClr val="0F172A"/>
+                </a:solidFill>
+              </a:defRPr>
+            </a:pPr>
+            <a:r>
+              <a:t>AI Demand Prediction</a:t>
+            </a:r>
+          </a:p>
+          <a:p>
+            <a:pPr>
               <a:defRPr sz="1050">
                 <a:solidFill>
                   <a:srgbClr val="475569"/>
                 </a:solidFill>
+              </a:defRPr>
+            </a:pPr>
+            <a:r>
+              <a:t>Forecasting surplus patterns using neural network classifiers.</a:t>
+            </a:r>
+          </a:p>
+        </p:txBody>
+      </p:sp>
+      <p:sp>
+        <p:nvSpPr>
+          <p:cNvPr id="10" name="Rounded Rectangle 9"/>
+          <p:cNvSpPr/>
+          <p:nvPr/>
+        </p:nvSpPr>
+        <p:spPr>
+          <a:xfrm>
+            <a:off x="4389120" y="1645920"/>
+            <a:ext cx="3383280" cy="2011680"/>
+          </a:xfrm>
+          <a:prstGeom prst="roundRect">
+            <a:avLst/>
+          </a:prstGeom>
+          <a:solidFill>
+            <a:srgbClr val="FFFFFF"/>
+          </a:solidFill>
+          <a:ln w="19050">
+            <a:solidFill>
+              <a:srgbClr val="2563EB"/>
+            </a:solidFill>
+          </a:ln>
+        </p:spPr>
+        <p:style>
+          <a:lnRef idx="1">
+            <a:schemeClr val="accent1"/>
+          </a:lnRef>
+          <a:fillRef idx="3">
+            <a:schemeClr val="accent1"/>
+          </a:fillRef>
+          <a:effectRef idx="2">
+            <a:schemeClr val="accent1"/>
+          </a:effectRef>
+          <a:fontRef idx="minor">
+            <a:schemeClr val="lt1"/>
+          </a:fontRef>
+        </p:style>
+        <p:txBody>
+          <a:bodyPr rtlCol="0" anchor="ctr"/>
+          <a:lstStyle/>
+          <a:p>
+            <a:pPr algn="ctr"/>
+          </a:p>
+        </p:txBody>
+      </p:sp>
+      <p:sp>
+        <p:nvSpPr>
+          <p:cNvPr id="11" name="Rectangle 10"/>
+          <p:cNvSpPr/>
+          <p:nvPr/>
+        </p:nvSpPr>
+        <p:spPr>
+          <a:xfrm>
+            <a:off x="4663440" y="1920240"/>
+            <a:ext cx="73152" cy="411480"/>
+          </a:xfrm>
+          <a:prstGeom prst="rect">
+            <a:avLst/>
+          </a:prstGeom>
+          <a:solidFill>
+            <a:srgbClr val="F97316"/>
+          </a:solidFill>
+          <a:ln>
+            <a:noFill/>
+          </a:ln>
+        </p:spPr>
+        <p:style>
+          <a:lnRef idx="1">
+            <a:schemeClr val="accent1"/>
+          </a:lnRef>
+          <a:fillRef idx="3">
+            <a:schemeClr val="accent1"/>
+          </a:fillRef>
+          <a:effectRef idx="2">
+            <a:schemeClr val="accent1"/>
+          </a:effectRef>
+          <a:fontRef idx="minor">
+            <a:schemeClr val="lt1"/>
+          </a:fontRef>
+        </p:style>
+        <p:txBody>
+          <a:bodyPr rtlCol="0" anchor="ctr"/>
+          <a:lstStyle/>
+          <a:p>
+            <a:pPr algn="ctr"/>
+          </a:p>
+        </p:txBody>
+      </p:sp>
+      <p:sp>
+        <p:nvSpPr>
+          <p:cNvPr id="12" name="TextBox 11"/>
+          <p:cNvSpPr txBox="1"/>
+          <p:nvPr/>
+        </p:nvSpPr>
+        <p:spPr>
+          <a:xfrm>
+            <a:off x="4846320" y="1874520"/>
+            <a:ext cx="2743200" cy="1554480"/>
+          </a:xfrm>
+          <a:prstGeom prst="rect">
+            <a:avLst/>
+          </a:prstGeom>
+          <a:noFill/>
+        </p:spPr>
+        <p:txBody>
+          <a:bodyPr wrap="square">
+            <a:spAutoFit/>
+          </a:bodyPr>
+          <a:lstStyle/>
+          <a:p>
+            <a:pPr>
+              <a:spcAft>
+                <a:spcPts val="600"/>
+              </a:spcAft>
+              <a:defRPr b="1" sz="1300">
+                <a:solidFill>
+                  <a:srgbClr val="0F172A"/>
+                </a:solidFill>
+              </a:defRPr>
+            </a:pPr>
+            <a:r>
+              <a:t>Route Optimization</a:t>
+            </a:r>
+          </a:p>
+          <a:p>
+            <a:pPr>
+              <a:defRPr sz="1050">
+                <a:solidFill>
+                  <a:srgbClr val="475569"/>
+                </a:solidFill>
+              </a:defRPr>
+            </a:pPr>
+            <a:r>
+              <a:t>Calculating shortest transit corridors for volunteer drivers.</a:t>
+            </a:r>
+          </a:p>
+        </p:txBody>
+      </p:sp>
+      <p:sp>
+        <p:nvSpPr>
+          <p:cNvPr id="13" name="Rounded Rectangle 12"/>
+          <p:cNvSpPr/>
+          <p:nvPr/>
+        </p:nvSpPr>
+        <p:spPr>
+          <a:xfrm>
+            <a:off x="8046720" y="1645920"/>
+            <a:ext cx="3383280" cy="2011680"/>
+          </a:xfrm>
+          <a:prstGeom prst="roundRect">
+            <a:avLst/>
+          </a:prstGeom>
+          <a:solidFill>
+            <a:srgbClr val="FFFFFF"/>
+          </a:solidFill>
+          <a:ln w="19050">
+            <a:solidFill>
+              <a:srgbClr val="2563EB"/>
+            </a:solidFill>
+          </a:ln>
+        </p:spPr>
+        <p:style>
+          <a:lnRef idx="1">
+            <a:schemeClr val="accent1"/>
+          </a:lnRef>
+          <a:fillRef idx="3">
+            <a:schemeClr val="accent1"/>
+          </a:fillRef>
+          <a:effectRef idx="2">
+            <a:schemeClr val="accent1"/>
+          </a:effectRef>
+          <a:fontRef idx="minor">
+            <a:schemeClr val="lt1"/>
+          </a:fontRef>
+        </p:style>
+        <p:txBody>
+          <a:bodyPr rtlCol="0" anchor="ctr"/>
+          <a:lstStyle/>
+          <a:p>
+            <a:pPr algn="ctr"/>
+          </a:p>
+        </p:txBody>
+      </p:sp>
+      <p:sp>
+        <p:nvSpPr>
+          <p:cNvPr id="14" name="Rectangle 13"/>
+          <p:cNvSpPr/>
+          <p:nvPr/>
+        </p:nvSpPr>
+        <p:spPr>
+          <a:xfrm>
+            <a:off x="8321040" y="1920240"/>
+            <a:ext cx="73152" cy="411480"/>
+          </a:xfrm>
+          <a:prstGeom prst="rect">
+            <a:avLst/>
+          </a:prstGeom>
+          <a:solidFill>
+            <a:srgbClr val="F97316"/>
+          </a:solidFill>
+          <a:ln>
+            <a:noFill/>
+          </a:ln>
+        </p:spPr>
+        <p:style>
+          <a:lnRef idx="1">
+            <a:schemeClr val="accent1"/>
+          </a:lnRef>
+          <a:fillRef idx="3">
+            <a:schemeClr val="accent1"/>
+          </a:fillRef>
+          <a:effectRef idx="2">
+            <a:schemeClr val="accent1"/>
+          </a:effectRef>
+          <a:fontRef idx="minor">
+            <a:schemeClr val="lt1"/>
+          </a:fontRef>
+        </p:style>
+        <p:txBody>
+          <a:bodyPr rtlCol="0" anchor="ctr"/>
+          <a:lstStyle/>
+          <a:p>
+            <a:pPr algn="ctr"/>
+          </a:p>
+        </p:txBody>
+      </p:sp>
+      <p:sp>
+        <p:nvSpPr>
+          <p:cNvPr id="15" name="TextBox 14"/>
+          <p:cNvSpPr txBox="1"/>
+          <p:nvPr/>
+        </p:nvSpPr>
+        <p:spPr>
+          <a:xfrm>
+            <a:off x="8503920" y="1874520"/>
+            <a:ext cx="2743200" cy="1554480"/>
+          </a:xfrm>
+          <a:prstGeom prst="rect">
+            <a:avLst/>
+          </a:prstGeom>
+          <a:noFill/>
+        </p:spPr>
+        <p:txBody>
+          <a:bodyPr wrap="square">
+            <a:spAutoFit/>
+          </a:bodyPr>
+          <a:lstStyle/>
+          <a:p>
+            <a:pPr>
+              <a:spcAft>
+                <a:spcPts val="600"/>
+              </a:spcAft>
+              <a:defRPr b="1" sz="1300">
+                <a:solidFill>
+                  <a:srgbClr val="0F172A"/>
+                </a:solidFill>
+              </a:defRPr>
+            </a:pPr>
+            <a:r>
+              <a:t>Blockchain Log Ledger</a:t>
+            </a:r>
+          </a:p>
+          <a:p>
+            <a:pPr>
+              <a:defRPr sz="1050">
+                <a:solidFill>
+                  <a:srgbClr val="475569"/>
+                </a:solidFill>
+              </a:defRPr>
+            </a:pPr>
+            <a:r>
+              <a:t>Implementing fully decentralized Polygon smart contract ledger.</a:t>
+            </a:r>
+          </a:p>
+        </p:txBody>
+      </p:sp>
+      <p:sp>
+        <p:nvSpPr>
+          <p:cNvPr id="16" name="Rounded Rectangle 15"/>
+          <p:cNvSpPr/>
+          <p:nvPr/>
+        </p:nvSpPr>
+        <p:spPr>
+          <a:xfrm>
+            <a:off x="731520" y="3931920"/>
+            <a:ext cx="3383280" cy="2011680"/>
+          </a:xfrm>
+          <a:prstGeom prst="roundRect">
+            <a:avLst/>
+          </a:prstGeom>
+          <a:solidFill>
+            <a:srgbClr val="FFFFFF"/>
+          </a:solidFill>
+          <a:ln w="19050">
+            <a:solidFill>
+              <a:srgbClr val="2563EB"/>
+            </a:solidFill>
+          </a:ln>
+        </p:spPr>
+        <p:style>
+          <a:lnRef idx="1">
+            <a:schemeClr val="accent1"/>
+          </a:lnRef>
+          <a:fillRef idx="3">
+            <a:schemeClr val="accent1"/>
+          </a:fillRef>
+          <a:effectRef idx="2">
+            <a:schemeClr val="accent1"/>
+          </a:effectRef>
+          <a:fontRef idx="minor">
+            <a:schemeClr val="lt1"/>
+          </a:fontRef>
+        </p:style>
+        <p:txBody>
+          <a:bodyPr rtlCol="0" anchor="ctr"/>
+          <a:lstStyle/>
+          <a:p>
+            <a:pPr algn="ctr"/>
+          </a:p>
+        </p:txBody>
+      </p:sp>
+      <p:sp>
+        <p:nvSpPr>
+          <p:cNvPr id="17" name="Rectangle 16"/>
+          <p:cNvSpPr/>
+          <p:nvPr/>
+        </p:nvSpPr>
+        <p:spPr>
+          <a:xfrm>
+            <a:off x="1005840" y="4206240"/>
+            <a:ext cx="73152" cy="411480"/>
+          </a:xfrm>
+          <a:prstGeom prst="rect">
+            <a:avLst/>
+          </a:prstGeom>
+          <a:solidFill>
+            <a:srgbClr val="F97316"/>
+          </a:solidFill>
+          <a:ln>
+            <a:noFill/>
+          </a:ln>
+        </p:spPr>
+        <p:style>
+          <a:lnRef idx="1">
+            <a:schemeClr val="accent1"/>
+          </a:lnRef>
+          <a:fillRef idx="3">
+            <a:schemeClr val="accent1"/>
+          </a:fillRef>
+          <a:effectRef idx="2">
+            <a:schemeClr val="accent1"/>
+          </a:effectRef>
+          <a:fontRef idx="minor">
+            <a:schemeClr val="lt1"/>
+          </a:fontRef>
+        </p:style>
+        <p:txBody>
+          <a:bodyPr rtlCol="0" anchor="ctr"/>
+          <a:lstStyle/>
+          <a:p>
+            <a:pPr algn="ctr"/>
+          </a:p>
+        </p:txBody>
+      </p:sp>
+      <p:sp>
+        <p:nvSpPr>
+          <p:cNvPr id="18" name="TextBox 17"/>
+          <p:cNvSpPr txBox="1"/>
+          <p:nvPr/>
+        </p:nvSpPr>
+        <p:spPr>
+          <a:xfrm>
+            <a:off x="1188720" y="4160520"/>
+            <a:ext cx="2743200" cy="1554480"/>
+          </a:xfrm>
+          <a:prstGeom prst="rect">
+            <a:avLst/>
+          </a:prstGeom>
+          <a:noFill/>
+        </p:spPr>
+        <p:txBody>
+          <a:bodyPr wrap="square">
+            <a:spAutoFit/>
+          </a:bodyPr>
+          <a:lstStyle/>
+          <a:p>
+            <a:pPr>
+              <a:spcAft>
+                <a:spcPts val="600"/>
+              </a:spcAft>
+              <a:defRPr b="1" sz="1300">
+                <a:solidFill>
+                  <a:srgbClr val="0F172A"/>
+                </a:solidFill>
+              </a:defRPr>
+            </a:pPr>
+            <a:r>
+              <a:t>CSR Portal Integration</a:t>
+            </a:r>
+          </a:p>
+          <a:p>
+            <a:pPr>
+              <a:defRPr sz="1050">
+                <a:solidFill>
+                  <a:srgbClr val="475569"/>
+                </a:solidFill>
+              </a:defRPr>
+            </a:pPr>
+            <a:r>
+              <a:t>Helping corporations claim Section 135 ESG compliance offsets.</a:t>
+            </a:r>
+          </a:p>
+        </p:txBody>
+      </p:sp>
+      <p:sp>
+        <p:nvSpPr>
+          <p:cNvPr id="19" name="Rounded Rectangle 18"/>
+          <p:cNvSpPr/>
+          <p:nvPr/>
+        </p:nvSpPr>
+        <p:spPr>
+          <a:xfrm>
+            <a:off x="4389120" y="3931920"/>
+            <a:ext cx="3383280" cy="2011680"/>
+          </a:xfrm>
+          <a:prstGeom prst="roundRect">
+            <a:avLst/>
+          </a:prstGeom>
+          <a:solidFill>
+            <a:srgbClr val="FFFFFF"/>
+          </a:solidFill>
+          <a:ln w="19050">
+            <a:solidFill>
+              <a:srgbClr val="2563EB"/>
+            </a:solidFill>
+          </a:ln>
+        </p:spPr>
+        <p:style>
+          <a:lnRef idx="1">
+            <a:schemeClr val="accent1"/>
+          </a:lnRef>
+          <a:fillRef idx="3">
+            <a:schemeClr val="accent1"/>
+          </a:fillRef>
+          <a:effectRef idx="2">
+            <a:schemeClr val="accent1"/>
+          </a:effectRef>
+          <a:fontRef idx="minor">
+            <a:schemeClr val="lt1"/>
+          </a:fontRef>
+        </p:style>
+        <p:txBody>
+          <a:bodyPr rtlCol="0" anchor="ctr"/>
+          <a:lstStyle/>
+          <a:p>
+            <a:pPr algn="ctr"/>
+          </a:p>
+        </p:txBody>
+      </p:sp>
+      <p:sp>
+        <p:nvSpPr>
+          <p:cNvPr id="20" name="Rectangle 19"/>
+          <p:cNvSpPr/>
+          <p:nvPr/>
+        </p:nvSpPr>
+        <p:spPr>
+          <a:xfrm>
+            <a:off x="4663440" y="4206240"/>
+            <a:ext cx="73152" cy="411480"/>
+          </a:xfrm>
+          <a:prstGeom prst="rect">
+            <a:avLst/>
+          </a:prstGeom>
+          <a:solidFill>
+            <a:srgbClr val="F97316"/>
+          </a:solidFill>
+          <a:ln>
+            <a:noFill/>
+          </a:ln>
+        </p:spPr>
+        <p:style>
+          <a:lnRef idx="1">
+            <a:schemeClr val="accent1"/>
+          </a:lnRef>
+          <a:fillRef idx="3">
+            <a:schemeClr val="accent1"/>
+          </a:fillRef>
+          <a:effectRef idx="2">
+            <a:schemeClr val="accent1"/>
+          </a:effectRef>
+          <a:fontRef idx="minor">
+            <a:schemeClr val="lt1"/>
+          </a:fontRef>
+        </p:style>
+        <p:txBody>
+          <a:bodyPr rtlCol="0" anchor="ctr"/>
+          <a:lstStyle/>
+          <a:p>
+            <a:pPr algn="ctr"/>
+          </a:p>
+        </p:txBody>
+      </p:sp>
+      <p:sp>
+        <p:nvSpPr>
+          <p:cNvPr id="21" name="TextBox 20"/>
+          <p:cNvSpPr txBox="1"/>
+          <p:nvPr/>
+        </p:nvSpPr>
+        <p:spPr>
+          <a:xfrm>
+            <a:off x="4846320" y="4160520"/>
+            <a:ext cx="2743200" cy="1554480"/>
+          </a:xfrm>
+          <a:prstGeom prst="rect">
+            <a:avLst/>
+          </a:prstGeom>
+          <a:noFill/>
+        </p:spPr>
+        <p:txBody>
+          <a:bodyPr wrap="square">
+            <a:spAutoFit/>
+          </a:bodyPr>
+          <a:lstStyle/>
+          <a:p>
+            <a:pPr>
+              <a:spcAft>
+                <a:spcPts val="600"/>
+              </a:spcAft>
+              <a:defRPr b="1" sz="1300">
+                <a:solidFill>
+                  <a:srgbClr val="0F172A"/>
+                </a:solidFill>
+              </a:defRPr>
+            </a:pPr>
+            <a:r>
+              <a:t>UPI Donation Gateway</a:t>
+            </a:r>
+          </a:p>
+          <a:p>
+            <a:pPr>
+              <a:defRPr sz="1050">
+                <a:solidFill>
+                  <a:srgbClr val="475569"/>
+                </a:solidFill>
+              </a:defRPr>
+            </a:pPr>
+            <a:r>
+              <a:t>Enabling cash contributions to cover NGO operational costs.</a:t>
+            </a:r>
+          </a:p>
+        </p:txBody>
+      </p:sp>
+      <p:sp>
+        <p:nvSpPr>
+          <p:cNvPr id="22" name="Rounded Rectangle 21"/>
+          <p:cNvSpPr/>
+          <p:nvPr/>
+        </p:nvSpPr>
+        <p:spPr>
+          <a:xfrm>
+            <a:off x="8046720" y="3931920"/>
+            <a:ext cx="3383280" cy="2011680"/>
+          </a:xfrm>
+          <a:prstGeom prst="roundRect">
+            <a:avLst/>
+          </a:prstGeom>
+          <a:solidFill>
+            <a:srgbClr val="FFFFFF"/>
+          </a:solidFill>
+          <a:ln w="19050">
+            <a:solidFill>
+              <a:srgbClr val="2563EB"/>
+            </a:solidFill>
+          </a:ln>
+        </p:spPr>
+        <p:style>
+          <a:lnRef idx="1">
+            <a:schemeClr val="accent1"/>
+          </a:lnRef>
+          <a:fillRef idx="3">
+            <a:schemeClr val="accent1"/>
+          </a:fillRef>
+          <a:effectRef idx="2">
+            <a:schemeClr val="accent1"/>
+          </a:effectRef>
+          <a:fontRef idx="minor">
+            <a:schemeClr val="lt1"/>
+          </a:fontRef>
+        </p:style>
+        <p:txBody>
+          <a:bodyPr rtlCol="0" anchor="ctr"/>
+          <a:lstStyle/>
+          <a:p>
+            <a:pPr algn="ctr"/>
+          </a:p>
+        </p:txBody>
+      </p:sp>
+      <p:sp>
+        <p:nvSpPr>
+          <p:cNvPr id="23" name="Rectangle 22"/>
+          <p:cNvSpPr/>
+          <p:nvPr/>
+        </p:nvSpPr>
+        <p:spPr>
+          <a:xfrm>
+            <a:off x="8321040" y="4206240"/>
+            <a:ext cx="73152" cy="411480"/>
+          </a:xfrm>
+          <a:prstGeom prst="rect">
+            <a:avLst/>
+          </a:prstGeom>
+          <a:solidFill>
+            <a:srgbClr val="F97316"/>
+          </a:solidFill>
+          <a:ln>
+            <a:noFill/>
+          </a:ln>
+        </p:spPr>
+        <p:style>
+          <a:lnRef idx="1">
+            <a:schemeClr val="accent1"/>
+          </a:lnRef>
+          <a:fillRef idx="3">
+            <a:schemeClr val="accent1"/>
+          </a:fillRef>
+          <a:effectRef idx="2">
+            <a:schemeClr val="accent1"/>
+          </a:effectRef>
+          <a:fontRef idx="minor">
+            <a:schemeClr val="lt1"/>
+          </a:fontRef>
+        </p:style>
+        <p:txBody>
+          <a:bodyPr rtlCol="0" anchor="ctr"/>
+          <a:lstStyle/>
+          <a:p>
+            <a:pPr algn="ctr"/>
+          </a:p>
+        </p:txBody>
+      </p:sp>
+      <p:sp>
+        <p:nvSpPr>
+          <p:cNvPr id="24" name="TextBox 23"/>
+          <p:cNvSpPr txBox="1"/>
+          <p:nvPr/>
+        </p:nvSpPr>
+        <p:spPr>
+          <a:xfrm>
+            <a:off x="8503920" y="4160520"/>
+            <a:ext cx="2743200" cy="1554480"/>
+          </a:xfrm>
+          <a:prstGeom prst="rect">
+            <a:avLst/>
+          </a:prstGeom>
+          <a:noFill/>
+        </p:spPr>
+        <p:txBody>
+          <a:bodyPr wrap="square">
+            <a:spAutoFit/>
+          </a:bodyPr>
+          <a:lstStyle/>
+          <a:p>
+            <a:pPr>
+              <a:spcAft>
+                <a:spcPts val="600"/>
+              </a:spcAft>
+              <a:defRPr b="1" sz="1300">
+                <a:solidFill>
+                  <a:srgbClr val="0F172A"/>
+                </a:solidFill>
+              </a:defRPr>
+            </a:pPr>
+            <a:r>
+              <a:t>Mobile Applications</a:t>
+            </a:r>
+          </a:p>
+          <a:p>
+            <a:pPr>
+              <a:defRPr sz="1050">
+                <a:solidFill>
+                  <a:srgbClr val="475569"/>
+                </a:solidFill>
+              </a:defRPr>
+            </a:pPr>
+            <a:r>
+              <a:t>Building dedicated Android and iOS native mobile clients.</a:t>
+            </a:r>
+          </a:p>
+        </p:txBody>
+      </p:sp>
+    </p:spTree>
+  </p:cSld>
+  <p:clrMapOvr>
+    <a:masterClrMapping/>
+  </p:clrMapOvr>
+</p:sld>
+</file>
+
+<file path=ppt/slides/slide9.xml><?xml version="1.0" encoding="utf-8"?>
+<p:sld xmlns:a="http://schemas.openxmlformats.org/drawingml/2006/main" xmlns:p="http://schemas.openxmlformats.org/presentationml/2006/main" xmlns:r="http://schemas.openxmlformats.org/officeDocument/2006/relationships">
+  <p:cSld>
+    <p:spTree>
+      <p:nvGrpSpPr>
+        <p:cNvPr id="1" name=""/>
+        <p:cNvGrpSpPr/>
+        <p:nvPr/>
+      </p:nvGrpSpPr>
+      <p:grpSpPr/>
+      <p:sp>
+        <p:nvSpPr>
+          <p:cNvPr id="2" name="Rectangle 1"/>
+          <p:cNvSpPr/>
+          <p:nvPr/>
+        </p:nvSpPr>
+        <p:spPr>
+          <a:xfrm>
+            <a:off x="0" y="0"/>
+            <a:ext cx="12191695" cy="6858000"/>
+          </a:xfrm>
+          <a:prstGeom prst="rect">
+            <a:avLst/>
+          </a:prstGeom>
+          <a:solidFill>
+            <a:srgbClr val="F8FAFC"/>
+          </a:solidFill>
+          <a:ln>
+            <a:noFill/>
+          </a:ln>
+        </p:spPr>
+        <p:style>
+          <a:lnRef idx="1">
+            <a:schemeClr val="accent1"/>
+          </a:lnRef>
+          <a:fillRef idx="3">
+            <a:schemeClr val="accent1"/>
+          </a:fillRef>
+          <a:effectRef idx="2">
+            <a:schemeClr val="accent1"/>
+          </a:effectRef>
+          <a:fontRef idx="minor">
+            <a:schemeClr val="lt1"/>
+          </a:fontRef>
+        </p:style>
+        <p:txBody>
+          <a:bodyPr rtlCol="0" anchor="ctr"/>
+          <a:lstStyle/>
+          <a:p>
+            <a:pPr algn="ctr"/>
+          </a:p>
+        </p:txBody>
+      </p:sp>
+      <p:sp>
+        <p:nvSpPr>
+          <p:cNvPr id="3" name="TextBox 2"/>
+          <p:cNvSpPr txBox="1"/>
+          <p:nvPr/>
+        </p:nvSpPr>
+        <p:spPr>
+          <a:xfrm>
+            <a:off x="731520" y="365760"/>
+            <a:ext cx="7315200" cy="365760"/>
+          </a:xfrm>
+          <a:prstGeom prst="rect">
+            <a:avLst/>
+          </a:prstGeom>
+          <a:noFill/>
+        </p:spPr>
+        <p:txBody>
+          <a:bodyPr wrap="square" lIns="0" rIns="0" tIns="0" bIns="0">
+            <a:spAutoFit/>
+          </a:bodyPr>
+          <a:lstStyle/>
+          <a:p>
+            <a:pPr>
+              <a:defRPr sz="1000" b="1">
+                <a:solidFill>
+                  <a:srgbClr val="F97316"/>
+                </a:solidFill>
                 <a:latin typeface="Plus Jakarta Sans"/>
               </a:defRPr>
             </a:pPr>
             <a:r>
-              <a:t>ABES Engineering College  •  Investor Pitch  •  Contact: santosh.patel@abes.ac.in</a:t>
+              <a:t>SECTION 04: PROJECT PROGRESSION</a:t>
+            </a:r>
+          </a:p>
+        </p:txBody>
+      </p:sp>
+      <p:sp>
+        <p:nvSpPr>
+          <p:cNvPr id="4" name="TextBox 3"/>
+          <p:cNvSpPr txBox="1"/>
+          <p:nvPr/>
+        </p:nvSpPr>
+        <p:spPr>
+          <a:xfrm>
+            <a:off x="731520" y="640080"/>
+            <a:ext cx="8229600" cy="548640"/>
+          </a:xfrm>
+          <a:prstGeom prst="rect">
+            <a:avLst/>
+          </a:prstGeom>
+          <a:noFill/>
+        </p:spPr>
+        <p:txBody>
+          <a:bodyPr wrap="square" lIns="0" rIns="0" tIns="0" bIns="0">
+            <a:spAutoFit/>
+          </a:bodyPr>
+          <a:lstStyle/>
+          <a:p>
+            <a:pPr>
+              <a:defRPr sz="2400" b="1">
+                <a:solidFill>
+                  <a:srgbClr val="0F172A"/>
+                </a:solidFill>
+                <a:latin typeface="Plus Jakarta Sans"/>
+              </a:defRPr>
+            </a:pPr>
+            <a:r>
+              <a:t>Expected Outcomes &amp; Benefits</a:t>
+            </a:r>
+          </a:p>
+        </p:txBody>
+      </p:sp>
+      <p:sp>
+        <p:nvSpPr>
+          <p:cNvPr id="5" name="TextBox 4"/>
+          <p:cNvSpPr txBox="1"/>
+          <p:nvPr/>
+        </p:nvSpPr>
+        <p:spPr>
+          <a:xfrm>
+            <a:off x="8686800" y="365760"/>
+            <a:ext cx="2743200" cy="365760"/>
+          </a:xfrm>
+          <a:prstGeom prst="rect">
+            <a:avLst/>
+          </a:prstGeom>
+          <a:noFill/>
+        </p:spPr>
+        <p:txBody>
+          <a:bodyPr wrap="square" lIns="0" rIns="0" tIns="0" bIns="0">
+            <a:spAutoFit/>
+          </a:bodyPr>
+          <a:lstStyle/>
+          <a:p>
+            <a:pPr algn="r">
+              <a:defRPr sz="900" b="1">
+                <a:solidFill>
+                  <a:srgbClr val="475569"/>
+                </a:solidFill>
+                <a:latin typeface="Plus Jakarta Sans"/>
+              </a:defRPr>
+            </a:pPr>
+            <a:r>
+              <a:t>AAHAAR ENTERPRISE SYSTEM</a:t>
+            </a:r>
+          </a:p>
+        </p:txBody>
+      </p:sp>
+      <p:sp>
+        <p:nvSpPr>
+          <p:cNvPr id="6" name="Rectangle 5"/>
+          <p:cNvSpPr/>
+          <p:nvPr/>
+        </p:nvSpPr>
+        <p:spPr>
+          <a:xfrm>
+            <a:off x="731520" y="1234440"/>
+            <a:ext cx="10728655" cy="18288"/>
+          </a:xfrm>
+          <a:prstGeom prst="rect">
+            <a:avLst/>
+          </a:prstGeom>
+          <a:solidFill>
+            <a:srgbClr val="2563EB"/>
+          </a:solidFill>
+          <a:ln>
+            <a:noFill/>
+          </a:ln>
+        </p:spPr>
+        <p:style>
+          <a:lnRef idx="1">
+            <a:schemeClr val="accent1"/>
+          </a:lnRef>
+          <a:fillRef idx="3">
+            <a:schemeClr val="accent1"/>
+          </a:fillRef>
+          <a:effectRef idx="2">
+            <a:schemeClr val="accent1"/>
+          </a:effectRef>
+          <a:fontRef idx="minor">
+            <a:schemeClr val="lt1"/>
+          </a:fontRef>
+        </p:style>
+        <p:txBody>
+          <a:bodyPr rtlCol="0" anchor="ctr"/>
+          <a:lstStyle/>
+          <a:p>
+            <a:pPr algn="ctr"/>
+          </a:p>
+        </p:txBody>
+      </p:sp>
+      <p:sp>
+        <p:nvSpPr>
+          <p:cNvPr id="7" name="Rounded Rectangle 6"/>
+          <p:cNvSpPr/>
+          <p:nvPr/>
+        </p:nvSpPr>
+        <p:spPr>
+          <a:xfrm>
+            <a:off x="731520" y="1645920"/>
+            <a:ext cx="3383280" cy="2011680"/>
+          </a:xfrm>
+          <a:prstGeom prst="roundRect">
+            <a:avLst/>
+          </a:prstGeom>
+          <a:solidFill>
+            <a:srgbClr val="FFFFFF"/>
+          </a:solidFill>
+          <a:ln w="19050">
+            <a:solidFill>
+              <a:srgbClr val="E2E8F0"/>
+            </a:solidFill>
+          </a:ln>
+        </p:spPr>
+        <p:style>
+          <a:lnRef idx="1">
+            <a:schemeClr val="accent1"/>
+          </a:lnRef>
+          <a:fillRef idx="3">
+            <a:schemeClr val="accent1"/>
+          </a:fillRef>
+          <a:effectRef idx="2">
+            <a:schemeClr val="accent1"/>
+          </a:effectRef>
+          <a:fontRef idx="minor">
+            <a:schemeClr val="lt1"/>
+          </a:fontRef>
+        </p:style>
+        <p:txBody>
+          <a:bodyPr rtlCol="0" anchor="ctr"/>
+          <a:lstStyle/>
+          <a:p>
+            <a:pPr algn="ctr"/>
+          </a:p>
+        </p:txBody>
+      </p:sp>
+      <p:sp>
+        <p:nvSpPr>
+          <p:cNvPr id="8" name="Oval 7"/>
+          <p:cNvSpPr/>
+          <p:nvPr/>
+        </p:nvSpPr>
+        <p:spPr>
+          <a:xfrm>
+            <a:off x="1005840" y="1920240"/>
+            <a:ext cx="365760" cy="365760"/>
+          </a:xfrm>
+          <a:prstGeom prst="ellipse">
+            <a:avLst/>
+          </a:prstGeom>
+          <a:solidFill>
+            <a:srgbClr val="2563EB"/>
+          </a:solidFill>
+          <a:ln>
+            <a:noFill/>
+          </a:ln>
+        </p:spPr>
+        <p:style>
+          <a:lnRef idx="1">
+            <a:schemeClr val="accent1"/>
+          </a:lnRef>
+          <a:fillRef idx="3">
+            <a:schemeClr val="accent1"/>
+          </a:fillRef>
+          <a:effectRef idx="2">
+            <a:schemeClr val="accent1"/>
+          </a:effectRef>
+          <a:fontRef idx="minor">
+            <a:schemeClr val="lt1"/>
+          </a:fontRef>
+        </p:style>
+        <p:txBody>
+          <a:bodyPr rtlCol="0" anchor="ctr"/>
+          <a:lstStyle/>
+          <a:p>
+            <a:pPr algn="ctr"/>
+          </a:p>
+        </p:txBody>
+      </p:sp>
+      <p:sp>
+        <p:nvSpPr>
+          <p:cNvPr id="9" name="TextBox 8"/>
+          <p:cNvSpPr txBox="1"/>
+          <p:nvPr/>
+        </p:nvSpPr>
+        <p:spPr>
+          <a:xfrm>
+            <a:off x="1463040" y="1874520"/>
+            <a:ext cx="2468880" cy="1554480"/>
+          </a:xfrm>
+          <a:prstGeom prst="rect">
+            <a:avLst/>
+          </a:prstGeom>
+          <a:noFill/>
+        </p:spPr>
+        <p:txBody>
+          <a:bodyPr wrap="square">
+            <a:spAutoFit/>
+          </a:bodyPr>
+          <a:lstStyle/>
+          <a:p>
+            <a:pPr>
+              <a:spcAft>
+                <a:spcPts val="600"/>
+              </a:spcAft>
+              <a:defRPr b="1" sz="1300">
+                <a:solidFill>
+                  <a:srgbClr val="0F172A"/>
+                </a:solidFill>
+              </a:defRPr>
+            </a:pPr>
+            <a:r>
+              <a:t>Food Waste Reduction</a:t>
+            </a:r>
+          </a:p>
+          <a:p>
+            <a:pPr>
+              <a:defRPr sz="1050">
+                <a:solidFill>
+                  <a:srgbClr val="475569"/>
+                </a:solidFill>
+              </a:defRPr>
+            </a:pPr>
+            <a:r>
+              <a:t>Minimizing organic dump rotting by redirecting food in under 4 hours.</a:t>
+            </a:r>
+          </a:p>
+        </p:txBody>
+      </p:sp>
+      <p:sp>
+        <p:nvSpPr>
+          <p:cNvPr id="10" name="Rounded Rectangle 9"/>
+          <p:cNvSpPr/>
+          <p:nvPr/>
+        </p:nvSpPr>
+        <p:spPr>
+          <a:xfrm>
+            <a:off x="4389120" y="1645920"/>
+            <a:ext cx="3383280" cy="2011680"/>
+          </a:xfrm>
+          <a:prstGeom prst="roundRect">
+            <a:avLst/>
+          </a:prstGeom>
+          <a:solidFill>
+            <a:srgbClr val="FFFFFF"/>
+          </a:solidFill>
+          <a:ln w="19050">
+            <a:solidFill>
+              <a:srgbClr val="E2E8F0"/>
+            </a:solidFill>
+          </a:ln>
+        </p:spPr>
+        <p:style>
+          <a:lnRef idx="1">
+            <a:schemeClr val="accent1"/>
+          </a:lnRef>
+          <a:fillRef idx="3">
+            <a:schemeClr val="accent1"/>
+          </a:fillRef>
+          <a:effectRef idx="2">
+            <a:schemeClr val="accent1"/>
+          </a:effectRef>
+          <a:fontRef idx="minor">
+            <a:schemeClr val="lt1"/>
+          </a:fontRef>
+        </p:style>
+        <p:txBody>
+          <a:bodyPr rtlCol="0" anchor="ctr"/>
+          <a:lstStyle/>
+          <a:p>
+            <a:pPr algn="ctr"/>
+          </a:p>
+        </p:txBody>
+      </p:sp>
+      <p:sp>
+        <p:nvSpPr>
+          <p:cNvPr id="11" name="Oval 10"/>
+          <p:cNvSpPr/>
+          <p:nvPr/>
+        </p:nvSpPr>
+        <p:spPr>
+          <a:xfrm>
+            <a:off x="4663440" y="1920240"/>
+            <a:ext cx="365760" cy="365760"/>
+          </a:xfrm>
+          <a:prstGeom prst="ellipse">
+            <a:avLst/>
+          </a:prstGeom>
+          <a:solidFill>
+            <a:srgbClr val="16A34A"/>
+          </a:solidFill>
+          <a:ln>
+            <a:noFill/>
+          </a:ln>
+        </p:spPr>
+        <p:style>
+          <a:lnRef idx="1">
+            <a:schemeClr val="accent1"/>
+          </a:lnRef>
+          <a:fillRef idx="3">
+            <a:schemeClr val="accent1"/>
+          </a:fillRef>
+          <a:effectRef idx="2">
+            <a:schemeClr val="accent1"/>
+          </a:effectRef>
+          <a:fontRef idx="minor">
+            <a:schemeClr val="lt1"/>
+          </a:fontRef>
+        </p:style>
+        <p:txBody>
+          <a:bodyPr rtlCol="0" anchor="ctr"/>
+          <a:lstStyle/>
+          <a:p>
+            <a:pPr algn="ctr"/>
+          </a:p>
+        </p:txBody>
+      </p:sp>
+      <p:sp>
+        <p:nvSpPr>
+          <p:cNvPr id="12" name="TextBox 11"/>
+          <p:cNvSpPr txBox="1"/>
+          <p:nvPr/>
+        </p:nvSpPr>
+        <p:spPr>
+          <a:xfrm>
+            <a:off x="5120640" y="1874520"/>
+            <a:ext cx="2468880" cy="1554480"/>
+          </a:xfrm>
+          <a:prstGeom prst="rect">
+            <a:avLst/>
+          </a:prstGeom>
+          <a:noFill/>
+        </p:spPr>
+        <p:txBody>
+          <a:bodyPr wrap="square">
+            <a:spAutoFit/>
+          </a:bodyPr>
+          <a:lstStyle/>
+          <a:p>
+            <a:pPr>
+              <a:spcAft>
+                <a:spcPts val="600"/>
+              </a:spcAft>
+              <a:defRPr b="1" sz="1300">
+                <a:solidFill>
+                  <a:srgbClr val="0F172A"/>
+                </a:solidFill>
+              </a:defRPr>
+            </a:pPr>
+            <a:r>
+              <a:t>Accelerated Logistics</a:t>
+            </a:r>
+          </a:p>
+          <a:p>
+            <a:pPr>
+              <a:defRPr sz="1050">
+                <a:solidFill>
+                  <a:srgbClr val="475569"/>
+                </a:solidFill>
+              </a:defRPr>
+            </a:pPr>
+            <a:r>
+              <a:t>Location matching and push alerts speed up NGO arrival rates.</a:t>
+            </a:r>
+          </a:p>
+        </p:txBody>
+      </p:sp>
+      <p:sp>
+        <p:nvSpPr>
+          <p:cNvPr id="13" name="Rounded Rectangle 12"/>
+          <p:cNvSpPr/>
+          <p:nvPr/>
+        </p:nvSpPr>
+        <p:spPr>
+          <a:xfrm>
+            <a:off x="8046720" y="1645920"/>
+            <a:ext cx="3383280" cy="2011680"/>
+          </a:xfrm>
+          <a:prstGeom prst="roundRect">
+            <a:avLst/>
+          </a:prstGeom>
+          <a:solidFill>
+            <a:srgbClr val="FFFFFF"/>
+          </a:solidFill>
+          <a:ln w="19050">
+            <a:solidFill>
+              <a:srgbClr val="E2E8F0"/>
+            </a:solidFill>
+          </a:ln>
+        </p:spPr>
+        <p:style>
+          <a:lnRef idx="1">
+            <a:schemeClr val="accent1"/>
+          </a:lnRef>
+          <a:fillRef idx="3">
+            <a:schemeClr val="accent1"/>
+          </a:fillRef>
+          <a:effectRef idx="2">
+            <a:schemeClr val="accent1"/>
+          </a:effectRef>
+          <a:fontRef idx="minor">
+            <a:schemeClr val="lt1"/>
+          </a:fontRef>
+        </p:style>
+        <p:txBody>
+          <a:bodyPr rtlCol="0" anchor="ctr"/>
+          <a:lstStyle/>
+          <a:p>
+            <a:pPr algn="ctr"/>
+          </a:p>
+        </p:txBody>
+      </p:sp>
+      <p:sp>
+        <p:nvSpPr>
+          <p:cNvPr id="14" name="Oval 13"/>
+          <p:cNvSpPr/>
+          <p:nvPr/>
+        </p:nvSpPr>
+        <p:spPr>
+          <a:xfrm>
+            <a:off x="8321040" y="1920240"/>
+            <a:ext cx="365760" cy="365760"/>
+          </a:xfrm>
+          <a:prstGeom prst="ellipse">
+            <a:avLst/>
+          </a:prstGeom>
+          <a:solidFill>
+            <a:srgbClr val="F97316"/>
+          </a:solidFill>
+          <a:ln>
+            <a:noFill/>
+          </a:ln>
+        </p:spPr>
+        <p:style>
+          <a:lnRef idx="1">
+            <a:schemeClr val="accent1"/>
+          </a:lnRef>
+          <a:fillRef idx="3">
+            <a:schemeClr val="accent1"/>
+          </a:fillRef>
+          <a:effectRef idx="2">
+            <a:schemeClr val="accent1"/>
+          </a:effectRef>
+          <a:fontRef idx="minor">
+            <a:schemeClr val="lt1"/>
+          </a:fontRef>
+        </p:style>
+        <p:txBody>
+          <a:bodyPr rtlCol="0" anchor="ctr"/>
+          <a:lstStyle/>
+          <a:p>
+            <a:pPr algn="ctr"/>
+          </a:p>
+        </p:txBody>
+      </p:sp>
+      <p:sp>
+        <p:nvSpPr>
+          <p:cNvPr id="15" name="TextBox 14"/>
+          <p:cNvSpPr txBox="1"/>
+          <p:nvPr/>
+        </p:nvSpPr>
+        <p:spPr>
+          <a:xfrm>
+            <a:off x="8778240" y="1874520"/>
+            <a:ext cx="2468880" cy="1554480"/>
+          </a:xfrm>
+          <a:prstGeom prst="rect">
+            <a:avLst/>
+          </a:prstGeom>
+          <a:noFill/>
+        </p:spPr>
+        <p:txBody>
+          <a:bodyPr wrap="square">
+            <a:spAutoFit/>
+          </a:bodyPr>
+          <a:lstStyle/>
+          <a:p>
+            <a:pPr>
+              <a:spcAft>
+                <a:spcPts val="600"/>
+              </a:spcAft>
+              <a:defRPr b="1" sz="1300">
+                <a:solidFill>
+                  <a:srgbClr val="0F172A"/>
+                </a:solidFill>
+              </a:defRPr>
+            </a:pPr>
+            <a:r>
+              <a:t>Audit-Ready Verification</a:t>
+            </a:r>
+          </a:p>
+          <a:p>
+            <a:pPr>
+              <a:defRPr sz="1050">
+                <a:solidFill>
+                  <a:srgbClr val="475569"/>
+                </a:solidFill>
+              </a:defRPr>
+            </a:pPr>
+            <a:r>
+              <a:t>Tamper-proof digital certificates ensure zero delivery fraud.</a:t>
+            </a:r>
+          </a:p>
+        </p:txBody>
+      </p:sp>
+      <p:sp>
+        <p:nvSpPr>
+          <p:cNvPr id="16" name="Rounded Rectangle 15"/>
+          <p:cNvSpPr/>
+          <p:nvPr/>
+        </p:nvSpPr>
+        <p:spPr>
+          <a:xfrm>
+            <a:off x="731520" y="3931920"/>
+            <a:ext cx="3383280" cy="2011680"/>
+          </a:xfrm>
+          <a:prstGeom prst="roundRect">
+            <a:avLst/>
+          </a:prstGeom>
+          <a:solidFill>
+            <a:srgbClr val="FFFFFF"/>
+          </a:solidFill>
+          <a:ln w="19050">
+            <a:solidFill>
+              <a:srgbClr val="E2E8F0"/>
+            </a:solidFill>
+          </a:ln>
+        </p:spPr>
+        <p:style>
+          <a:lnRef idx="1">
+            <a:schemeClr val="accent1"/>
+          </a:lnRef>
+          <a:fillRef idx="3">
+            <a:schemeClr val="accent1"/>
+          </a:fillRef>
+          <a:effectRef idx="2">
+            <a:schemeClr val="accent1"/>
+          </a:effectRef>
+          <a:fontRef idx="minor">
+            <a:schemeClr val="lt1"/>
+          </a:fontRef>
+        </p:style>
+        <p:txBody>
+          <a:bodyPr rtlCol="0" anchor="ctr"/>
+          <a:lstStyle/>
+          <a:p>
+            <a:pPr algn="ctr"/>
+          </a:p>
+        </p:txBody>
+      </p:sp>
+      <p:sp>
+        <p:nvSpPr>
+          <p:cNvPr id="17" name="Oval 16"/>
+          <p:cNvSpPr/>
+          <p:nvPr/>
+        </p:nvSpPr>
+        <p:spPr>
+          <a:xfrm>
+            <a:off x="1005840" y="4206240"/>
+            <a:ext cx="365760" cy="365760"/>
+          </a:xfrm>
+          <a:prstGeom prst="ellipse">
+            <a:avLst/>
+          </a:prstGeom>
+          <a:solidFill>
+            <a:srgbClr val="0F172A"/>
+          </a:solidFill>
+          <a:ln>
+            <a:noFill/>
+          </a:ln>
+        </p:spPr>
+        <p:style>
+          <a:lnRef idx="1">
+            <a:schemeClr val="accent1"/>
+          </a:lnRef>
+          <a:fillRef idx="3">
+            <a:schemeClr val="accent1"/>
+          </a:fillRef>
+          <a:effectRef idx="2">
+            <a:schemeClr val="accent1"/>
+          </a:effectRef>
+          <a:fontRef idx="minor">
+            <a:schemeClr val="lt1"/>
+          </a:fontRef>
+        </p:style>
+        <p:txBody>
+          <a:bodyPr rtlCol="0" anchor="ctr"/>
+          <a:lstStyle/>
+          <a:p>
+            <a:pPr algn="ctr"/>
+          </a:p>
+        </p:txBody>
+      </p:sp>
+      <p:sp>
+        <p:nvSpPr>
+          <p:cNvPr id="18" name="TextBox 17"/>
+          <p:cNvSpPr txBox="1"/>
+          <p:nvPr/>
+        </p:nvSpPr>
+        <p:spPr>
+          <a:xfrm>
+            <a:off x="1463040" y="4160520"/>
+            <a:ext cx="2468880" cy="1554480"/>
+          </a:xfrm>
+          <a:prstGeom prst="rect">
+            <a:avLst/>
+          </a:prstGeom>
+          <a:noFill/>
+        </p:spPr>
+        <p:txBody>
+          <a:bodyPr wrap="square">
+            <a:spAutoFit/>
+          </a:bodyPr>
+          <a:lstStyle/>
+          <a:p>
+            <a:pPr>
+              <a:spcAft>
+                <a:spcPts val="600"/>
+              </a:spcAft>
+              <a:defRPr b="1" sz="1300">
+                <a:solidFill>
+                  <a:srgbClr val="0F172A"/>
+                </a:solidFill>
+              </a:defRPr>
+            </a:pPr>
+            <a:r>
+              <a:t>Real-Time Transparency</a:t>
+            </a:r>
+          </a:p>
+          <a:p>
+            <a:pPr>
+              <a:defRPr sz="1050">
+                <a:solidFill>
+                  <a:srgbClr val="475569"/>
+                </a:solidFill>
+              </a:defRPr>
+            </a:pPr>
+            <a:r>
+              <a:t>Live tracking logs allow donors to observe receipt status.</a:t>
+            </a:r>
+          </a:p>
+        </p:txBody>
+      </p:sp>
+      <p:sp>
+        <p:nvSpPr>
+          <p:cNvPr id="19" name="Rounded Rectangle 18"/>
+          <p:cNvSpPr/>
+          <p:nvPr/>
+        </p:nvSpPr>
+        <p:spPr>
+          <a:xfrm>
+            <a:off x="4389120" y="3931920"/>
+            <a:ext cx="3383280" cy="2011680"/>
+          </a:xfrm>
+          <a:prstGeom prst="roundRect">
+            <a:avLst/>
+          </a:prstGeom>
+          <a:solidFill>
+            <a:srgbClr val="FFFFFF"/>
+          </a:solidFill>
+          <a:ln w="19050">
+            <a:solidFill>
+              <a:srgbClr val="E2E8F0"/>
+            </a:solidFill>
+          </a:ln>
+        </p:spPr>
+        <p:style>
+          <a:lnRef idx="1">
+            <a:schemeClr val="accent1"/>
+          </a:lnRef>
+          <a:fillRef idx="3">
+            <a:schemeClr val="accent1"/>
+          </a:fillRef>
+          <a:effectRef idx="2">
+            <a:schemeClr val="accent1"/>
+          </a:effectRef>
+          <a:fontRef idx="minor">
+            <a:schemeClr val="lt1"/>
+          </a:fontRef>
+        </p:style>
+        <p:txBody>
+          <a:bodyPr rtlCol="0" anchor="ctr"/>
+          <a:lstStyle/>
+          <a:p>
+            <a:pPr algn="ctr"/>
+          </a:p>
+        </p:txBody>
+      </p:sp>
+      <p:sp>
+        <p:nvSpPr>
+          <p:cNvPr id="20" name="Oval 19"/>
+          <p:cNvSpPr/>
+          <p:nvPr/>
+        </p:nvSpPr>
+        <p:spPr>
+          <a:xfrm>
+            <a:off x="4663440" y="4206240"/>
+            <a:ext cx="365760" cy="365760"/>
+          </a:xfrm>
+          <a:prstGeom prst="ellipse">
+            <a:avLst/>
+          </a:prstGeom>
+          <a:solidFill>
+            <a:srgbClr val="2563EB"/>
+          </a:solidFill>
+          <a:ln>
+            <a:noFill/>
+          </a:ln>
+        </p:spPr>
+        <p:style>
+          <a:lnRef idx="1">
+            <a:schemeClr val="accent1"/>
+          </a:lnRef>
+          <a:fillRef idx="3">
+            <a:schemeClr val="accent1"/>
+          </a:fillRef>
+          <a:effectRef idx="2">
+            <a:schemeClr val="accent1"/>
+          </a:effectRef>
+          <a:fontRef idx="minor">
+            <a:schemeClr val="lt1"/>
+          </a:fontRef>
+        </p:style>
+        <p:txBody>
+          <a:bodyPr rtlCol="0" anchor="ctr"/>
+          <a:lstStyle/>
+          <a:p>
+            <a:pPr algn="ctr"/>
+          </a:p>
+        </p:txBody>
+      </p:sp>
+      <p:sp>
+        <p:nvSpPr>
+          <p:cNvPr id="21" name="TextBox 20"/>
+          <p:cNvSpPr txBox="1"/>
+          <p:nvPr/>
+        </p:nvSpPr>
+        <p:spPr>
+          <a:xfrm>
+            <a:off x="5120640" y="4160520"/>
+            <a:ext cx="2468880" cy="1554480"/>
+          </a:xfrm>
+          <a:prstGeom prst="rect">
+            <a:avLst/>
+          </a:prstGeom>
+          <a:noFill/>
+        </p:spPr>
+        <p:txBody>
+          <a:bodyPr wrap="square">
+            <a:spAutoFit/>
+          </a:bodyPr>
+          <a:lstStyle/>
+          <a:p>
+            <a:pPr>
+              <a:spcAft>
+                <a:spcPts val="600"/>
+              </a:spcAft>
+              <a:defRPr b="1" sz="1300">
+                <a:solidFill>
+                  <a:srgbClr val="0F172A"/>
+                </a:solidFill>
+              </a:defRPr>
+            </a:pPr>
+            <a:r>
+              <a:t>Secured Tax Exemption</a:t>
+            </a:r>
+          </a:p>
+          <a:p>
+            <a:pPr>
+              <a:defRPr sz="1050">
+                <a:solidFill>
+                  <a:srgbClr val="475569"/>
+                </a:solidFill>
+              </a:defRPr>
+            </a:pPr>
+            <a:r>
+              <a:t>Generates verified Section 80G tax benefit files automatically.</a:t>
+            </a:r>
+          </a:p>
+        </p:txBody>
+      </p:sp>
+      <p:sp>
+        <p:nvSpPr>
+          <p:cNvPr id="22" name="Rounded Rectangle 21"/>
+          <p:cNvSpPr/>
+          <p:nvPr/>
+        </p:nvSpPr>
+        <p:spPr>
+          <a:xfrm>
+            <a:off x="8046720" y="3931920"/>
+            <a:ext cx="3383280" cy="2011680"/>
+          </a:xfrm>
+          <a:prstGeom prst="roundRect">
+            <a:avLst/>
+          </a:prstGeom>
+          <a:solidFill>
+            <a:srgbClr val="FFFFFF"/>
+          </a:solidFill>
+          <a:ln w="19050">
+            <a:solidFill>
+              <a:srgbClr val="E2E8F0"/>
+            </a:solidFill>
+          </a:ln>
+        </p:spPr>
+        <p:style>
+          <a:lnRef idx="1">
+            <a:schemeClr val="accent1"/>
+          </a:lnRef>
+          <a:fillRef idx="3">
+            <a:schemeClr val="accent1"/>
+          </a:fillRef>
+          <a:effectRef idx="2">
+            <a:schemeClr val="accent1"/>
+          </a:effectRef>
+          <a:fontRef idx="minor">
+            <a:schemeClr val="lt1"/>
+          </a:fontRef>
+        </p:style>
+        <p:txBody>
+          <a:bodyPr rtlCol="0" anchor="ctr"/>
+          <a:lstStyle/>
+          <a:p>
+            <a:pPr algn="ctr"/>
+          </a:p>
+        </p:txBody>
+      </p:sp>
+      <p:sp>
+        <p:nvSpPr>
+          <p:cNvPr id="23" name="Oval 22"/>
+          <p:cNvSpPr/>
+          <p:nvPr/>
+        </p:nvSpPr>
+        <p:spPr>
+          <a:xfrm>
+            <a:off x="8321040" y="4206240"/>
+            <a:ext cx="365760" cy="365760"/>
+          </a:xfrm>
+          <a:prstGeom prst="ellipse">
+            <a:avLst/>
+          </a:prstGeom>
+          <a:solidFill>
+            <a:srgbClr val="16A34A"/>
+          </a:solidFill>
+          <a:ln>
+            <a:noFill/>
+          </a:ln>
+        </p:spPr>
+        <p:style>
+          <a:lnRef idx="1">
+            <a:schemeClr val="accent1"/>
+          </a:lnRef>
+          <a:fillRef idx="3">
+            <a:schemeClr val="accent1"/>
+          </a:fillRef>
+          <a:effectRef idx="2">
+            <a:schemeClr val="accent1"/>
+          </a:effectRef>
+          <a:fontRef idx="minor">
+            <a:schemeClr val="lt1"/>
+          </a:fontRef>
+        </p:style>
+        <p:txBody>
+          <a:bodyPr rtlCol="0" anchor="ctr"/>
+          <a:lstStyle/>
+          <a:p>
+            <a:pPr algn="ctr"/>
+          </a:p>
+        </p:txBody>
+      </p:sp>
+      <p:sp>
+        <p:nvSpPr>
+          <p:cNvPr id="24" name="TextBox 23"/>
+          <p:cNvSpPr txBox="1"/>
+          <p:nvPr/>
+        </p:nvSpPr>
+        <p:spPr>
+          <a:xfrm>
+            <a:off x="8778240" y="4160520"/>
+            <a:ext cx="2468880" cy="1554480"/>
+          </a:xfrm>
+          <a:prstGeom prst="rect">
+            <a:avLst/>
+          </a:prstGeom>
+          <a:noFill/>
+        </p:spPr>
+        <p:txBody>
+          <a:bodyPr wrap="square">
+            <a:spAutoFit/>
+          </a:bodyPr>
+          <a:lstStyle/>
+          <a:p>
+            <a:pPr>
+              <a:spcAft>
+                <a:spcPts val="600"/>
+              </a:spcAft>
+              <a:defRPr b="1" sz="1300">
+                <a:solidFill>
+                  <a:srgbClr val="0F172A"/>
+                </a:solidFill>
+              </a:defRPr>
+            </a:pPr>
+            <a:r>
+              <a:t>Community Resilience</a:t>
+            </a:r>
+          </a:p>
+          <a:p>
+            <a:pPr>
+              <a:defRPr sz="1050">
+                <a:solidFill>
+                  <a:srgbClr val="475569"/>
+                </a:solidFill>
+              </a:defRPr>
+            </a:pPr>
+            <a:r>
+              <a:t>Directly feeds underprivileged neighborhoods near donation hubs.</a:t>
             </a:r>
           </a:p>
         </p:txBody>
